--- a/preview_v7/cn/l-cn-bs-u1-3.pptx
+++ b/preview_v7/cn/l-cn-bs-u1-3.pptx
@@ -3142,177 +3142,14 @@
       </p:sp>
       <p:sp>
         <p:nvSpPr>
-          <p:cNvPr id="3" name="TextBox 2"/>
-          <p:cNvSpPr txBox="1"/>
-          <p:nvPr/>
-        </p:nvSpPr>
-        <p:spPr>
-          <a:xfrm>
-            <a:off x="640080" y="640080"/>
-            <a:ext cx="10911535" cy="502920"/>
-          </a:xfrm>
-          <a:prstGeom prst="rect">
-            <a:avLst/>
-          </a:prstGeom>
-          <a:noFill/>
-        </p:spPr>
-        <p:txBody>
-          <a:bodyPr wrap="square" anchor="t" lIns="0" rIns="0" tIns="0" bIns="0">
-            <a:spAutoFit/>
-          </a:bodyPr>
-          <a:lstStyle/>
-          <a:p>
-            <a:pPr algn="l">
-              <a:spcAft>
-                <a:spcPts val="0"/>
-              </a:spcAft>
-            </a:pPr>
-            <a:r>
-              <a:rPr sz="1200" b="1">
-                <a:solidFill>
-                  <a:srgbClr val="B23A2A"/>
-                </a:solidFill>
-                <a:latin typeface="微软雅黑"/>
-                <a:ea typeface="微软雅黑"/>
-                <a:cs typeface="微软雅黑"/>
-              </a:rPr>
-              <a:t>语文 · 必修上册 · 第1单元 青春的价值</a:t>
-            </a:r>
-          </a:p>
-        </p:txBody>
-      </p:sp>
-      <p:sp>
-        <p:nvSpPr>
-          <p:cNvPr id="4" name="Rectangle 3"/>
+          <p:cNvPr id="3" name="Rectangle 2"/>
           <p:cNvSpPr/>
           <p:nvPr/>
         </p:nvSpPr>
         <p:spPr>
           <a:xfrm>
-            <a:off x="640080" y="1207008"/>
-            <a:ext cx="822960" cy="30480"/>
-          </a:xfrm>
-          <a:prstGeom prst="rect">
-            <a:avLst/>
-          </a:prstGeom>
-          <a:solidFill>
-            <a:srgbClr val="B23A2A"/>
-          </a:solidFill>
-          <a:ln>
-            <a:noFill/>
-          </a:ln>
-          <a:effectLst/>
-        </p:spPr>
-        <p:style>
-          <a:lnRef idx="1">
-            <a:schemeClr val="accent1"/>
-          </a:lnRef>
-          <a:fillRef idx="3">
-            <a:schemeClr val="accent1"/>
-          </a:fillRef>
-          <a:effectRef idx="2">
-            <a:schemeClr val="accent1"/>
-          </a:effectRef>
-          <a:fontRef idx="minor">
-            <a:schemeClr val="lt1"/>
-          </a:fontRef>
-        </p:style>
-        <p:txBody>
-          <a:bodyPr rtlCol="0" anchor="ctr"/>
-          <a:lstStyle/>
-          <a:p>
-            <a:pPr algn="ctr"/>
-          </a:p>
-        </p:txBody>
-      </p:sp>
-      <p:sp>
-        <p:nvSpPr>
-          <p:cNvPr id="5" name="TextBox 4"/>
-          <p:cNvSpPr txBox="1"/>
-          <p:nvPr/>
-        </p:nvSpPr>
-        <p:spPr>
-          <a:xfrm>
-            <a:off x="640080" y="1737360"/>
-            <a:ext cx="10911535" cy="2011680"/>
-          </a:xfrm>
-          <a:prstGeom prst="rect">
-            <a:avLst/>
-          </a:prstGeom>
-          <a:noFill/>
-        </p:spPr>
-        <p:txBody>
-          <a:bodyPr wrap="square" anchor="t" lIns="0" rIns="0" tIns="0" bIns="0">
-            <a:spAutoFit/>
-          </a:bodyPr>
-          <a:lstStyle/>
-          <a:p>
-            <a:pPr algn="l">
-              <a:lnSpc>
-                <a:spcPct val="115000"/>
-              </a:lnSpc>
-            </a:pPr>
-            <a:r>
-              <a:rPr sz="4000" b="1">
-                <a:solidFill>
-                  <a:srgbClr val="1C2A33"/>
-                </a:solidFill>
-                <a:latin typeface="楷体"/>
-                <a:ea typeface="楷体"/>
-                <a:cs typeface="楷体"/>
-              </a:rPr>
-              <a:t>立在地球边上放号 / 红烛 群文阅读——现代诗的意象与情感</a:t>
-            </a:r>
-          </a:p>
-        </p:txBody>
-      </p:sp>
-      <p:sp>
-        <p:nvSpPr>
-          <p:cNvPr id="6" name="TextBox 5"/>
-          <p:cNvSpPr txBox="1"/>
-          <p:nvPr/>
-        </p:nvSpPr>
-        <p:spPr>
-          <a:xfrm>
-            <a:off x="640080" y="3840480"/>
-            <a:ext cx="10911535" cy="457200"/>
-          </a:xfrm>
-          <a:prstGeom prst="rect">
-            <a:avLst/>
-          </a:prstGeom>
-          <a:noFill/>
-        </p:spPr>
-        <p:txBody>
-          <a:bodyPr wrap="square" anchor="t" lIns="0" rIns="0" tIns="0" bIns="0">
-            <a:spAutoFit/>
-          </a:bodyPr>
-          <a:lstStyle/>
-          <a:p>
-            <a:pPr algn="l"/>
-            <a:r>
-              <a:rPr sz="1700" b="1">
-                <a:solidFill>
-                  <a:srgbClr val="B23A2A"/>
-                </a:solidFill>
-                <a:latin typeface="微软雅黑"/>
-                <a:ea typeface="微软雅黑"/>
-                <a:cs typeface="微软雅黑"/>
-              </a:rPr>
-              <a:t>群文阅读  ·  第3课时  ·  45分钟</a:t>
-            </a:r>
-          </a:p>
-        </p:txBody>
-      </p:sp>
-      <p:sp>
-        <p:nvSpPr>
-          <p:cNvPr id="7" name="Rectangle 6"/>
-          <p:cNvSpPr/>
-          <p:nvPr/>
-        </p:nvSpPr>
-        <p:spPr>
-          <a:xfrm>
-            <a:off x="640080" y="5394960"/>
-            <a:ext cx="2011680" cy="33020"/>
+            <a:off x="640080" y="1005840"/>
+            <a:ext cx="822960" cy="38100"/>
           </a:xfrm>
           <a:prstGeom prst="rect">
             <a:avLst/>
@@ -3349,14 +3186,14 @@
       </p:sp>
       <p:sp>
         <p:nvSpPr>
-          <p:cNvPr id="8" name="TextBox 7"/>
+          <p:cNvPr id="4" name="TextBox 3"/>
           <p:cNvSpPr txBox="1"/>
           <p:nvPr/>
         </p:nvSpPr>
         <p:spPr>
           <a:xfrm>
-            <a:off x="640080" y="5623560"/>
-            <a:ext cx="10911535" cy="548640"/>
+            <a:off x="640080" y="1188720"/>
+            <a:ext cx="10058400" cy="457200"/>
           </a:xfrm>
           <a:prstGeom prst="rect">
             <a:avLst/>
@@ -3371,22 +3208,396 @@
           <a:p>
             <a:pPr algn="l"/>
             <a:r>
-              <a:rPr sz="1400" b="0">
-                <a:solidFill>
-                  <a:srgbClr val="6B6258"/>
+              <a:rPr sz="1500" b="1">
+                <a:solidFill>
+                  <a:srgbClr val="C8A86B"/>
                 </a:solidFill>
                 <a:latin typeface="微软雅黑"/>
                 <a:ea typeface="微软雅黑"/>
                 <a:cs typeface="微软雅黑"/>
               </a:rPr>
-              <a:t>学习任务群：文学阅读与写作    |    年级：高一</a:t>
-            </a:r>
-          </a:p>
-        </p:txBody>
-      </p:sp>
-      <p:sp>
-        <p:nvSpPr>
-          <p:cNvPr id="9" name="TextBox 8"/>
+              <a:t>必修上 第一单元 · 青春的价值 · 第三课时</a:t>
+            </a:r>
+          </a:p>
+        </p:txBody>
+      </p:sp>
+      <p:sp>
+        <p:nvSpPr>
+          <p:cNvPr id="5" name="TextBox 4"/>
+          <p:cNvSpPr txBox="1"/>
+          <p:nvPr/>
+        </p:nvSpPr>
+        <p:spPr>
+          <a:xfrm>
+            <a:off x="640080" y="1600200"/>
+            <a:ext cx="7315200" cy="1554480"/>
+          </a:xfrm>
+          <a:prstGeom prst="rect">
+            <a:avLst/>
+          </a:prstGeom>
+          <a:noFill/>
+        </p:spPr>
+        <p:txBody>
+          <a:bodyPr wrap="square" anchor="t" lIns="0" rIns="0" tIns="0" bIns="0">
+            <a:spAutoFit/>
+          </a:bodyPr>
+          <a:lstStyle/>
+          <a:p>
+            <a:pPr algn="l"/>
+            <a:r>
+              <a:rPr sz="4600" b="1">
+                <a:solidFill>
+                  <a:srgbClr val="1C2A33"/>
+                </a:solidFill>
+                <a:latin typeface="楷体"/>
+                <a:ea typeface="楷体"/>
+                <a:cs typeface="楷体"/>
+              </a:rPr>
+              <a:t>立在地球边上放号</a:t>
+            </a:r>
+          </a:p>
+        </p:txBody>
+      </p:sp>
+      <p:sp>
+        <p:nvSpPr>
+          <p:cNvPr id="6" name="TextBox 5"/>
+          <p:cNvSpPr txBox="1"/>
+          <p:nvPr/>
+        </p:nvSpPr>
+        <p:spPr>
+          <a:xfrm>
+            <a:off x="640080" y="2743200"/>
+            <a:ext cx="7315200" cy="1005840"/>
+          </a:xfrm>
+          <a:prstGeom prst="rect">
+            <a:avLst/>
+          </a:prstGeom>
+          <a:noFill/>
+        </p:spPr>
+        <p:txBody>
+          <a:bodyPr wrap="square" anchor="t" lIns="0" rIns="0" tIns="0" bIns="0">
+            <a:spAutoFit/>
+          </a:bodyPr>
+          <a:lstStyle/>
+          <a:p>
+            <a:pPr algn="l"/>
+            <a:r>
+              <a:rPr sz="4600" b="1">
+                <a:solidFill>
+                  <a:srgbClr val="B23A2A"/>
+                </a:solidFill>
+                <a:latin typeface="楷体"/>
+                <a:ea typeface="楷体"/>
+                <a:cs typeface="楷体"/>
+              </a:rPr>
+              <a:t>红烛</a:t>
+            </a:r>
+          </a:p>
+        </p:txBody>
+      </p:sp>
+      <p:sp>
+        <p:nvSpPr>
+          <p:cNvPr id="7" name="TextBox 6"/>
+          <p:cNvSpPr txBox="1"/>
+          <p:nvPr/>
+        </p:nvSpPr>
+        <p:spPr>
+          <a:xfrm>
+            <a:off x="640080" y="3794760"/>
+            <a:ext cx="7315200" cy="640080"/>
+          </a:xfrm>
+          <a:prstGeom prst="rect">
+            <a:avLst/>
+          </a:prstGeom>
+          <a:noFill/>
+        </p:spPr>
+        <p:txBody>
+          <a:bodyPr wrap="square" anchor="t" lIns="0" rIns="0" tIns="0" bIns="0">
+            <a:spAutoFit/>
+          </a:bodyPr>
+          <a:lstStyle/>
+          <a:p>
+            <a:pPr algn="l"/>
+            <a:r>
+              <a:rPr sz="2200" b="1">
+                <a:solidFill>
+                  <a:srgbClr val="1C2A33"/>
+                </a:solidFill>
+                <a:latin typeface="楷体"/>
+                <a:ea typeface="楷体"/>
+                <a:cs typeface="楷体"/>
+              </a:rPr>
+              <a:t>群文阅读 · 现代诗的意象与情感</a:t>
+            </a:r>
+          </a:p>
+        </p:txBody>
+      </p:sp>
+      <p:sp>
+        <p:nvSpPr>
+          <p:cNvPr id="8" name="TextBox 7"/>
+          <p:cNvSpPr txBox="1"/>
+          <p:nvPr/>
+        </p:nvSpPr>
+        <p:spPr>
+          <a:xfrm>
+            <a:off x="640080" y="4572000"/>
+            <a:ext cx="7315200" cy="914400"/>
+          </a:xfrm>
+          <a:prstGeom prst="rect">
+            <a:avLst/>
+          </a:prstGeom>
+          <a:noFill/>
+        </p:spPr>
+        <p:txBody>
+          <a:bodyPr wrap="square" anchor="t" lIns="0" rIns="0" tIns="0" bIns="0">
+            <a:spAutoFit/>
+          </a:bodyPr>
+          <a:lstStyle/>
+          <a:p>
+            <a:pPr algn="l">
+              <a:lnSpc>
+                <a:spcPct val="140000"/>
+              </a:lnSpc>
+            </a:pPr>
+            <a:r>
+              <a:rPr sz="1700" b="0">
+                <a:solidFill>
+                  <a:srgbClr val="6B6258"/>
+                </a:solidFill>
+                <a:latin typeface="楷体"/>
+                <a:ea typeface="楷体"/>
+                <a:cs typeface="楷体"/>
+              </a:rPr>
+              <a:t>外放与内敛，青春激情的两种声音。</a:t>
+            </a:r>
+          </a:p>
+        </p:txBody>
+      </p:sp>
+      <p:sp>
+        <p:nvSpPr>
+          <p:cNvPr id="9" name="Rounded Rectangle 8"/>
+          <p:cNvSpPr/>
+          <p:nvPr/>
+        </p:nvSpPr>
+        <p:spPr>
+          <a:xfrm>
+            <a:off x="8321040" y="1463040"/>
+            <a:ext cx="3291840" cy="4480560"/>
+          </a:xfrm>
+          <a:prstGeom prst="roundRect">
+            <a:avLst/>
+          </a:prstGeom>
+          <a:solidFill>
+            <a:srgbClr val="1C2A33"/>
+          </a:solidFill>
+          <a:effectLst/>
+        </p:spPr>
+        <p:style>
+          <a:lnRef idx="1">
+            <a:schemeClr val="accent1"/>
+          </a:lnRef>
+          <a:fillRef idx="3">
+            <a:schemeClr val="accent1"/>
+          </a:fillRef>
+          <a:effectRef idx="2">
+            <a:schemeClr val="accent1"/>
+          </a:effectRef>
+          <a:fontRef idx="minor">
+            <a:schemeClr val="lt1"/>
+          </a:fontRef>
+        </p:style>
+        <p:txBody>
+          <a:bodyPr rtlCol="0" anchor="ctr"/>
+          <a:lstStyle/>
+          <a:p>
+            <a:pPr algn="ctr"/>
+          </a:p>
+        </p:txBody>
+      </p:sp>
+      <p:sp>
+        <p:nvSpPr>
+          <p:cNvPr id="10" name="Rectangle 9"/>
+          <p:cNvSpPr/>
+          <p:nvPr/>
+        </p:nvSpPr>
+        <p:spPr>
+          <a:xfrm>
+            <a:off x="8595360" y="1828800"/>
+            <a:ext cx="54864" cy="330200"/>
+          </a:xfrm>
+          <a:prstGeom prst="rect">
+            <a:avLst/>
+          </a:prstGeom>
+          <a:solidFill>
+            <a:srgbClr val="C8A86B"/>
+          </a:solidFill>
+          <a:ln>
+            <a:noFill/>
+          </a:ln>
+          <a:effectLst/>
+        </p:spPr>
+        <p:style>
+          <a:lnRef idx="1">
+            <a:schemeClr val="accent1"/>
+          </a:lnRef>
+          <a:fillRef idx="3">
+            <a:schemeClr val="accent1"/>
+          </a:fillRef>
+          <a:effectRef idx="2">
+            <a:schemeClr val="accent1"/>
+          </a:effectRef>
+          <a:fontRef idx="minor">
+            <a:schemeClr val="lt1"/>
+          </a:fontRef>
+        </p:style>
+        <p:txBody>
+          <a:bodyPr rtlCol="0" anchor="ctr"/>
+          <a:lstStyle/>
+          <a:p>
+            <a:pPr algn="ctr"/>
+          </a:p>
+        </p:txBody>
+      </p:sp>
+      <p:sp>
+        <p:nvSpPr>
+          <p:cNvPr id="11" name="TextBox 10"/>
+          <p:cNvSpPr txBox="1"/>
+          <p:nvPr/>
+        </p:nvSpPr>
+        <p:spPr>
+          <a:xfrm>
+            <a:off x="8823960" y="1874519"/>
+            <a:ext cx="2560320" cy="457200"/>
+          </a:xfrm>
+          <a:prstGeom prst="rect">
+            <a:avLst/>
+          </a:prstGeom>
+          <a:noFill/>
+        </p:spPr>
+        <p:txBody>
+          <a:bodyPr wrap="square" anchor="t" lIns="0" rIns="0" tIns="0" bIns="0">
+            <a:spAutoFit/>
+          </a:bodyPr>
+          <a:lstStyle/>
+          <a:p>
+            <a:pPr algn="l"/>
+            <a:r>
+              <a:rPr sz="1500" b="1">
+                <a:solidFill>
+                  <a:srgbClr val="C8A86B"/>
+                </a:solidFill>
+                <a:latin typeface="楷体"/>
+                <a:ea typeface="楷体"/>
+                <a:cs typeface="楷体"/>
+              </a:rPr>
+              <a:t>诗里的话</a:t>
+            </a:r>
+          </a:p>
+        </p:txBody>
+      </p:sp>
+      <p:sp>
+        <p:nvSpPr>
+          <p:cNvPr id="12" name="TextBox 11"/>
+          <p:cNvSpPr txBox="1"/>
+          <p:nvPr/>
+        </p:nvSpPr>
+        <p:spPr>
+          <a:xfrm>
+            <a:off x="8823960" y="2423160"/>
+            <a:ext cx="2514600" cy="3291840"/>
+          </a:xfrm>
+          <a:prstGeom prst="rect">
+            <a:avLst/>
+          </a:prstGeom>
+          <a:noFill/>
+        </p:spPr>
+        <p:txBody>
+          <a:bodyPr wrap="square" anchor="t" lIns="0" rIns="0" tIns="0" bIns="0">
+            <a:spAutoFit/>
+          </a:bodyPr>
+          <a:lstStyle/>
+          <a:p>
+            <a:pPr algn="l">
+              <a:lnSpc>
+                <a:spcPct val="150000"/>
+              </a:lnSpc>
+              <a:spcAft>
+                <a:spcPts val="1400"/>
+              </a:spcAft>
+            </a:pPr>
+            <a:r>
+              <a:rPr sz="1800" b="0">
+                <a:solidFill>
+                  <a:srgbClr val="FFFFFF"/>
+                </a:solidFill>
+                <a:latin typeface="楷体"/>
+                <a:ea typeface="楷体"/>
+                <a:cs typeface="楷体"/>
+              </a:rPr>
+              <a:t>不断的毁坏，
+不断的创造，
+不断的努力。</a:t>
+            </a:r>
+          </a:p>
+          <a:p>
+            <a:pPr algn="l">
+              <a:spcAft>
+                <a:spcPts val="1800"/>
+              </a:spcAft>
+            </a:pPr>
+            <a:r>
+              <a:rPr sz="1200" b="0">
+                <a:solidFill>
+                  <a:srgbClr val="E7DFD2"/>
+                </a:solidFill>
+                <a:latin typeface="微软雅黑"/>
+                <a:ea typeface="微软雅黑"/>
+                <a:cs typeface="微软雅黑"/>
+              </a:rPr>
+              <a:t>—— 《立在地球边上放号》</a:t>
+            </a:r>
+          </a:p>
+          <a:p>
+            <a:pPr algn="l">
+              <a:lnSpc>
+                <a:spcPct val="150000"/>
+              </a:lnSpc>
+              <a:spcAft>
+                <a:spcPts val="1400"/>
+              </a:spcAft>
+            </a:pPr>
+            <a:r>
+              <a:rPr sz="1800" b="0">
+                <a:solidFill>
+                  <a:srgbClr val="FFFFFF"/>
+                </a:solidFill>
+                <a:latin typeface="楷体"/>
+                <a:ea typeface="楷体"/>
+                <a:cs typeface="楷体"/>
+              </a:rPr>
+              <a:t>莫问收获，
+但问耕耘。</a:t>
+            </a:r>
+          </a:p>
+          <a:p>
+            <a:pPr algn="l"/>
+            <a:r>
+              <a:rPr sz="1200" b="0">
+                <a:solidFill>
+                  <a:srgbClr val="E7DFD2"/>
+                </a:solidFill>
+                <a:latin typeface="微软雅黑"/>
+                <a:ea typeface="微软雅黑"/>
+                <a:cs typeface="微软雅黑"/>
+              </a:rPr>
+              <a:t>—— 《红烛》</a:t>
+            </a:r>
+          </a:p>
+        </p:txBody>
+      </p:sp>
+      <p:sp>
+        <p:nvSpPr>
+          <p:cNvPr id="13" name="TextBox 12"/>
           <p:cNvSpPr txBox="1"/>
           <p:nvPr/>
         </p:nvSpPr>
@@ -3519,7 +3730,7 @@
                 <a:ea typeface="微软雅黑"/>
                 <a:cs typeface="微软雅黑"/>
               </a:rPr>
-              <a:t>学习目标</a:t>
+              <a:t>本课目标</a:t>
             </a:r>
           </a:p>
         </p:txBody>
@@ -3570,14 +3781,51 @@
       </p:sp>
       <p:sp>
         <p:nvSpPr>
-          <p:cNvPr id="5" name="Rounded Rectangle 4"/>
+          <p:cNvPr id="5" name="TextBox 4"/>
+          <p:cNvSpPr txBox="1"/>
+          <p:nvPr/>
+        </p:nvSpPr>
+        <p:spPr>
+          <a:xfrm>
+            <a:off x="640080" y="1325880"/>
+            <a:ext cx="10058400" cy="640080"/>
+          </a:xfrm>
+          <a:prstGeom prst="rect">
+            <a:avLst/>
+          </a:prstGeom>
+          <a:noFill/>
+        </p:spPr>
+        <p:txBody>
+          <a:bodyPr wrap="square" anchor="t" lIns="0" rIns="0" tIns="0" bIns="0">
+            <a:spAutoFit/>
+          </a:bodyPr>
+          <a:lstStyle/>
+          <a:p>
+            <a:pPr algn="l"/>
+            <a:r>
+              <a:rPr sz="3200" b="1">
+                <a:solidFill>
+                  <a:srgbClr val="1C2A33"/>
+                </a:solidFill>
+                <a:latin typeface="楷体"/>
+                <a:ea typeface="楷体"/>
+                <a:cs typeface="楷体"/>
+              </a:rPr>
+              <a:t>四向学习目标</a:t>
+            </a:r>
+          </a:p>
+        </p:txBody>
+      </p:sp>
+      <p:sp>
+        <p:nvSpPr>
+          <p:cNvPr id="6" name="Rounded Rectangle 5"/>
           <p:cNvSpPr/>
           <p:nvPr/>
         </p:nvSpPr>
         <p:spPr>
           <a:xfrm>
-            <a:off x="640080" y="1417320"/>
-            <a:ext cx="5349240" cy="2057400"/>
+            <a:off x="640080" y="2377440"/>
+            <a:ext cx="2453563" cy="3383280"/>
           </a:xfrm>
           <a:prstGeom prst="roundRect">
             <a:avLst/>
@@ -3585,7 +3833,7 @@
           <a:solidFill>
             <a:srgbClr val="FFFFFF"/>
           </a:solidFill>
-          <a:ln w="22860">
+          <a:ln w="20320">
             <a:solidFill>
               <a:srgbClr val="B23A2A"/>
             </a:solidFill>
@@ -3616,14 +3864,14 @@
       </p:sp>
       <p:sp>
         <p:nvSpPr>
-          <p:cNvPr id="6" name="Oval 5"/>
+          <p:cNvPr id="7" name="Oval 6"/>
           <p:cNvSpPr/>
           <p:nvPr/>
         </p:nvSpPr>
         <p:spPr>
           <a:xfrm>
-            <a:off x="804672" y="1581912"/>
-            <a:ext cx="457200" cy="457200"/>
+            <a:off x="1455381" y="2697480"/>
+            <a:ext cx="822960" cy="822960"/>
           </a:xfrm>
           <a:prstGeom prst="ellipse">
             <a:avLst/>
@@ -3660,14 +3908,14 @@
       </p:sp>
       <p:sp>
         <p:nvSpPr>
-          <p:cNvPr id="7" name="TextBox 6"/>
+          <p:cNvPr id="8" name="TextBox 7"/>
           <p:cNvSpPr txBox="1"/>
           <p:nvPr/>
         </p:nvSpPr>
         <p:spPr>
           <a:xfrm>
-            <a:off x="804672" y="1636776"/>
-            <a:ext cx="457200" cy="384048"/>
+            <a:off x="1455381" y="2880360"/>
+            <a:ext cx="822960" cy="457200"/>
           </a:xfrm>
           <a:prstGeom prst="rect">
             <a:avLst/>
@@ -3682,29 +3930,66 @@
           <a:p>
             <a:pPr algn="ctr"/>
             <a:r>
-              <a:rPr sz="1600" b="1">
+              <a:rPr sz="2400" b="1">
                 <a:solidFill>
                   <a:srgbClr val="FFFFFF"/>
+                </a:solidFill>
+                <a:latin typeface="楷体"/>
+                <a:ea typeface="楷体"/>
+                <a:cs typeface="楷体"/>
+              </a:rPr>
+              <a:t>1</a:t>
+            </a:r>
+          </a:p>
+        </p:txBody>
+      </p:sp>
+      <p:sp>
+        <p:nvSpPr>
+          <p:cNvPr id="9" name="TextBox 8"/>
+          <p:cNvSpPr txBox="1"/>
+          <p:nvPr/>
+        </p:nvSpPr>
+        <p:spPr>
+          <a:xfrm>
+            <a:off x="822960" y="3749040"/>
+            <a:ext cx="2087803" cy="548640"/>
+          </a:xfrm>
+          <a:prstGeom prst="rect">
+            <a:avLst/>
+          </a:prstGeom>
+          <a:noFill/>
+        </p:spPr>
+        <p:txBody>
+          <a:bodyPr wrap="square" anchor="t" lIns="0" rIns="0" tIns="0" bIns="0">
+            <a:spAutoFit/>
+          </a:bodyPr>
+          <a:lstStyle/>
+          <a:p>
+            <a:pPr algn="ctr"/>
+            <a:r>
+              <a:rPr sz="1800" b="1">
+                <a:solidFill>
+                  <a:srgbClr val="B23A2A"/>
                 </a:solidFill>
                 <a:latin typeface="微软雅黑"/>
                 <a:ea typeface="微软雅黑"/>
                 <a:cs typeface="微软雅黑"/>
               </a:rPr>
-              <a:t>1</a:t>
-            </a:r>
-          </a:p>
-        </p:txBody>
-      </p:sp>
-      <p:sp>
-        <p:nvSpPr>
-          <p:cNvPr id="8" name="TextBox 7"/>
+              <a:t>语言能力</a:t>
+            </a:r>
+          </a:p>
+        </p:txBody>
+      </p:sp>
+      <p:sp>
+        <p:nvSpPr>
+          <p:cNvPr id="10" name="TextBox 9"/>
           <p:cNvSpPr txBox="1"/>
           <p:nvPr/>
         </p:nvSpPr>
         <p:spPr>
           <a:xfrm>
-            <a:off x="1371600" y="1527048"/>
-            <a:ext cx="4434840" cy="457200"/>
+            <a:off x="841248" y="4343400"/>
+            <a:ext cx="2051227" cy="1280160"/>
           </a:xfrm>
           <a:prstGeom prst="rect">
             <a:avLst/>
@@ -3717,54 +4002,13 @@
           </a:bodyPr>
           <a:lstStyle/>
           <a:p>
-            <a:pPr algn="l">
+            <a:pPr algn="ctr">
               <a:lnSpc>
-                <a:spcPct val="110000"/>
+                <a:spcPct val="145000"/>
               </a:lnSpc>
             </a:pPr>
             <a:r>
-              <a:rPr sz="1600" b="1">
-                <a:solidFill>
-                  <a:srgbClr val="1C2A33"/>
-                </a:solidFill>
-                <a:latin typeface="微软雅黑"/>
-                <a:ea typeface="微软雅黑"/>
-                <a:cs typeface="微软雅黑"/>
-              </a:rPr>
-              <a:t>目标</a:t>
-            </a:r>
-          </a:p>
-        </p:txBody>
-      </p:sp>
-      <p:sp>
-        <p:nvSpPr>
-          <p:cNvPr id="9" name="TextBox 8"/>
-          <p:cNvSpPr txBox="1"/>
-          <p:nvPr/>
-        </p:nvSpPr>
-        <p:spPr>
-          <a:xfrm>
-            <a:off x="1371600" y="1965960"/>
-            <a:ext cx="4434840" cy="1417320"/>
-          </a:xfrm>
-          <a:prstGeom prst="rect">
-            <a:avLst/>
-          </a:prstGeom>
-          <a:noFill/>
-        </p:spPr>
-        <p:txBody>
-          <a:bodyPr wrap="square" anchor="t" lIns="0" rIns="0" tIns="0" bIns="0">
-            <a:spAutoFit/>
-          </a:bodyPr>
-          <a:lstStyle/>
-          <a:p>
-            <a:pPr algn="l">
-              <a:lnSpc>
-                <a:spcPct val="128000"/>
-              </a:lnSpc>
-            </a:pPr>
-            <a:r>
-              <a:rPr sz="1400" b="0">
+              <a:rPr sz="1300" b="0">
                 <a:solidFill>
                   <a:srgbClr val="1C2A33"/>
                 </a:solidFill>
@@ -3772,21 +4016,21 @@
                 <a:ea typeface="楷体"/>
                 <a:cs typeface="楷体"/>
               </a:rPr>
-              <a:t>语言能力：有感情地朗读两首诗，说出「白云」「洪涛」「红烛」等核心意象的象征义。</a:t>
-            </a:r>
-          </a:p>
-        </p:txBody>
-      </p:sp>
-      <p:sp>
-        <p:nvSpPr>
-          <p:cNvPr id="10" name="Rounded Rectangle 9"/>
+              <a:t>有感情地朗读两首诗，说出「白云」「洪涛」「红烛」等核心意象的象征义。</a:t>
+            </a:r>
+          </a:p>
+        </p:txBody>
+      </p:sp>
+      <p:sp>
+        <p:nvSpPr>
+          <p:cNvPr id="11" name="Rounded Rectangle 10"/>
           <p:cNvSpPr/>
           <p:nvPr/>
         </p:nvSpPr>
         <p:spPr>
           <a:xfrm>
-            <a:off x="6263640" y="1417320"/>
-            <a:ext cx="5349240" cy="2057400"/>
+            <a:off x="3459403" y="2377440"/>
+            <a:ext cx="2453563" cy="3383280"/>
           </a:xfrm>
           <a:prstGeom prst="roundRect">
             <a:avLst/>
@@ -3794,9 +4038,9 @@
           <a:solidFill>
             <a:srgbClr val="FFFFFF"/>
           </a:solidFill>
-          <a:ln w="22860">
+          <a:ln w="20320">
             <a:solidFill>
-              <a:srgbClr val="B23A2A"/>
+              <a:srgbClr val="2E7D6B"/>
             </a:solidFill>
           </a:ln>
           <a:effectLst/>
@@ -3825,20 +4069,20 @@
       </p:sp>
       <p:sp>
         <p:nvSpPr>
-          <p:cNvPr id="11" name="Oval 10"/>
+          <p:cNvPr id="12" name="Oval 11"/>
           <p:cNvSpPr/>
           <p:nvPr/>
         </p:nvSpPr>
         <p:spPr>
           <a:xfrm>
-            <a:off x="6428232" y="1581912"/>
-            <a:ext cx="457200" cy="457200"/>
+            <a:off x="4274705" y="2697480"/>
+            <a:ext cx="822960" cy="822960"/>
           </a:xfrm>
           <a:prstGeom prst="ellipse">
             <a:avLst/>
           </a:prstGeom>
           <a:solidFill>
-            <a:srgbClr val="B23A2A"/>
+            <a:srgbClr val="2E7D6B"/>
           </a:solidFill>
           <a:ln>
             <a:noFill/>
@@ -3869,14 +4113,14 @@
       </p:sp>
       <p:sp>
         <p:nvSpPr>
-          <p:cNvPr id="12" name="TextBox 11"/>
+          <p:cNvPr id="13" name="TextBox 12"/>
           <p:cNvSpPr txBox="1"/>
           <p:nvPr/>
         </p:nvSpPr>
         <p:spPr>
           <a:xfrm>
-            <a:off x="6428232" y="1636776"/>
-            <a:ext cx="457200" cy="384048"/>
+            <a:off x="4274705" y="2880360"/>
+            <a:ext cx="822960" cy="457200"/>
           </a:xfrm>
           <a:prstGeom prst="rect">
             <a:avLst/>
@@ -3891,29 +4135,66 @@
           <a:p>
             <a:pPr algn="ctr"/>
             <a:r>
-              <a:rPr sz="1600" b="1">
+              <a:rPr sz="2400" b="1">
                 <a:solidFill>
                   <a:srgbClr val="FFFFFF"/>
+                </a:solidFill>
+                <a:latin typeface="楷体"/>
+                <a:ea typeface="楷体"/>
+                <a:cs typeface="楷体"/>
+              </a:rPr>
+              <a:t>2</a:t>
+            </a:r>
+          </a:p>
+        </p:txBody>
+      </p:sp>
+      <p:sp>
+        <p:nvSpPr>
+          <p:cNvPr id="14" name="TextBox 13"/>
+          <p:cNvSpPr txBox="1"/>
+          <p:nvPr/>
+        </p:nvSpPr>
+        <p:spPr>
+          <a:xfrm>
+            <a:off x="3642283" y="3749040"/>
+            <a:ext cx="2087803" cy="548640"/>
+          </a:xfrm>
+          <a:prstGeom prst="rect">
+            <a:avLst/>
+          </a:prstGeom>
+          <a:noFill/>
+        </p:spPr>
+        <p:txBody>
+          <a:bodyPr wrap="square" anchor="t" lIns="0" rIns="0" tIns="0" bIns="0">
+            <a:spAutoFit/>
+          </a:bodyPr>
+          <a:lstStyle/>
+          <a:p>
+            <a:pPr algn="ctr"/>
+            <a:r>
+              <a:rPr sz="1800" b="1">
+                <a:solidFill>
+                  <a:srgbClr val="2E7D6B"/>
                 </a:solidFill>
                 <a:latin typeface="微软雅黑"/>
                 <a:ea typeface="微软雅黑"/>
                 <a:cs typeface="微软雅黑"/>
               </a:rPr>
-              <a:t>2</a:t>
-            </a:r>
-          </a:p>
-        </p:txBody>
-      </p:sp>
-      <p:sp>
-        <p:nvSpPr>
-          <p:cNvPr id="13" name="TextBox 12"/>
+              <a:t>文化意识</a:t>
+            </a:r>
+          </a:p>
+        </p:txBody>
+      </p:sp>
+      <p:sp>
+        <p:nvSpPr>
+          <p:cNvPr id="15" name="TextBox 14"/>
           <p:cNvSpPr txBox="1"/>
           <p:nvPr/>
         </p:nvSpPr>
         <p:spPr>
           <a:xfrm>
-            <a:off x="6995160" y="1527048"/>
-            <a:ext cx="4434840" cy="457200"/>
+            <a:off x="3660571" y="4343400"/>
+            <a:ext cx="2051227" cy="1280160"/>
           </a:xfrm>
           <a:prstGeom prst="rect">
             <a:avLst/>
@@ -3926,54 +4207,13 @@
           </a:bodyPr>
           <a:lstStyle/>
           <a:p>
-            <a:pPr algn="l">
+            <a:pPr algn="ctr">
               <a:lnSpc>
-                <a:spcPct val="110000"/>
+                <a:spcPct val="145000"/>
               </a:lnSpc>
             </a:pPr>
             <a:r>
-              <a:rPr sz="1600" b="1">
-                <a:solidFill>
-                  <a:srgbClr val="1C2A33"/>
-                </a:solidFill>
-                <a:latin typeface="微软雅黑"/>
-                <a:ea typeface="微软雅黑"/>
-                <a:cs typeface="微软雅黑"/>
-              </a:rPr>
-              <a:t>目标</a:t>
-            </a:r>
-          </a:p>
-        </p:txBody>
-      </p:sp>
-      <p:sp>
-        <p:nvSpPr>
-          <p:cNvPr id="14" name="TextBox 13"/>
-          <p:cNvSpPr txBox="1"/>
-          <p:nvPr/>
-        </p:nvSpPr>
-        <p:spPr>
-          <a:xfrm>
-            <a:off x="6995160" y="1965960"/>
-            <a:ext cx="4434840" cy="1417320"/>
-          </a:xfrm>
-          <a:prstGeom prst="rect">
-            <a:avLst/>
-          </a:prstGeom>
-          <a:noFill/>
-        </p:spPr>
-        <p:txBody>
-          <a:bodyPr wrap="square" anchor="t" lIns="0" rIns="0" tIns="0" bIns="0">
-            <a:spAutoFit/>
-          </a:bodyPr>
-          <a:lstStyle/>
-          <a:p>
-            <a:pPr algn="l">
-              <a:lnSpc>
-                <a:spcPct val="128000"/>
-              </a:lnSpc>
-            </a:pPr>
-            <a:r>
-              <a:rPr sz="1400" b="0">
+              <a:rPr sz="1300" b="0">
                 <a:solidFill>
                   <a:srgbClr val="1C2A33"/>
                 </a:solidFill>
@@ -3981,21 +4221,21 @@
                 <a:ea typeface="楷体"/>
                 <a:cs typeface="楷体"/>
               </a:rPr>
-              <a:t>文化意识：理解五四时期青年「破旧立新」的时代精神，体会诗人的社会责任感。</a:t>
-            </a:r>
-          </a:p>
-        </p:txBody>
-      </p:sp>
-      <p:sp>
-        <p:nvSpPr>
-          <p:cNvPr id="15" name="Rounded Rectangle 14"/>
+              <a:t>理解五四时期青年「破旧立新」的时代精神，体会诗人的社会责任感。</a:t>
+            </a:r>
+          </a:p>
+        </p:txBody>
+      </p:sp>
+      <p:sp>
+        <p:nvSpPr>
+          <p:cNvPr id="16" name="Rounded Rectangle 15"/>
           <p:cNvSpPr/>
           <p:nvPr/>
         </p:nvSpPr>
         <p:spPr>
           <a:xfrm>
-            <a:off x="640080" y="3703320"/>
-            <a:ext cx="5349240" cy="2057400"/>
+            <a:off x="6278727" y="2377440"/>
+            <a:ext cx="2453563" cy="3383280"/>
           </a:xfrm>
           <a:prstGeom prst="roundRect">
             <a:avLst/>
@@ -4003,9 +4243,9 @@
           <a:solidFill>
             <a:srgbClr val="FFFFFF"/>
           </a:solidFill>
-          <a:ln w="22860">
+          <a:ln w="20320">
             <a:solidFill>
-              <a:srgbClr val="B23A2A"/>
+              <a:srgbClr val="C8A86B"/>
             </a:solidFill>
           </a:ln>
           <a:effectLst/>
@@ -4034,20 +4274,20 @@
       </p:sp>
       <p:sp>
         <p:nvSpPr>
-          <p:cNvPr id="16" name="Oval 15"/>
+          <p:cNvPr id="17" name="Oval 16"/>
           <p:cNvSpPr/>
           <p:nvPr/>
         </p:nvSpPr>
         <p:spPr>
           <a:xfrm>
-            <a:off x="804672" y="3867912"/>
-            <a:ext cx="457200" cy="457200"/>
+            <a:off x="7094029" y="2697480"/>
+            <a:ext cx="822960" cy="822960"/>
           </a:xfrm>
           <a:prstGeom prst="ellipse">
             <a:avLst/>
           </a:prstGeom>
           <a:solidFill>
-            <a:srgbClr val="B23A2A"/>
+            <a:srgbClr val="C8A86B"/>
           </a:solidFill>
           <a:ln>
             <a:noFill/>
@@ -4078,14 +4318,14 @@
       </p:sp>
       <p:sp>
         <p:nvSpPr>
-          <p:cNvPr id="17" name="TextBox 16"/>
+          <p:cNvPr id="18" name="TextBox 17"/>
           <p:cNvSpPr txBox="1"/>
           <p:nvPr/>
         </p:nvSpPr>
         <p:spPr>
           <a:xfrm>
-            <a:off x="804672" y="3922776"/>
-            <a:ext cx="457200" cy="384048"/>
+            <a:off x="7094029" y="2880360"/>
+            <a:ext cx="822960" cy="457200"/>
           </a:xfrm>
           <a:prstGeom prst="rect">
             <a:avLst/>
@@ -4100,29 +4340,66 @@
           <a:p>
             <a:pPr algn="ctr"/>
             <a:r>
-              <a:rPr sz="1600" b="1">
+              <a:rPr sz="2400" b="1">
                 <a:solidFill>
                   <a:srgbClr val="FFFFFF"/>
+                </a:solidFill>
+                <a:latin typeface="楷体"/>
+                <a:ea typeface="楷体"/>
+                <a:cs typeface="楷体"/>
+              </a:rPr>
+              <a:t>3</a:t>
+            </a:r>
+          </a:p>
+        </p:txBody>
+      </p:sp>
+      <p:sp>
+        <p:nvSpPr>
+          <p:cNvPr id="19" name="TextBox 18"/>
+          <p:cNvSpPr txBox="1"/>
+          <p:nvPr/>
+        </p:nvSpPr>
+        <p:spPr>
+          <a:xfrm>
+            <a:off x="6461607" y="3749040"/>
+            <a:ext cx="2087803" cy="548640"/>
+          </a:xfrm>
+          <a:prstGeom prst="rect">
+            <a:avLst/>
+          </a:prstGeom>
+          <a:noFill/>
+        </p:spPr>
+        <p:txBody>
+          <a:bodyPr wrap="square" anchor="t" lIns="0" rIns="0" tIns="0" bIns="0">
+            <a:spAutoFit/>
+          </a:bodyPr>
+          <a:lstStyle/>
+          <a:p>
+            <a:pPr algn="ctr"/>
+            <a:r>
+              <a:rPr sz="1800" b="1">
+                <a:solidFill>
+                  <a:srgbClr val="C8A86B"/>
                 </a:solidFill>
                 <a:latin typeface="微软雅黑"/>
                 <a:ea typeface="微软雅黑"/>
                 <a:cs typeface="微软雅黑"/>
               </a:rPr>
-              <a:t>3</a:t>
-            </a:r>
-          </a:p>
-        </p:txBody>
-      </p:sp>
-      <p:sp>
-        <p:nvSpPr>
-          <p:cNvPr id="18" name="TextBox 17"/>
+              <a:t>思维品质</a:t>
+            </a:r>
+          </a:p>
+        </p:txBody>
+      </p:sp>
+      <p:sp>
+        <p:nvSpPr>
+          <p:cNvPr id="20" name="TextBox 19"/>
           <p:cNvSpPr txBox="1"/>
           <p:nvPr/>
         </p:nvSpPr>
         <p:spPr>
           <a:xfrm>
-            <a:off x="1371600" y="3813048"/>
-            <a:ext cx="4434840" cy="457200"/>
+            <a:off x="6479895" y="4343400"/>
+            <a:ext cx="2051227" cy="1280160"/>
           </a:xfrm>
           <a:prstGeom prst="rect">
             <a:avLst/>
@@ -4135,54 +4412,13 @@
           </a:bodyPr>
           <a:lstStyle/>
           <a:p>
-            <a:pPr algn="l">
+            <a:pPr algn="ctr">
               <a:lnSpc>
-                <a:spcPct val="110000"/>
+                <a:spcPct val="145000"/>
               </a:lnSpc>
             </a:pPr>
             <a:r>
-              <a:rPr sz="1600" b="1">
-                <a:solidFill>
-                  <a:srgbClr val="1C2A33"/>
-                </a:solidFill>
-                <a:latin typeface="微软雅黑"/>
-                <a:ea typeface="微软雅黑"/>
-                <a:cs typeface="微软雅黑"/>
-              </a:rPr>
-              <a:t>目标</a:t>
-            </a:r>
-          </a:p>
-        </p:txBody>
-      </p:sp>
-      <p:sp>
-        <p:nvSpPr>
-          <p:cNvPr id="19" name="TextBox 18"/>
-          <p:cNvSpPr txBox="1"/>
-          <p:nvPr/>
-        </p:nvSpPr>
-        <p:spPr>
-          <a:xfrm>
-            <a:off x="1371600" y="4251960"/>
-            <a:ext cx="4434840" cy="1417320"/>
-          </a:xfrm>
-          <a:prstGeom prst="rect">
-            <a:avLst/>
-          </a:prstGeom>
-          <a:noFill/>
-        </p:spPr>
-        <p:txBody>
-          <a:bodyPr wrap="square" anchor="t" lIns="0" rIns="0" tIns="0" bIns="0">
-            <a:spAutoFit/>
-          </a:bodyPr>
-          <a:lstStyle/>
-          <a:p>
-            <a:pPr algn="l">
-              <a:lnSpc>
-                <a:spcPct val="128000"/>
-              </a:lnSpc>
-            </a:pPr>
-            <a:r>
-              <a:rPr sz="1400" b="0">
+              <a:rPr sz="1300" b="0">
                 <a:solidFill>
                   <a:srgbClr val="1C2A33"/>
                 </a:solidFill>
@@ -4190,21 +4426,21 @@
                 <a:ea typeface="楷体"/>
                 <a:cs typeface="楷体"/>
               </a:rPr>
-              <a:t>思维品质：通过比较两首诗「外放—内敛」的不同抒情方式，培养对比分析的思维能力。</a:t>
-            </a:r>
-          </a:p>
-        </p:txBody>
-      </p:sp>
-      <p:sp>
-        <p:nvSpPr>
-          <p:cNvPr id="20" name="Rounded Rectangle 19"/>
+              <a:t>比较两首诗「外放—内敛」的不同抒情方式，培养对比分析的思维能力。</a:t>
+            </a:r>
+          </a:p>
+        </p:txBody>
+      </p:sp>
+      <p:sp>
+        <p:nvSpPr>
+          <p:cNvPr id="21" name="Rounded Rectangle 20"/>
           <p:cNvSpPr/>
           <p:nvPr/>
         </p:nvSpPr>
         <p:spPr>
           <a:xfrm>
-            <a:off x="6263640" y="3703320"/>
-            <a:ext cx="5349240" cy="2057400"/>
+            <a:off x="9098051" y="2377440"/>
+            <a:ext cx="2453563" cy="3383280"/>
           </a:xfrm>
           <a:prstGeom prst="roundRect">
             <a:avLst/>
@@ -4212,9 +4448,9 @@
           <a:solidFill>
             <a:srgbClr val="FFFFFF"/>
           </a:solidFill>
-          <a:ln w="22860">
+          <a:ln w="20320">
             <a:solidFill>
-              <a:srgbClr val="B23A2A"/>
+              <a:srgbClr val="6B6258"/>
             </a:solidFill>
           </a:ln>
           <a:effectLst/>
@@ -4243,20 +4479,20 @@
       </p:sp>
       <p:sp>
         <p:nvSpPr>
-          <p:cNvPr id="21" name="Oval 20"/>
+          <p:cNvPr id="22" name="Oval 21"/>
           <p:cNvSpPr/>
           <p:nvPr/>
         </p:nvSpPr>
         <p:spPr>
           <a:xfrm>
-            <a:off x="6428232" y="3867912"/>
-            <a:ext cx="457200" cy="457200"/>
+            <a:off x="9913353" y="2697480"/>
+            <a:ext cx="822960" cy="822960"/>
           </a:xfrm>
           <a:prstGeom prst="ellipse">
             <a:avLst/>
           </a:prstGeom>
           <a:solidFill>
-            <a:srgbClr val="B23A2A"/>
+            <a:srgbClr val="6B6258"/>
           </a:solidFill>
           <a:ln>
             <a:noFill/>
@@ -4287,14 +4523,14 @@
       </p:sp>
       <p:sp>
         <p:nvSpPr>
-          <p:cNvPr id="22" name="TextBox 21"/>
+          <p:cNvPr id="23" name="TextBox 22"/>
           <p:cNvSpPr txBox="1"/>
           <p:nvPr/>
         </p:nvSpPr>
         <p:spPr>
           <a:xfrm>
-            <a:off x="6428232" y="3922776"/>
-            <a:ext cx="457200" cy="384048"/>
+            <a:off x="9913353" y="2880360"/>
+            <a:ext cx="822960" cy="457200"/>
           </a:xfrm>
           <a:prstGeom prst="rect">
             <a:avLst/>
@@ -4309,29 +4545,66 @@
           <a:p>
             <a:pPr algn="ctr"/>
             <a:r>
-              <a:rPr sz="1600" b="1">
+              <a:rPr sz="2400" b="1">
                 <a:solidFill>
                   <a:srgbClr val="FFFFFF"/>
+                </a:solidFill>
+                <a:latin typeface="楷体"/>
+                <a:ea typeface="楷体"/>
+                <a:cs typeface="楷体"/>
+              </a:rPr>
+              <a:t>4</a:t>
+            </a:r>
+          </a:p>
+        </p:txBody>
+      </p:sp>
+      <p:sp>
+        <p:nvSpPr>
+          <p:cNvPr id="24" name="TextBox 23"/>
+          <p:cNvSpPr txBox="1"/>
+          <p:nvPr/>
+        </p:nvSpPr>
+        <p:spPr>
+          <a:xfrm>
+            <a:off x="9280931" y="3749040"/>
+            <a:ext cx="2087803" cy="548640"/>
+          </a:xfrm>
+          <a:prstGeom prst="rect">
+            <a:avLst/>
+          </a:prstGeom>
+          <a:noFill/>
+        </p:spPr>
+        <p:txBody>
+          <a:bodyPr wrap="square" anchor="t" lIns="0" rIns="0" tIns="0" bIns="0">
+            <a:spAutoFit/>
+          </a:bodyPr>
+          <a:lstStyle/>
+          <a:p>
+            <a:pPr algn="ctr"/>
+            <a:r>
+              <a:rPr sz="1800" b="1">
+                <a:solidFill>
+                  <a:srgbClr val="6B6258"/>
                 </a:solidFill>
                 <a:latin typeface="微软雅黑"/>
                 <a:ea typeface="微软雅黑"/>
                 <a:cs typeface="微软雅黑"/>
               </a:rPr>
-              <a:t>4</a:t>
-            </a:r>
-          </a:p>
-        </p:txBody>
-      </p:sp>
-      <p:sp>
-        <p:nvSpPr>
-          <p:cNvPr id="23" name="TextBox 22"/>
+              <a:t>学习能力</a:t>
+            </a:r>
+          </a:p>
+        </p:txBody>
+      </p:sp>
+      <p:sp>
+        <p:nvSpPr>
+          <p:cNvPr id="25" name="TextBox 24"/>
           <p:cNvSpPr txBox="1"/>
           <p:nvPr/>
         </p:nvSpPr>
         <p:spPr>
           <a:xfrm>
-            <a:off x="6995160" y="3813048"/>
-            <a:ext cx="4434840" cy="457200"/>
+            <a:off x="9299219" y="4343400"/>
+            <a:ext cx="2051227" cy="1280160"/>
           </a:xfrm>
           <a:prstGeom prst="rect">
             <a:avLst/>
@@ -4344,54 +4617,13 @@
           </a:bodyPr>
           <a:lstStyle/>
           <a:p>
-            <a:pPr algn="l">
+            <a:pPr algn="ctr">
               <a:lnSpc>
-                <a:spcPct val="110000"/>
+                <a:spcPct val="145000"/>
               </a:lnSpc>
             </a:pPr>
             <a:r>
-              <a:rPr sz="1600" b="1">
-                <a:solidFill>
-                  <a:srgbClr val="1C2A33"/>
-                </a:solidFill>
-                <a:latin typeface="微软雅黑"/>
-                <a:ea typeface="微软雅黑"/>
-                <a:cs typeface="微软雅黑"/>
-              </a:rPr>
-              <a:t>目标</a:t>
-            </a:r>
-          </a:p>
-        </p:txBody>
-      </p:sp>
-      <p:sp>
-        <p:nvSpPr>
-          <p:cNvPr id="24" name="TextBox 23"/>
-          <p:cNvSpPr txBox="1"/>
-          <p:nvPr/>
-        </p:nvSpPr>
-        <p:spPr>
-          <a:xfrm>
-            <a:off x="6995160" y="4251960"/>
-            <a:ext cx="4434840" cy="1417320"/>
-          </a:xfrm>
-          <a:prstGeom prst="rect">
-            <a:avLst/>
-          </a:prstGeom>
-          <a:noFill/>
-        </p:spPr>
-        <p:txBody>
-          <a:bodyPr wrap="square" anchor="t" lIns="0" rIns="0" tIns="0" bIns="0">
-            <a:spAutoFit/>
-          </a:bodyPr>
-          <a:lstStyle/>
-          <a:p>
-            <a:pPr algn="l">
-              <a:lnSpc>
-                <a:spcPct val="128000"/>
-              </a:lnSpc>
-            </a:pPr>
-            <a:r>
-              <a:rPr sz="1400" b="0">
+              <a:rPr sz="1300" b="0">
                 <a:solidFill>
                   <a:srgbClr val="1C2A33"/>
                 </a:solidFill>
@@ -4399,14 +4631,14 @@
                 <a:ea typeface="楷体"/>
                 <a:cs typeface="楷体"/>
               </a:rPr>
-              <a:t>学习能力：掌握「意象→象征→情感」的现代诗研读路径，能迁移到其他现代诗阅读。</a:t>
-            </a:r>
-          </a:p>
-        </p:txBody>
-      </p:sp>
-      <p:sp>
-        <p:nvSpPr>
-          <p:cNvPr id="25" name="TextBox 24"/>
+              <a:t>掌握「意象→象征→情感」的现代诗研读路径，能迁移到其他现代诗阅读。</a:t>
+            </a:r>
+          </a:p>
+        </p:txBody>
+      </p:sp>
+      <p:sp>
+        <p:nvSpPr>
+          <p:cNvPr id="26" name="TextBox 25"/>
           <p:cNvSpPr txBox="1"/>
           <p:nvPr/>
         </p:nvSpPr>
@@ -4533,13 +4765,13 @@
             <a:r>
               <a:rPr sz="1300" b="1">
                 <a:solidFill>
-                  <a:srgbClr val="2E7D6B"/>
+                  <a:srgbClr val="B23A2A"/>
                 </a:solidFill>
                 <a:latin typeface="微软雅黑"/>
                 <a:ea typeface="微软雅黑"/>
                 <a:cs typeface="微软雅黑"/>
               </a:rPr>
-              <a:t>课文背景</a:t>
+              <a:t>背景 · 权威调研</a:t>
             </a:r>
           </a:p>
         </p:txBody>
@@ -4559,7 +4791,7 @@
             <a:avLst/>
           </a:prstGeom>
           <a:solidFill>
-            <a:srgbClr val="2E7D6B"/>
+            <a:srgbClr val="B23A2A"/>
           </a:solidFill>
           <a:ln>
             <a:noFill/>
@@ -4596,8 +4828,331 @@
         </p:nvSpPr>
         <p:spPr>
           <a:xfrm>
-            <a:off x="640080" y="1508760"/>
-            <a:ext cx="6766560" cy="4572000"/>
+            <a:off x="640080" y="1325880"/>
+            <a:ext cx="10515600" cy="640080"/>
+          </a:xfrm>
+          <a:prstGeom prst="rect">
+            <a:avLst/>
+          </a:prstGeom>
+          <a:noFill/>
+        </p:spPr>
+        <p:txBody>
+          <a:bodyPr wrap="square" anchor="t" lIns="0" rIns="0" tIns="0" bIns="0">
+            <a:spAutoFit/>
+          </a:bodyPr>
+          <a:lstStyle/>
+          <a:p>
+            <a:pPr algn="l"/>
+            <a:r>
+              <a:rPr sz="3000" b="1">
+                <a:solidFill>
+                  <a:srgbClr val="1C2A33"/>
+                </a:solidFill>
+                <a:latin typeface="楷体"/>
+                <a:ea typeface="楷体"/>
+                <a:cs typeface="楷体"/>
+              </a:rPr>
+              <a:t>两首诗，一个时代</a:t>
+            </a:r>
+          </a:p>
+        </p:txBody>
+      </p:sp>
+      <p:sp>
+        <p:nvSpPr>
+          <p:cNvPr id="6" name="Rounded Rectangle 5"/>
+          <p:cNvSpPr/>
+          <p:nvPr/>
+        </p:nvSpPr>
+        <p:spPr>
+          <a:xfrm>
+            <a:off x="640080" y="2011680"/>
+            <a:ext cx="5029200" cy="3977639"/>
+          </a:xfrm>
+          <a:prstGeom prst="roundRect">
+            <a:avLst/>
+          </a:prstGeom>
+          <a:solidFill>
+            <a:srgbClr val="1C2A33"/>
+          </a:solidFill>
+          <a:effectLst/>
+        </p:spPr>
+        <p:style>
+          <a:lnRef idx="1">
+            <a:schemeClr val="accent1"/>
+          </a:lnRef>
+          <a:fillRef idx="3">
+            <a:schemeClr val="accent1"/>
+          </a:fillRef>
+          <a:effectRef idx="2">
+            <a:schemeClr val="accent1"/>
+          </a:effectRef>
+          <a:fontRef idx="minor">
+            <a:schemeClr val="lt1"/>
+          </a:fontRef>
+        </p:style>
+        <p:txBody>
+          <a:bodyPr rtlCol="0" anchor="ctr"/>
+          <a:lstStyle/>
+          <a:p>
+            <a:pPr algn="ctr"/>
+          </a:p>
+        </p:txBody>
+      </p:sp>
+      <p:sp>
+        <p:nvSpPr>
+          <p:cNvPr id="7" name="TextBox 6"/>
+          <p:cNvSpPr txBox="1"/>
+          <p:nvPr/>
+        </p:nvSpPr>
+        <p:spPr>
+          <a:xfrm>
+            <a:off x="914400" y="2194560"/>
+            <a:ext cx="4480560" cy="457200"/>
+          </a:xfrm>
+          <a:prstGeom prst="rect">
+            <a:avLst/>
+          </a:prstGeom>
+          <a:noFill/>
+        </p:spPr>
+        <p:txBody>
+          <a:bodyPr wrap="square" anchor="t" lIns="0" rIns="0" tIns="0" bIns="0">
+            <a:spAutoFit/>
+          </a:bodyPr>
+          <a:lstStyle/>
+          <a:p>
+            <a:pPr algn="l"/>
+            <a:r>
+              <a:rPr sz="1600" b="1">
+                <a:solidFill>
+                  <a:srgbClr val="C8A86B"/>
+                </a:solidFill>
+                <a:latin typeface="楷体"/>
+                <a:ea typeface="楷体"/>
+                <a:cs typeface="楷体"/>
+              </a:rPr>
+              <a:t>写作坐标</a:t>
+            </a:r>
+          </a:p>
+        </p:txBody>
+      </p:sp>
+      <p:sp>
+        <p:nvSpPr>
+          <p:cNvPr id="8" name="TextBox 7"/>
+          <p:cNvSpPr txBox="1"/>
+          <p:nvPr/>
+        </p:nvSpPr>
+        <p:spPr>
+          <a:xfrm>
+            <a:off x="914400" y="2697480"/>
+            <a:ext cx="4480560" cy="3108960"/>
+          </a:xfrm>
+          <a:prstGeom prst="rect">
+            <a:avLst/>
+          </a:prstGeom>
+          <a:noFill/>
+        </p:spPr>
+        <p:txBody>
+          <a:bodyPr wrap="square" anchor="t" lIns="0" rIns="0" tIns="0" bIns="0">
+            <a:spAutoFit/>
+          </a:bodyPr>
+          <a:lstStyle/>
+          <a:p>
+            <a:pPr algn="l">
+              <a:lnSpc>
+                <a:spcPct val="140000"/>
+              </a:lnSpc>
+              <a:spcAft>
+                <a:spcPts val="300"/>
+              </a:spcAft>
+            </a:pPr>
+            <a:r>
+              <a:rPr sz="1400" b="1">
+                <a:solidFill>
+                  <a:srgbClr val="FFFFFF"/>
+                </a:solidFill>
+                <a:latin typeface="微软雅黑"/>
+                <a:ea typeface="微软雅黑"/>
+                <a:cs typeface="微软雅黑"/>
+              </a:rPr>
+              <a:t>《立在地球边上放号》</a:t>
+            </a:r>
+          </a:p>
+          <a:p>
+            <a:pPr algn="l">
+              <a:lnSpc>
+                <a:spcPct val="145000"/>
+              </a:lnSpc>
+              <a:spcAft>
+                <a:spcPts val="1000"/>
+              </a:spcAft>
+            </a:pPr>
+            <a:r>
+              <a:rPr sz="1250" b="0">
+                <a:solidFill>
+                  <a:srgbClr val="E7DFD2"/>
+                </a:solidFill>
+                <a:latin typeface="楷体"/>
+                <a:ea typeface="楷体"/>
+                <a:cs typeface="楷体"/>
+              </a:rPr>
+              <a:t>写于 1919 年 9—10 月，收入诗集《女神》（1921）。时郭沫若留日，于横滨海岸面对大洋，感五四浪潮而作。</a:t>
+            </a:r>
+          </a:p>
+          <a:p>
+            <a:pPr algn="l">
+              <a:lnSpc>
+                <a:spcPct val="140000"/>
+              </a:lnSpc>
+              <a:spcAft>
+                <a:spcPts val="300"/>
+              </a:spcAft>
+            </a:pPr>
+            <a:r>
+              <a:rPr sz="1400" b="1">
+                <a:solidFill>
+                  <a:srgbClr val="FFFFFF"/>
+                </a:solidFill>
+                <a:latin typeface="微软雅黑"/>
+                <a:ea typeface="微软雅黑"/>
+                <a:cs typeface="微软雅黑"/>
+              </a:rPr>
+              <a:t>《红烛》</a:t>
+            </a:r>
+          </a:p>
+          <a:p>
+            <a:pPr algn="l">
+              <a:lnSpc>
+                <a:spcPct val="145000"/>
+              </a:lnSpc>
+              <a:spcAft>
+                <a:spcPts val="1000"/>
+              </a:spcAft>
+            </a:pPr>
+            <a:r>
+              <a:rPr sz="1250" b="0">
+                <a:solidFill>
+                  <a:srgbClr val="E7DFD2"/>
+                </a:solidFill>
+                <a:latin typeface="楷体"/>
+                <a:ea typeface="楷体"/>
+                <a:cs typeface="楷体"/>
+              </a:rPr>
+              <a:t>闻一多同名诗集（1923）的序诗，以一支红烛写青春抉择与赤子之心。</a:t>
+            </a:r>
+          </a:p>
+          <a:p>
+            <a:pPr algn="l">
+              <a:lnSpc>
+                <a:spcPct val="145000"/>
+              </a:lnSpc>
+            </a:pPr>
+            <a:r>
+              <a:rPr sz="1250" b="0">
+                <a:solidFill>
+                  <a:srgbClr val="C8A86B"/>
+                </a:solidFill>
+                <a:latin typeface="楷体"/>
+                <a:ea typeface="楷体"/>
+                <a:cs typeface="楷体"/>
+              </a:rPr>
+              <a:t>共同的背景：五四运动——青年破旧立新、张扬个性的时代强音。</a:t>
+            </a:r>
+          </a:p>
+        </p:txBody>
+      </p:sp>
+      <p:sp>
+        <p:nvSpPr>
+          <p:cNvPr id="9" name="Rounded Rectangle 8"/>
+          <p:cNvSpPr/>
+          <p:nvPr/>
+        </p:nvSpPr>
+        <p:spPr>
+          <a:xfrm>
+            <a:off x="6035040" y="2011680"/>
+            <a:ext cx="5330952" cy="1874519"/>
+          </a:xfrm>
+          <a:prstGeom prst="roundRect">
+            <a:avLst/>
+          </a:prstGeom>
+          <a:solidFill>
+            <a:srgbClr val="FFFFFF"/>
+          </a:solidFill>
+          <a:ln w="20320">
+            <a:solidFill>
+              <a:srgbClr val="B23A2A"/>
+            </a:solidFill>
+          </a:ln>
+          <a:effectLst/>
+        </p:spPr>
+        <p:style>
+          <a:lnRef idx="1">
+            <a:schemeClr val="accent1"/>
+          </a:lnRef>
+          <a:fillRef idx="3">
+            <a:schemeClr val="accent1"/>
+          </a:fillRef>
+          <a:effectRef idx="2">
+            <a:schemeClr val="accent1"/>
+          </a:effectRef>
+          <a:fontRef idx="minor">
+            <a:schemeClr val="lt1"/>
+          </a:fontRef>
+        </p:style>
+        <p:txBody>
+          <a:bodyPr rtlCol="0" anchor="ctr"/>
+          <a:lstStyle/>
+          <a:p>
+            <a:pPr algn="ctr"/>
+          </a:p>
+        </p:txBody>
+      </p:sp>
+      <p:sp>
+        <p:nvSpPr>
+          <p:cNvPr id="10" name="TextBox 9"/>
+          <p:cNvSpPr txBox="1"/>
+          <p:nvPr/>
+        </p:nvSpPr>
+        <p:spPr>
+          <a:xfrm>
+            <a:off x="6309360" y="2176272"/>
+            <a:ext cx="4782312" cy="411480"/>
+          </a:xfrm>
+          <a:prstGeom prst="rect">
+            <a:avLst/>
+          </a:prstGeom>
+          <a:noFill/>
+        </p:spPr>
+        <p:txBody>
+          <a:bodyPr wrap="square" anchor="t" lIns="0" rIns="0" tIns="0" bIns="0">
+            <a:spAutoFit/>
+          </a:bodyPr>
+          <a:lstStyle/>
+          <a:p>
+            <a:pPr algn="l"/>
+            <a:r>
+              <a:rPr sz="1500" b="1">
+                <a:solidFill>
+                  <a:srgbClr val="B23A2A"/>
+                </a:solidFill>
+                <a:latin typeface="微软雅黑"/>
+                <a:ea typeface="微软雅黑"/>
+                <a:cs typeface="微软雅黑"/>
+              </a:rPr>
+              <a:t>统编教材总主编 · 温儒敏</a:t>
+            </a:r>
+          </a:p>
+        </p:txBody>
+      </p:sp>
+      <p:sp>
+        <p:nvSpPr>
+          <p:cNvPr id="11" name="TextBox 10"/>
+          <p:cNvSpPr txBox="1"/>
+          <p:nvPr/>
+        </p:nvSpPr>
+        <p:spPr>
+          <a:xfrm>
+            <a:off x="6309360" y="2633472"/>
+            <a:ext cx="4782312" cy="960119"/>
           </a:xfrm>
           <a:prstGeom prst="rect">
             <a:avLst/>
@@ -4614,12 +5169,9 @@
               <a:lnSpc>
                 <a:spcPct val="150000"/>
               </a:lnSpc>
-              <a:spcAft>
-                <a:spcPts val="600"/>
-              </a:spcAft>
             </a:pPr>
             <a:r>
-              <a:rPr sz="1600" b="0">
+              <a:rPr sz="1250" b="0">
                 <a:solidFill>
                   <a:srgbClr val="1C2A33"/>
                 </a:solidFill>
@@ -4627,46 +5179,21 @@
                 <a:ea typeface="楷体"/>
                 <a:cs typeface="楷体"/>
               </a:rPr>
-              <a:t>本课为第一单元第三课时，从古典诗词转向现代诗群文阅读。《立在地球边上放号》是郭沫若《女神》代表作，写于1919年，以「力的绘画、力的舞蹈、力的音乐、力的诗歌」排比倾泻，体现五四狂飙精神。《红烛》是闻一多同名诗集序诗，以「烧蜡成灰」的红烛意象，象征自我牺牲与光明追求。两诗一外放一内敛，一崇高一悲壮，构成「青春激情」的两种表达，适合群文比较阅读。</a:t>
-            </a:r>
-          </a:p>
-        </p:txBody>
-      </p:sp>
-      <p:pic>
-        <p:nvPicPr>
-          <p:cNvPr id="6" name="Picture 5" descr="typewriter.jpg"/>
-          <p:cNvPicPr>
-            <a:picLocks noChangeAspect="1"/>
-          </p:cNvPicPr>
-          <p:nvPr/>
-        </p:nvPicPr>
-        <p:blipFill>
-          <a:blip r:embed="rId2"/>
-          <a:srcRect l="5860" r="5860"/>
-          <a:stretch>
-            <a:fillRect/>
-          </a:stretch>
-        </p:blipFill>
-        <p:spPr>
-          <a:xfrm>
-            <a:off x="8046720" y="1508760"/>
-            <a:ext cx="4114800" cy="3108960"/>
-          </a:xfrm>
-          <a:prstGeom prst="rect">
-            <a:avLst/>
-          </a:prstGeom>
-        </p:spPr>
-      </p:pic>
-      <p:sp>
-        <p:nvSpPr>
-          <p:cNvPr id="7" name="TextBox 6"/>
+              <a:t>闻一多把李商隐「蜡炬成灰泪始干」的旧意象，重写为「心火发光、泪流」的红烛，赋予牺牲与光明的新内涵；郭沫若「立在地球边上」的「大我」俯瞰，正是五四个性解放、自我发现的崭新精神。</a:t>
+            </a:r>
+          </a:p>
+        </p:txBody>
+      </p:sp>
+      <p:sp>
+        <p:nvSpPr>
+          <p:cNvPr id="12" name="TextBox 11"/>
           <p:cNvSpPr txBox="1"/>
           <p:nvPr/>
         </p:nvSpPr>
         <p:spPr>
           <a:xfrm>
-            <a:off x="8046720" y="4663440"/>
-            <a:ext cx="4114800" cy="365760"/>
+            <a:off x="6309360" y="3502151"/>
+            <a:ext cx="4782312" cy="320040"/>
           </a:xfrm>
           <a:prstGeom prst="rect">
             <a:avLst/>
@@ -4679,9 +5206,9 @@
           </a:bodyPr>
           <a:lstStyle/>
           <a:p>
-            <a:pPr algn="ctr"/>
-            <a:r>
-              <a:rPr sz="1100" b="0">
+            <a:pPr algn="l"/>
+            <a:r>
+              <a:rPr sz="1050" b="0">
                 <a:solidFill>
                   <a:srgbClr val="6B6258"/>
                 </a:solidFill>
@@ -4689,14 +5216,216 @@
                 <a:ea typeface="微软雅黑"/>
                 <a:cs typeface="微软雅黑"/>
               </a:rPr>
-              <a:t>资料图（自由授权，复用 typewriter.jpg）</a:t>
-            </a:r>
-          </a:p>
-        </p:txBody>
-      </p:sp>
-      <p:sp>
-        <p:nvSpPr>
-          <p:cNvPr id="8" name="TextBox 7"/>
+              <a:t>来源：《中学现代文教学直播实录》（腾讯新闻，2021）</a:t>
+            </a:r>
+          </a:p>
+        </p:txBody>
+      </p:sp>
+      <p:sp>
+        <p:nvSpPr>
+          <p:cNvPr id="13" name="Rounded Rectangle 12"/>
+          <p:cNvSpPr/>
+          <p:nvPr/>
+        </p:nvSpPr>
+        <p:spPr>
+          <a:xfrm>
+            <a:off x="6035040" y="4023360"/>
+            <a:ext cx="5330952" cy="1874519"/>
+          </a:xfrm>
+          <a:prstGeom prst="roundRect">
+            <a:avLst/>
+          </a:prstGeom>
+          <a:solidFill>
+            <a:srgbClr val="FFFFFF"/>
+          </a:solidFill>
+          <a:ln w="20320">
+            <a:solidFill>
+              <a:srgbClr val="2E7D6B"/>
+            </a:solidFill>
+          </a:ln>
+          <a:effectLst/>
+        </p:spPr>
+        <p:style>
+          <a:lnRef idx="1">
+            <a:schemeClr val="accent1"/>
+          </a:lnRef>
+          <a:fillRef idx="3">
+            <a:schemeClr val="accent1"/>
+          </a:fillRef>
+          <a:effectRef idx="2">
+            <a:schemeClr val="accent1"/>
+          </a:effectRef>
+          <a:fontRef idx="minor">
+            <a:schemeClr val="lt1"/>
+          </a:fontRef>
+        </p:style>
+        <p:txBody>
+          <a:bodyPr rtlCol="0" anchor="ctr"/>
+          <a:lstStyle/>
+          <a:p>
+            <a:pPr algn="ctr"/>
+          </a:p>
+        </p:txBody>
+      </p:sp>
+      <p:sp>
+        <p:nvSpPr>
+          <p:cNvPr id="14" name="TextBox 13"/>
+          <p:cNvSpPr txBox="1"/>
+          <p:nvPr/>
+        </p:nvSpPr>
+        <p:spPr>
+          <a:xfrm>
+            <a:off x="6309360" y="4187952"/>
+            <a:ext cx="4782312" cy="411480"/>
+          </a:xfrm>
+          <a:prstGeom prst="rect">
+            <a:avLst/>
+          </a:prstGeom>
+          <a:noFill/>
+        </p:spPr>
+        <p:txBody>
+          <a:bodyPr wrap="square" anchor="t" lIns="0" rIns="0" tIns="0" bIns="0">
+            <a:spAutoFit/>
+          </a:bodyPr>
+          <a:lstStyle/>
+          <a:p>
+            <a:pPr algn="l"/>
+            <a:r>
+              <a:rPr sz="1500" b="1">
+                <a:solidFill>
+                  <a:srgbClr val="2E7D6B"/>
+                </a:solidFill>
+                <a:latin typeface="微软雅黑"/>
+                <a:ea typeface="微软雅黑"/>
+                <a:cs typeface="微软雅黑"/>
+              </a:rPr>
+              <a:t>闻一多《诗的格律》（1926）</a:t>
+            </a:r>
+          </a:p>
+        </p:txBody>
+      </p:sp>
+      <p:sp>
+        <p:nvSpPr>
+          <p:cNvPr id="15" name="TextBox 14"/>
+          <p:cNvSpPr txBox="1"/>
+          <p:nvPr/>
+        </p:nvSpPr>
+        <p:spPr>
+          <a:xfrm>
+            <a:off x="6309360" y="4645152"/>
+            <a:ext cx="4782312" cy="960119"/>
+          </a:xfrm>
+          <a:prstGeom prst="rect">
+            <a:avLst/>
+          </a:prstGeom>
+          <a:noFill/>
+        </p:spPr>
+        <p:txBody>
+          <a:bodyPr wrap="square" anchor="t" lIns="0" rIns="0" tIns="0" bIns="0">
+            <a:spAutoFit/>
+          </a:bodyPr>
+          <a:lstStyle/>
+          <a:p>
+            <a:pPr algn="l">
+              <a:lnSpc>
+                <a:spcPct val="150000"/>
+              </a:lnSpc>
+            </a:pPr>
+            <a:r>
+              <a:rPr sz="1250" b="0">
+                <a:solidFill>
+                  <a:srgbClr val="1C2A33"/>
+                </a:solidFill>
+                <a:latin typeface="楷体"/>
+                <a:ea typeface="楷体"/>
+                <a:cs typeface="楷体"/>
+              </a:rPr>
+              <a:t>新诗应具「三美」——音乐的美（音节）、绘画的美（辞藻）、建筑的美（章法均齐）。《红烛》反复低回、前后呼应的章法，正是「建筑的美」的体现。</a:t>
+            </a:r>
+          </a:p>
+        </p:txBody>
+      </p:sp>
+      <p:sp>
+        <p:nvSpPr>
+          <p:cNvPr id="16" name="TextBox 15"/>
+          <p:cNvSpPr txBox="1"/>
+          <p:nvPr/>
+        </p:nvSpPr>
+        <p:spPr>
+          <a:xfrm>
+            <a:off x="6309360" y="5513831"/>
+            <a:ext cx="4782312" cy="320040"/>
+          </a:xfrm>
+          <a:prstGeom prst="rect">
+            <a:avLst/>
+          </a:prstGeom>
+          <a:noFill/>
+        </p:spPr>
+        <p:txBody>
+          <a:bodyPr wrap="square" anchor="t" lIns="0" rIns="0" tIns="0" bIns="0">
+            <a:spAutoFit/>
+          </a:bodyPr>
+          <a:lstStyle/>
+          <a:p>
+            <a:pPr algn="l"/>
+            <a:r>
+              <a:rPr sz="1050" b="0">
+                <a:solidFill>
+                  <a:srgbClr val="6B6258"/>
+                </a:solidFill>
+                <a:latin typeface="微软雅黑"/>
+                <a:ea typeface="微软雅黑"/>
+                <a:cs typeface="微软雅黑"/>
+              </a:rPr>
+              <a:t>来源：《晨报副刊》；中国作家网</a:t>
+            </a:r>
+          </a:p>
+        </p:txBody>
+      </p:sp>
+      <p:sp>
+        <p:nvSpPr>
+          <p:cNvPr id="17" name="TextBox 16"/>
+          <p:cNvSpPr txBox="1"/>
+          <p:nvPr/>
+        </p:nvSpPr>
+        <p:spPr>
+          <a:xfrm>
+            <a:off x="640080" y="5715000"/>
+            <a:ext cx="10881360" cy="457200"/>
+          </a:xfrm>
+          <a:prstGeom prst="rect">
+            <a:avLst/>
+          </a:prstGeom>
+          <a:noFill/>
+        </p:spPr>
+        <p:txBody>
+          <a:bodyPr wrap="square" anchor="t" lIns="0" rIns="0" tIns="0" bIns="0">
+            <a:spAutoFit/>
+          </a:bodyPr>
+          <a:lstStyle/>
+          <a:p>
+            <a:pPr algn="l">
+              <a:lnSpc>
+                <a:spcPct val="130000"/>
+              </a:lnSpc>
+            </a:pPr>
+            <a:r>
+              <a:rPr sz="1050" b="0">
+                <a:solidFill>
+                  <a:srgbClr val="6B6258"/>
+                </a:solidFill>
+                <a:latin typeface="微软雅黑"/>
+                <a:ea typeface="微软雅黑"/>
+                <a:cs typeface="微软雅黑"/>
+              </a:rPr>
+              <a:t>（本诗题为现代诗，现有可复用照片均属第二单元劳动主题，与诗题无关联；按规范 §2.3 以学科色块呈现，不强行套用无关图像。）</a:t>
+            </a:r>
+          </a:p>
+        </p:txBody>
+      </p:sp>
+      <p:sp>
+        <p:nvSpPr>
+          <p:cNvPr id="18" name="TextBox 17"/>
           <p:cNvSpPr txBox="1"/>
           <p:nvPr/>
         </p:nvSpPr>
@@ -4829,7 +5558,7 @@
                 <a:ea typeface="微软雅黑"/>
                 <a:cs typeface="微软雅黑"/>
               </a:rPr>
-              <a:t>学习重点</a:t>
+              <a:t>重点 · 三个抓手</a:t>
             </a:r>
           </a:p>
         </p:txBody>
@@ -4880,14 +5609,51 @@
       </p:sp>
       <p:sp>
         <p:nvSpPr>
-          <p:cNvPr id="5" name="Rounded Rectangle 4"/>
+          <p:cNvPr id="5" name="TextBox 4"/>
+          <p:cNvSpPr txBox="1"/>
+          <p:nvPr/>
+        </p:nvSpPr>
+        <p:spPr>
+          <a:xfrm>
+            <a:off x="640080" y="1325880"/>
+            <a:ext cx="10515600" cy="640080"/>
+          </a:xfrm>
+          <a:prstGeom prst="rect">
+            <a:avLst/>
+          </a:prstGeom>
+          <a:noFill/>
+        </p:spPr>
+        <p:txBody>
+          <a:bodyPr wrap="square" anchor="t" lIns="0" rIns="0" tIns="0" bIns="0">
+            <a:spAutoFit/>
+          </a:bodyPr>
+          <a:lstStyle/>
+          <a:p>
+            <a:pPr algn="l"/>
+            <a:r>
+              <a:rPr sz="2800" b="1">
+                <a:solidFill>
+                  <a:srgbClr val="1C2A33"/>
+                </a:solidFill>
+                <a:latin typeface="楷体"/>
+                <a:ea typeface="楷体"/>
+                <a:cs typeface="楷体"/>
+              </a:rPr>
+              <a:t>意象 · 象征 · 比较</a:t>
+            </a:r>
+          </a:p>
+        </p:txBody>
+      </p:sp>
+      <p:sp>
+        <p:nvSpPr>
+          <p:cNvPr id="6" name="Rounded Rectangle 5"/>
           <p:cNvSpPr/>
           <p:nvPr/>
         </p:nvSpPr>
         <p:spPr>
           <a:xfrm>
-            <a:off x="640080" y="1371600"/>
-            <a:ext cx="10911535" cy="1597152"/>
+            <a:off x="640080" y="2286000"/>
+            <a:ext cx="3393338" cy="3840480"/>
           </a:xfrm>
           <a:prstGeom prst="roundRect">
             <a:avLst/>
@@ -4895,7 +5661,343 @@
           <a:solidFill>
             <a:srgbClr val="FFFFFF"/>
           </a:solidFill>
-          <a:ln w="22860">
+          <a:ln w="20320">
+            <a:solidFill>
+              <a:srgbClr val="B23A2A"/>
+            </a:solidFill>
+          </a:ln>
+          <a:effectLst/>
+        </p:spPr>
+        <p:style>
+          <a:lnRef idx="1">
+            <a:schemeClr val="accent1"/>
+          </a:lnRef>
+          <a:fillRef idx="3">
+            <a:schemeClr val="accent1"/>
+          </a:fillRef>
+          <a:effectRef idx="2">
+            <a:schemeClr val="accent1"/>
+          </a:effectRef>
+          <a:fontRef idx="minor">
+            <a:schemeClr val="lt1"/>
+          </a:fontRef>
+        </p:style>
+        <p:txBody>
+          <a:bodyPr rtlCol="0" anchor="ctr"/>
+          <a:lstStyle/>
+          <a:p>
+            <a:pPr algn="ctr"/>
+          </a:p>
+        </p:txBody>
+      </p:sp>
+      <p:sp>
+        <p:nvSpPr>
+          <p:cNvPr id="7" name="Rectangle 6"/>
+          <p:cNvSpPr/>
+          <p:nvPr/>
+        </p:nvSpPr>
+        <p:spPr>
+          <a:xfrm>
+            <a:off x="640080" y="2286000"/>
+            <a:ext cx="3393338" cy="548640"/>
+          </a:xfrm>
+          <a:prstGeom prst="rect">
+            <a:avLst/>
+          </a:prstGeom>
+          <a:solidFill>
+            <a:srgbClr val="B23A2A"/>
+          </a:solidFill>
+          <a:ln>
+            <a:noFill/>
+          </a:ln>
+          <a:effectLst/>
+        </p:spPr>
+        <p:style>
+          <a:lnRef idx="1">
+            <a:schemeClr val="accent1"/>
+          </a:lnRef>
+          <a:fillRef idx="3">
+            <a:schemeClr val="accent1"/>
+          </a:fillRef>
+          <a:effectRef idx="2">
+            <a:schemeClr val="accent1"/>
+          </a:effectRef>
+          <a:fontRef idx="minor">
+            <a:schemeClr val="lt1"/>
+          </a:fontRef>
+        </p:style>
+        <p:txBody>
+          <a:bodyPr rtlCol="0" anchor="ctr"/>
+          <a:lstStyle/>
+          <a:p>
+            <a:pPr algn="ctr"/>
+          </a:p>
+        </p:txBody>
+      </p:sp>
+      <p:sp>
+        <p:nvSpPr>
+          <p:cNvPr id="8" name="TextBox 7"/>
+          <p:cNvSpPr txBox="1"/>
+          <p:nvPr/>
+        </p:nvSpPr>
+        <p:spPr>
+          <a:xfrm>
+            <a:off x="640080" y="2395728"/>
+            <a:ext cx="3393338" cy="365760"/>
+          </a:xfrm>
+          <a:prstGeom prst="rect">
+            <a:avLst/>
+          </a:prstGeom>
+          <a:noFill/>
+        </p:spPr>
+        <p:txBody>
+          <a:bodyPr wrap="square" anchor="t" lIns="0" rIns="0" tIns="0" bIns="0">
+            <a:spAutoFit/>
+          </a:bodyPr>
+          <a:lstStyle/>
+          <a:p>
+            <a:pPr algn="ctr"/>
+            <a:r>
+              <a:rPr sz="1500" b="1">
+                <a:solidFill>
+                  <a:srgbClr val="FFFFFF"/>
+                </a:solidFill>
+                <a:latin typeface="微软雅黑"/>
+                <a:ea typeface="微软雅黑"/>
+                <a:cs typeface="微软雅黑"/>
+              </a:rPr>
+              <a:t>① 《放号》意象群</a:t>
+            </a:r>
+          </a:p>
+        </p:txBody>
+      </p:sp>
+      <p:sp>
+        <p:nvSpPr>
+          <p:cNvPr id="9" name="TextBox 8"/>
+          <p:cNvSpPr txBox="1"/>
+          <p:nvPr/>
+        </p:nvSpPr>
+        <p:spPr>
+          <a:xfrm>
+            <a:off x="914400" y="3108960"/>
+            <a:ext cx="2844698" cy="2834640"/>
+          </a:xfrm>
+          <a:prstGeom prst="rect">
+            <a:avLst/>
+          </a:prstGeom>
+          <a:noFill/>
+        </p:spPr>
+        <p:txBody>
+          <a:bodyPr wrap="square" anchor="t" lIns="0" rIns="0" tIns="0" bIns="0">
+            <a:spAutoFit/>
+          </a:bodyPr>
+          <a:lstStyle/>
+          <a:p>
+            <a:pPr algn="l">
+              <a:lnSpc>
+                <a:spcPct val="160000"/>
+              </a:lnSpc>
+            </a:pPr>
+            <a:r>
+              <a:rPr sz="1400" b="0">
+                <a:solidFill>
+                  <a:srgbClr val="1C2A33"/>
+                </a:solidFill>
+                <a:latin typeface="楷体"/>
+                <a:ea typeface="楷体"/>
+                <a:cs typeface="楷体"/>
+              </a:rPr>
+              <a:t>白云 · 北冰洋 · 太平洋 · 洪涛——宏大意象叠加「力」的排比，表现毁灭与创造的力量。</a:t>
+            </a:r>
+          </a:p>
+        </p:txBody>
+      </p:sp>
+      <p:sp>
+        <p:nvSpPr>
+          <p:cNvPr id="10" name="Rounded Rectangle 9"/>
+          <p:cNvSpPr/>
+          <p:nvPr/>
+        </p:nvSpPr>
+        <p:spPr>
+          <a:xfrm>
+            <a:off x="4399178" y="2286000"/>
+            <a:ext cx="3393338" cy="3840480"/>
+          </a:xfrm>
+          <a:prstGeom prst="roundRect">
+            <a:avLst/>
+          </a:prstGeom>
+          <a:solidFill>
+            <a:srgbClr val="FFFFFF"/>
+          </a:solidFill>
+          <a:ln w="20320">
+            <a:solidFill>
+              <a:srgbClr val="2E7D6B"/>
+            </a:solidFill>
+          </a:ln>
+          <a:effectLst/>
+        </p:spPr>
+        <p:style>
+          <a:lnRef idx="1">
+            <a:schemeClr val="accent1"/>
+          </a:lnRef>
+          <a:fillRef idx="3">
+            <a:schemeClr val="accent1"/>
+          </a:fillRef>
+          <a:effectRef idx="2">
+            <a:schemeClr val="accent1"/>
+          </a:effectRef>
+          <a:fontRef idx="minor">
+            <a:schemeClr val="lt1"/>
+          </a:fontRef>
+        </p:style>
+        <p:txBody>
+          <a:bodyPr rtlCol="0" anchor="ctr"/>
+          <a:lstStyle/>
+          <a:p>
+            <a:pPr algn="ctr"/>
+          </a:p>
+        </p:txBody>
+      </p:sp>
+      <p:sp>
+        <p:nvSpPr>
+          <p:cNvPr id="11" name="Rectangle 10"/>
+          <p:cNvSpPr/>
+          <p:nvPr/>
+        </p:nvSpPr>
+        <p:spPr>
+          <a:xfrm>
+            <a:off x="4399178" y="2286000"/>
+            <a:ext cx="3393338" cy="548640"/>
+          </a:xfrm>
+          <a:prstGeom prst="rect">
+            <a:avLst/>
+          </a:prstGeom>
+          <a:solidFill>
+            <a:srgbClr val="2E7D6B"/>
+          </a:solidFill>
+          <a:ln>
+            <a:noFill/>
+          </a:ln>
+          <a:effectLst/>
+        </p:spPr>
+        <p:style>
+          <a:lnRef idx="1">
+            <a:schemeClr val="accent1"/>
+          </a:lnRef>
+          <a:fillRef idx="3">
+            <a:schemeClr val="accent1"/>
+          </a:fillRef>
+          <a:effectRef idx="2">
+            <a:schemeClr val="accent1"/>
+          </a:effectRef>
+          <a:fontRef idx="minor">
+            <a:schemeClr val="lt1"/>
+          </a:fontRef>
+        </p:style>
+        <p:txBody>
+          <a:bodyPr rtlCol="0" anchor="ctr"/>
+          <a:lstStyle/>
+          <a:p>
+            <a:pPr algn="ctr"/>
+          </a:p>
+        </p:txBody>
+      </p:sp>
+      <p:sp>
+        <p:nvSpPr>
+          <p:cNvPr id="12" name="TextBox 11"/>
+          <p:cNvSpPr txBox="1"/>
+          <p:nvPr/>
+        </p:nvSpPr>
+        <p:spPr>
+          <a:xfrm>
+            <a:off x="4399178" y="2395728"/>
+            <a:ext cx="3393338" cy="365760"/>
+          </a:xfrm>
+          <a:prstGeom prst="rect">
+            <a:avLst/>
+          </a:prstGeom>
+          <a:noFill/>
+        </p:spPr>
+        <p:txBody>
+          <a:bodyPr wrap="square" anchor="t" lIns="0" rIns="0" tIns="0" bIns="0">
+            <a:spAutoFit/>
+          </a:bodyPr>
+          <a:lstStyle/>
+          <a:p>
+            <a:pPr algn="ctr"/>
+            <a:r>
+              <a:rPr sz="1500" b="1">
+                <a:solidFill>
+                  <a:srgbClr val="FFFFFF"/>
+                </a:solidFill>
+                <a:latin typeface="微软雅黑"/>
+                <a:ea typeface="微软雅黑"/>
+                <a:cs typeface="微软雅黑"/>
+              </a:rPr>
+              <a:t>② 《红烛》核心意象</a:t>
+            </a:r>
+          </a:p>
+        </p:txBody>
+      </p:sp>
+      <p:sp>
+        <p:nvSpPr>
+          <p:cNvPr id="13" name="TextBox 12"/>
+          <p:cNvSpPr txBox="1"/>
+          <p:nvPr/>
+        </p:nvSpPr>
+        <p:spPr>
+          <a:xfrm>
+            <a:off x="4673498" y="3108960"/>
+            <a:ext cx="2844698" cy="2834640"/>
+          </a:xfrm>
+          <a:prstGeom prst="rect">
+            <a:avLst/>
+          </a:prstGeom>
+          <a:noFill/>
+        </p:spPr>
+        <p:txBody>
+          <a:bodyPr wrap="square" anchor="t" lIns="0" rIns="0" tIns="0" bIns="0">
+            <a:spAutoFit/>
+          </a:bodyPr>
+          <a:lstStyle/>
+          <a:p>
+            <a:pPr algn="l">
+              <a:lnSpc>
+                <a:spcPct val="160000"/>
+              </a:lnSpc>
+            </a:pPr>
+            <a:r>
+              <a:rPr sz="1400" b="0">
+                <a:solidFill>
+                  <a:srgbClr val="1C2A33"/>
+                </a:solidFill>
+                <a:latin typeface="楷体"/>
+                <a:ea typeface="楷体"/>
+                <a:cs typeface="楷体"/>
+              </a:rPr>
+              <a:t>红烛——「烧蜡成灰」象征自我牺牲，「放光」象征传播光明，「泪」象征痛苦与赤诚。</a:t>
+            </a:r>
+          </a:p>
+        </p:txBody>
+      </p:sp>
+      <p:sp>
+        <p:nvSpPr>
+          <p:cNvPr id="14" name="Rounded Rectangle 13"/>
+          <p:cNvSpPr/>
+          <p:nvPr/>
+        </p:nvSpPr>
+        <p:spPr>
+          <a:xfrm>
+            <a:off x="8158276" y="2286000"/>
+            <a:ext cx="3393338" cy="3840480"/>
+          </a:xfrm>
+          <a:prstGeom prst="roundRect">
+            <a:avLst/>
+          </a:prstGeom>
+          <a:solidFill>
+            <a:srgbClr val="FFFFFF"/>
+          </a:solidFill>
+          <a:ln w="20320">
             <a:solidFill>
               <a:srgbClr val="C8A86B"/>
             </a:solidFill>
@@ -4926,107 +6028,23 @@
       </p:sp>
       <p:sp>
         <p:nvSpPr>
-          <p:cNvPr id="6" name="TextBox 5"/>
-          <p:cNvSpPr txBox="1"/>
-          <p:nvPr/>
-        </p:nvSpPr>
-        <p:spPr>
-          <a:xfrm>
-            <a:off x="1371600" y="1481328"/>
-            <a:ext cx="9997135" cy="457200"/>
-          </a:xfrm>
-          <a:prstGeom prst="rect">
-            <a:avLst/>
-          </a:prstGeom>
-          <a:noFill/>
-        </p:spPr>
-        <p:txBody>
-          <a:bodyPr wrap="square" anchor="t" lIns="0" rIns="0" tIns="0" bIns="0">
-            <a:spAutoFit/>
-          </a:bodyPr>
-          <a:lstStyle/>
-          <a:p>
-            <a:pPr algn="l">
-              <a:lnSpc>
-                <a:spcPct val="110000"/>
-              </a:lnSpc>
-            </a:pPr>
-            <a:r>
-              <a:rPr sz="1600" b="1">
-                <a:solidFill>
-                  <a:srgbClr val="1C2A33"/>
-                </a:solidFill>
-                <a:latin typeface="微软雅黑"/>
-                <a:ea typeface="微软雅黑"/>
-                <a:cs typeface="微软雅黑"/>
-              </a:rPr>
-              <a:t/>
-            </a:r>
-          </a:p>
-        </p:txBody>
-      </p:sp>
-      <p:sp>
-        <p:nvSpPr>
-          <p:cNvPr id="7" name="TextBox 6"/>
-          <p:cNvSpPr txBox="1"/>
-          <p:nvPr/>
-        </p:nvSpPr>
-        <p:spPr>
-          <a:xfrm>
-            <a:off x="1371600" y="1920240"/>
-            <a:ext cx="9997135" cy="957072"/>
-          </a:xfrm>
-          <a:prstGeom prst="rect">
-            <a:avLst/>
-          </a:prstGeom>
-          <a:noFill/>
-        </p:spPr>
-        <p:txBody>
-          <a:bodyPr wrap="square" anchor="t" lIns="0" rIns="0" tIns="0" bIns="0">
-            <a:spAutoFit/>
-          </a:bodyPr>
-          <a:lstStyle/>
-          <a:p>
-            <a:pPr algn="l">
-              <a:lnSpc>
-                <a:spcPct val="128000"/>
-              </a:lnSpc>
-            </a:pPr>
-            <a:r>
-              <a:rPr sz="1200" b="0">
-                <a:solidFill>
-                  <a:srgbClr val="1C2A33"/>
-                </a:solidFill>
-                <a:latin typeface="楷体"/>
-                <a:ea typeface="楷体"/>
-                <a:cs typeface="楷体"/>
-              </a:rPr>
-              <a:t>① 《立在地球边上放号》意象群：白云、北冰洋、太平洋、洪涛——宏大意象+「力」的排比，表现毁灭与创造的力量。</a:t>
-            </a:r>
-          </a:p>
-        </p:txBody>
-      </p:sp>
-      <p:sp>
-        <p:nvSpPr>
-          <p:cNvPr id="8" name="Rounded Rectangle 7"/>
+          <p:cNvPr id="15" name="Rectangle 14"/>
           <p:cNvSpPr/>
           <p:nvPr/>
         </p:nvSpPr>
         <p:spPr>
           <a:xfrm>
-            <a:off x="640080" y="3078480"/>
-            <a:ext cx="10911535" cy="1597152"/>
-          </a:xfrm>
-          <a:prstGeom prst="roundRect">
+            <a:off x="8158276" y="2286000"/>
+            <a:ext cx="3393338" cy="548640"/>
+          </a:xfrm>
+          <a:prstGeom prst="rect">
             <a:avLst/>
           </a:prstGeom>
           <a:solidFill>
-            <a:srgbClr val="FFFFFF"/>
+            <a:srgbClr val="C8A86B"/>
           </a:solidFill>
-          <a:ln w="22860">
-            <a:solidFill>
-              <a:srgbClr val="C8A86B"/>
-            </a:solidFill>
+          <a:ln>
+            <a:noFill/>
           </a:ln>
           <a:effectLst/>
         </p:spPr>
@@ -5054,14 +6072,14 @@
       </p:sp>
       <p:sp>
         <p:nvSpPr>
-          <p:cNvPr id="9" name="TextBox 8"/>
+          <p:cNvPr id="16" name="TextBox 15"/>
           <p:cNvSpPr txBox="1"/>
           <p:nvPr/>
         </p:nvSpPr>
         <p:spPr>
           <a:xfrm>
-            <a:off x="1371600" y="3188208"/>
-            <a:ext cx="9997135" cy="457200"/>
+            <a:off x="8158276" y="2395728"/>
+            <a:ext cx="3393338" cy="365760"/>
           </a:xfrm>
           <a:prstGeom prst="rect">
             <a:avLst/>
@@ -5074,35 +6092,31 @@
           </a:bodyPr>
           <a:lstStyle/>
           <a:p>
-            <a:pPr algn="l">
-              <a:lnSpc>
-                <a:spcPct val="110000"/>
-              </a:lnSpc>
-            </a:pPr>
-            <a:r>
-              <a:rPr sz="1600" b="1">
-                <a:solidFill>
-                  <a:srgbClr val="1C2A33"/>
+            <a:pPr algn="ctr"/>
+            <a:r>
+              <a:rPr sz="1500" b="1">
+                <a:solidFill>
+                  <a:srgbClr val="FFFFFF"/>
                 </a:solidFill>
                 <a:latin typeface="微软雅黑"/>
                 <a:ea typeface="微软雅黑"/>
                 <a:cs typeface="微软雅黑"/>
               </a:rPr>
-              <a:t/>
-            </a:r>
-          </a:p>
-        </p:txBody>
-      </p:sp>
-      <p:sp>
-        <p:nvSpPr>
-          <p:cNvPr id="10" name="TextBox 9"/>
+              <a:t>③ 比较阅读维度</a:t>
+            </a:r>
+          </a:p>
+        </p:txBody>
+      </p:sp>
+      <p:sp>
+        <p:nvSpPr>
+          <p:cNvPr id="17" name="TextBox 16"/>
           <p:cNvSpPr txBox="1"/>
           <p:nvPr/>
         </p:nvSpPr>
         <p:spPr>
           <a:xfrm>
-            <a:off x="1371600" y="3627120"/>
-            <a:ext cx="9997135" cy="957072"/>
+            <a:off x="8432596" y="3108960"/>
+            <a:ext cx="2844698" cy="2834640"/>
           </a:xfrm>
           <a:prstGeom prst="rect">
             <a:avLst/>
@@ -5117,11 +6131,11 @@
           <a:p>
             <a:pPr algn="l">
               <a:lnSpc>
-                <a:spcPct val="128000"/>
+                <a:spcPct val="160000"/>
               </a:lnSpc>
             </a:pPr>
             <a:r>
-              <a:rPr sz="1200" b="0">
+              <a:rPr sz="1400" b="0">
                 <a:solidFill>
                   <a:srgbClr val="1C2A33"/>
                 </a:solidFill>
@@ -5129,142 +6143,14 @@
                 <a:ea typeface="楷体"/>
                 <a:cs typeface="楷体"/>
               </a:rPr>
-              <a:t>② 《红烛》核心意象：红烛——「烧蜡成灰」象征自我牺牲，「放光」象征传播光明，「泪」象征痛苦与赤诚。</a:t>
-            </a:r>
-          </a:p>
-        </p:txBody>
-      </p:sp>
-      <p:sp>
-        <p:nvSpPr>
-          <p:cNvPr id="11" name="Rounded Rectangle 10"/>
-          <p:cNvSpPr/>
-          <p:nvPr/>
-        </p:nvSpPr>
-        <p:spPr>
-          <a:xfrm>
-            <a:off x="640080" y="4785360"/>
-            <a:ext cx="10911535" cy="1597152"/>
-          </a:xfrm>
-          <a:prstGeom prst="roundRect">
-            <a:avLst/>
-          </a:prstGeom>
-          <a:solidFill>
-            <a:srgbClr val="FFFFFF"/>
-          </a:solidFill>
-          <a:ln w="22860">
-            <a:solidFill>
-              <a:srgbClr val="C8A86B"/>
-            </a:solidFill>
-          </a:ln>
-          <a:effectLst/>
-        </p:spPr>
-        <p:style>
-          <a:lnRef idx="1">
-            <a:schemeClr val="accent1"/>
-          </a:lnRef>
-          <a:fillRef idx="3">
-            <a:schemeClr val="accent1"/>
-          </a:fillRef>
-          <a:effectRef idx="2">
-            <a:schemeClr val="accent1"/>
-          </a:effectRef>
-          <a:fontRef idx="minor">
-            <a:schemeClr val="lt1"/>
-          </a:fontRef>
-        </p:style>
-        <p:txBody>
-          <a:bodyPr rtlCol="0" anchor="ctr"/>
-          <a:lstStyle/>
-          <a:p>
-            <a:pPr algn="ctr"/>
-          </a:p>
-        </p:txBody>
-      </p:sp>
-      <p:sp>
-        <p:nvSpPr>
-          <p:cNvPr id="12" name="TextBox 11"/>
-          <p:cNvSpPr txBox="1"/>
-          <p:nvPr/>
-        </p:nvSpPr>
-        <p:spPr>
-          <a:xfrm>
-            <a:off x="1371600" y="4895088"/>
-            <a:ext cx="9997135" cy="457200"/>
-          </a:xfrm>
-          <a:prstGeom prst="rect">
-            <a:avLst/>
-          </a:prstGeom>
-          <a:noFill/>
-        </p:spPr>
-        <p:txBody>
-          <a:bodyPr wrap="square" anchor="t" lIns="0" rIns="0" tIns="0" bIns="0">
-            <a:spAutoFit/>
-          </a:bodyPr>
-          <a:lstStyle/>
-          <a:p>
-            <a:pPr algn="l">
-              <a:lnSpc>
-                <a:spcPct val="110000"/>
-              </a:lnSpc>
-            </a:pPr>
-            <a:r>
-              <a:rPr sz="1600" b="1">
-                <a:solidFill>
-                  <a:srgbClr val="1C2A33"/>
-                </a:solidFill>
-                <a:latin typeface="微软雅黑"/>
-                <a:ea typeface="微软雅黑"/>
-                <a:cs typeface="微软雅黑"/>
-              </a:rPr>
-              <a:t/>
-            </a:r>
-          </a:p>
-        </p:txBody>
-      </p:sp>
-      <p:sp>
-        <p:nvSpPr>
-          <p:cNvPr id="13" name="TextBox 12"/>
-          <p:cNvSpPr txBox="1"/>
-          <p:nvPr/>
-        </p:nvSpPr>
-        <p:spPr>
-          <a:xfrm>
-            <a:off x="1371600" y="5334000"/>
-            <a:ext cx="9997135" cy="957072"/>
-          </a:xfrm>
-          <a:prstGeom prst="rect">
-            <a:avLst/>
-          </a:prstGeom>
-          <a:noFill/>
-        </p:spPr>
-        <p:txBody>
-          <a:bodyPr wrap="square" anchor="t" lIns="0" rIns="0" tIns="0" bIns="0">
-            <a:spAutoFit/>
-          </a:bodyPr>
-          <a:lstStyle/>
-          <a:p>
-            <a:pPr algn="l">
-              <a:lnSpc>
-                <a:spcPct val="128000"/>
-              </a:lnSpc>
-            </a:pPr>
-            <a:r>
-              <a:rPr sz="1200" b="0">
-                <a:solidFill>
-                  <a:srgbClr val="1C2A33"/>
-                </a:solidFill>
-                <a:latin typeface="楷体"/>
-                <a:ea typeface="楷体"/>
-                <a:cs typeface="楷体"/>
-              </a:rPr>
-              <a:t>③ 比较阅读维度：抒情方式（外放/内敛）、意象风格（宏大/精微）、情感基调（激越/悲壮）。</a:t>
-            </a:r>
-          </a:p>
-        </p:txBody>
-      </p:sp>
-      <p:sp>
-        <p:nvSpPr>
-          <p:cNvPr id="14" name="TextBox 13"/>
+              <a:t>抒情方式（外放 / 内敛）、意象风格（宏大 / 精微）、情感基调（激越 / 悲壮）。</a:t>
+            </a:r>
+          </a:p>
+        </p:txBody>
+      </p:sp>
+      <p:sp>
+        <p:nvSpPr>
+          <p:cNvPr id="18" name="TextBox 17"/>
           <p:cNvSpPr txBox="1"/>
           <p:nvPr/>
         </p:nvSpPr>
@@ -5391,13 +6277,13 @@
             <a:r>
               <a:rPr sz="1300" b="1">
                 <a:solidFill>
-                  <a:srgbClr val="2E7D6B"/>
+                  <a:srgbClr val="B23A2A"/>
                 </a:solidFill>
                 <a:latin typeface="微软雅黑"/>
                 <a:ea typeface="微软雅黑"/>
                 <a:cs typeface="微软雅黑"/>
               </a:rPr>
-              <a:t>学习路径</a:t>
+              <a:t>方法 · 四招读懂</a:t>
             </a:r>
           </a:p>
         </p:txBody>
@@ -5417,7 +6303,7 @@
             <a:avLst/>
           </a:prstGeom>
           <a:solidFill>
-            <a:srgbClr val="2E7D6B"/>
+            <a:srgbClr val="B23A2A"/>
           </a:solidFill>
           <a:ln>
             <a:noFill/>
@@ -5448,14 +6334,175 @@
       </p:sp>
       <p:sp>
         <p:nvSpPr>
-          <p:cNvPr id="5" name="Rounded Rectangle 4"/>
+          <p:cNvPr id="5" name="TextBox 4"/>
+          <p:cNvSpPr txBox="1"/>
+          <p:nvPr/>
+        </p:nvSpPr>
+        <p:spPr>
+          <a:xfrm>
+            <a:off x="640080" y="1325880"/>
+            <a:ext cx="10515600" cy="640080"/>
+          </a:xfrm>
+          <a:prstGeom prst="rect">
+            <a:avLst/>
+          </a:prstGeom>
+          <a:noFill/>
+        </p:spPr>
+        <p:txBody>
+          <a:bodyPr wrap="square" anchor="t" lIns="0" rIns="0" tIns="0" bIns="0">
+            <a:spAutoFit/>
+          </a:bodyPr>
+          <a:lstStyle/>
+          <a:p>
+            <a:pPr algn="l"/>
+            <a:r>
+              <a:rPr sz="2600" b="1">
+                <a:solidFill>
+                  <a:srgbClr val="1C2A33"/>
+                </a:solidFill>
+                <a:latin typeface="楷体"/>
+                <a:ea typeface="楷体"/>
+                <a:cs typeface="楷体"/>
+              </a:rPr>
+              <a:t>朗读 · 比较 · 支架 · 标注</a:t>
+            </a:r>
+          </a:p>
+        </p:txBody>
+      </p:sp>
+      <p:sp>
+        <p:nvSpPr>
+          <p:cNvPr id="6" name="Rounded Rectangle 5"/>
           <p:cNvSpPr/>
           <p:nvPr/>
         </p:nvSpPr>
         <p:spPr>
           <a:xfrm>
-            <a:off x="640080" y="1371600"/>
-            <a:ext cx="10911535" cy="685800"/>
+            <a:off x="640080" y="2286000"/>
+            <a:ext cx="2453563" cy="3840480"/>
+          </a:xfrm>
+          <a:prstGeom prst="roundRect">
+            <a:avLst/>
+          </a:prstGeom>
+          <a:solidFill>
+            <a:srgbClr val="FFFFFF"/>
+          </a:solidFill>
+          <a:ln w="22860">
+            <a:solidFill>
+              <a:srgbClr val="B23A2A"/>
+            </a:solidFill>
+          </a:ln>
+          <a:effectLst/>
+        </p:spPr>
+        <p:style>
+          <a:lnRef idx="1">
+            <a:schemeClr val="accent1"/>
+          </a:lnRef>
+          <a:fillRef idx="3">
+            <a:schemeClr val="accent1"/>
+          </a:fillRef>
+          <a:effectRef idx="2">
+            <a:schemeClr val="accent1"/>
+          </a:effectRef>
+          <a:fontRef idx="minor">
+            <a:schemeClr val="lt1"/>
+          </a:fontRef>
+        </p:style>
+        <p:txBody>
+          <a:bodyPr rtlCol="0" anchor="ctr"/>
+          <a:lstStyle/>
+          <a:p>
+            <a:pPr algn="ctr"/>
+          </a:p>
+        </p:txBody>
+      </p:sp>
+      <p:sp>
+        <p:nvSpPr>
+          <p:cNvPr id="7" name="TextBox 6"/>
+          <p:cNvSpPr txBox="1"/>
+          <p:nvPr/>
+        </p:nvSpPr>
+        <p:spPr>
+          <a:xfrm>
+            <a:off x="868680" y="2606040"/>
+            <a:ext cx="1996363" cy="548640"/>
+          </a:xfrm>
+          <a:prstGeom prst="rect">
+            <a:avLst/>
+          </a:prstGeom>
+          <a:noFill/>
+        </p:spPr>
+        <p:txBody>
+          <a:bodyPr wrap="square" anchor="t" lIns="0" rIns="0" tIns="0" bIns="0">
+            <a:spAutoFit/>
+          </a:bodyPr>
+          <a:lstStyle/>
+          <a:p>
+            <a:pPr algn="l"/>
+            <a:r>
+              <a:rPr sz="1900" b="1">
+                <a:solidFill>
+                  <a:srgbClr val="B23A2A"/>
+                </a:solidFill>
+                <a:latin typeface="楷体"/>
+                <a:ea typeface="楷体"/>
+                <a:cs typeface="楷体"/>
+              </a:rPr>
+              <a:t>朗读体验</a:t>
+            </a:r>
+          </a:p>
+        </p:txBody>
+      </p:sp>
+      <p:sp>
+        <p:nvSpPr>
+          <p:cNvPr id="8" name="TextBox 7"/>
+          <p:cNvSpPr txBox="1"/>
+          <p:nvPr/>
+        </p:nvSpPr>
+        <p:spPr>
+          <a:xfrm>
+            <a:off x="868680" y="3337560"/>
+            <a:ext cx="1996363" cy="2560320"/>
+          </a:xfrm>
+          <a:prstGeom prst="rect">
+            <a:avLst/>
+          </a:prstGeom>
+          <a:noFill/>
+        </p:spPr>
+        <p:txBody>
+          <a:bodyPr wrap="square" anchor="t" lIns="0" rIns="0" tIns="0" bIns="0">
+            <a:spAutoFit/>
+          </a:bodyPr>
+          <a:lstStyle/>
+          <a:p>
+            <a:pPr algn="l">
+              <a:lnSpc>
+                <a:spcPct val="155000"/>
+              </a:lnSpc>
+            </a:pPr>
+            <a:r>
+              <a:rPr sz="1300" b="0">
+                <a:solidFill>
+                  <a:srgbClr val="1C2A33"/>
+                </a:solidFill>
+                <a:latin typeface="楷体"/>
+                <a:ea typeface="楷体"/>
+                <a:cs typeface="楷体"/>
+              </a:rPr>
+              <a:t>听名家朗诵，体会《放号》的激越上扬与《红烛》的深沉倾诉，读出节奏差异。</a:t>
+            </a:r>
+          </a:p>
+        </p:txBody>
+      </p:sp>
+      <p:sp>
+        <p:nvSpPr>
+          <p:cNvPr id="9" name="Rounded Rectangle 8"/>
+          <p:cNvSpPr/>
+          <p:nvPr/>
+        </p:nvSpPr>
+        <p:spPr>
+          <a:xfrm>
+            <a:off x="3459403" y="2286000"/>
+            <a:ext cx="2453563" cy="3840480"/>
           </a:xfrm>
           <a:prstGeom prst="roundRect">
             <a:avLst/>
@@ -5494,23 +6541,103 @@
       </p:sp>
       <p:sp>
         <p:nvSpPr>
-          <p:cNvPr id="6" name="Oval 5"/>
+          <p:cNvPr id="10" name="TextBox 9"/>
+          <p:cNvSpPr txBox="1"/>
+          <p:nvPr/>
+        </p:nvSpPr>
+        <p:spPr>
+          <a:xfrm>
+            <a:off x="3688003" y="2606040"/>
+            <a:ext cx="1996363" cy="548640"/>
+          </a:xfrm>
+          <a:prstGeom prst="rect">
+            <a:avLst/>
+          </a:prstGeom>
+          <a:noFill/>
+        </p:spPr>
+        <p:txBody>
+          <a:bodyPr wrap="square" anchor="t" lIns="0" rIns="0" tIns="0" bIns="0">
+            <a:spAutoFit/>
+          </a:bodyPr>
+          <a:lstStyle/>
+          <a:p>
+            <a:pPr algn="l"/>
+            <a:r>
+              <a:rPr sz="1900" b="1">
+                <a:solidFill>
+                  <a:srgbClr val="2E7D6B"/>
+                </a:solidFill>
+                <a:latin typeface="楷体"/>
+                <a:ea typeface="楷体"/>
+                <a:cs typeface="楷体"/>
+              </a:rPr>
+              <a:t>群文比较</a:t>
+            </a:r>
+          </a:p>
+        </p:txBody>
+      </p:sp>
+      <p:sp>
+        <p:nvSpPr>
+          <p:cNvPr id="11" name="TextBox 10"/>
+          <p:cNvSpPr txBox="1"/>
+          <p:nvPr/>
+        </p:nvSpPr>
+        <p:spPr>
+          <a:xfrm>
+            <a:off x="3688003" y="3337560"/>
+            <a:ext cx="1996363" cy="2560320"/>
+          </a:xfrm>
+          <a:prstGeom prst="rect">
+            <a:avLst/>
+          </a:prstGeom>
+          <a:noFill/>
+        </p:spPr>
+        <p:txBody>
+          <a:bodyPr wrap="square" anchor="t" lIns="0" rIns="0" tIns="0" bIns="0">
+            <a:spAutoFit/>
+          </a:bodyPr>
+          <a:lstStyle/>
+          <a:p>
+            <a:pPr algn="l">
+              <a:lnSpc>
+                <a:spcPct val="155000"/>
+              </a:lnSpc>
+            </a:pPr>
+            <a:r>
+              <a:rPr sz="1300" b="0">
+                <a:solidFill>
+                  <a:srgbClr val="1C2A33"/>
+                </a:solidFill>
+                <a:latin typeface="楷体"/>
+                <a:ea typeface="楷体"/>
+                <a:cs typeface="楷体"/>
+              </a:rPr>
+              <a:t>用双栏对照表，从意象 / 象征 / 情感 / 节奏四个维度并排比较两首诗。</a:t>
+            </a:r>
+          </a:p>
+        </p:txBody>
+      </p:sp>
+      <p:sp>
+        <p:nvSpPr>
+          <p:cNvPr id="12" name="Rounded Rectangle 11"/>
           <p:cNvSpPr/>
           <p:nvPr/>
         </p:nvSpPr>
         <p:spPr>
           <a:xfrm>
-            <a:off x="804672" y="1536192"/>
-            <a:ext cx="457200" cy="457200"/>
-          </a:xfrm>
-          <a:prstGeom prst="ellipse">
+            <a:off x="6278727" y="2286000"/>
+            <a:ext cx="2453563" cy="3840480"/>
+          </a:xfrm>
+          <a:prstGeom prst="roundRect">
             <a:avLst/>
           </a:prstGeom>
           <a:solidFill>
-            <a:srgbClr val="2E7D6B"/>
+            <a:srgbClr val="FFFFFF"/>
           </a:solidFill>
-          <a:ln>
-            <a:noFill/>
+          <a:ln w="22860">
+            <a:solidFill>
+              <a:srgbClr val="C8A86B"/>
+            </a:solidFill>
           </a:ln>
           <a:effectLst/>
         </p:spPr>
@@ -5538,14 +6665,14 @@
       </p:sp>
       <p:sp>
         <p:nvSpPr>
-          <p:cNvPr id="7" name="TextBox 6"/>
+          <p:cNvPr id="13" name="TextBox 12"/>
           <p:cNvSpPr txBox="1"/>
           <p:nvPr/>
         </p:nvSpPr>
         <p:spPr>
           <a:xfrm>
-            <a:off x="804672" y="1591056"/>
-            <a:ext cx="457200" cy="384048"/>
+            <a:off x="6507327" y="2606040"/>
+            <a:ext cx="1996363" cy="548640"/>
           </a:xfrm>
           <a:prstGeom prst="rect">
             <a:avLst/>
@@ -5558,31 +6685,31 @@
           </a:bodyPr>
           <a:lstStyle/>
           <a:p>
-            <a:pPr algn="ctr"/>
-            <a:r>
-              <a:rPr sz="1600" b="1">
-                <a:solidFill>
-                  <a:srgbClr val="FFFFFF"/>
-                </a:solidFill>
-                <a:latin typeface="微软雅黑"/>
-                <a:ea typeface="微软雅黑"/>
-                <a:cs typeface="微软雅黑"/>
-              </a:rPr>
-              <a:t>1</a:t>
-            </a:r>
-          </a:p>
-        </p:txBody>
-      </p:sp>
-      <p:sp>
-        <p:nvSpPr>
-          <p:cNvPr id="8" name="TextBox 7"/>
+            <a:pPr algn="l"/>
+            <a:r>
+              <a:rPr sz="1900" b="1">
+                <a:solidFill>
+                  <a:srgbClr val="C8A86B"/>
+                </a:solidFill>
+                <a:latin typeface="楷体"/>
+                <a:ea typeface="楷体"/>
+                <a:cs typeface="楷体"/>
+              </a:rPr>
+              <a:t>背景支架</a:t>
+            </a:r>
+          </a:p>
+        </p:txBody>
+      </p:sp>
+      <p:sp>
+        <p:nvSpPr>
+          <p:cNvPr id="14" name="TextBox 13"/>
           <p:cNvSpPr txBox="1"/>
           <p:nvPr/>
         </p:nvSpPr>
         <p:spPr>
           <a:xfrm>
-            <a:off x="1371600" y="1481328"/>
-            <a:ext cx="9997135" cy="484632"/>
+            <a:off x="6507327" y="3337560"/>
+            <a:ext cx="1996363" cy="2560320"/>
           </a:xfrm>
           <a:prstGeom prst="rect">
             <a:avLst/>
@@ -5597,33 +6724,33 @@
           <a:p>
             <a:pPr algn="l">
               <a:lnSpc>
-                <a:spcPct val="110000"/>
+                <a:spcPct val="155000"/>
               </a:lnSpc>
             </a:pPr>
             <a:r>
-              <a:rPr sz="1600" b="1">
+              <a:rPr sz="1300" b="0">
                 <a:solidFill>
                   <a:srgbClr val="1C2A33"/>
                 </a:solidFill>
-                <a:latin typeface="微软雅黑"/>
-                <a:ea typeface="微软雅黑"/>
-                <a:cs typeface="微软雅黑"/>
-              </a:rPr>
-              <a:t>Step 1 导入</a:t>
-            </a:r>
-          </a:p>
-        </p:txBody>
-      </p:sp>
-      <p:sp>
-        <p:nvSpPr>
-          <p:cNvPr id="9" name="Rounded Rectangle 8"/>
+                <a:latin typeface="楷体"/>
+                <a:ea typeface="楷体"/>
+                <a:cs typeface="楷体"/>
+              </a:rPr>
+              <a:t>了解五四运动与闻一多留美经历，为「破旧立新」「赤子之心」提供理解背景。</a:t>
+            </a:r>
+          </a:p>
+        </p:txBody>
+      </p:sp>
+      <p:sp>
+        <p:nvSpPr>
+          <p:cNvPr id="15" name="Rounded Rectangle 14"/>
           <p:cNvSpPr/>
           <p:nvPr/>
         </p:nvSpPr>
         <p:spPr>
           <a:xfrm>
-            <a:off x="640080" y="2194560"/>
-            <a:ext cx="10911535" cy="685800"/>
+            <a:off x="9098051" y="2286000"/>
+            <a:ext cx="2453563" cy="3840480"/>
           </a:xfrm>
           <a:prstGeom prst="roundRect">
             <a:avLst/>
@@ -5633,7 +6760,7 @@
           </a:solidFill>
           <a:ln w="22860">
             <a:solidFill>
-              <a:srgbClr val="2E7D6B"/>
+              <a:srgbClr val="6B6258"/>
             </a:solidFill>
           </a:ln>
           <a:effectLst/>
@@ -5662,58 +6789,14 @@
       </p:sp>
       <p:sp>
         <p:nvSpPr>
-          <p:cNvPr id="10" name="Oval 9"/>
-          <p:cNvSpPr/>
-          <p:nvPr/>
-        </p:nvSpPr>
-        <p:spPr>
-          <a:xfrm>
-            <a:off x="804672" y="2359152"/>
-            <a:ext cx="457200" cy="457200"/>
-          </a:xfrm>
-          <a:prstGeom prst="ellipse">
-            <a:avLst/>
-          </a:prstGeom>
-          <a:solidFill>
-            <a:srgbClr val="2E7D6B"/>
-          </a:solidFill>
-          <a:ln>
-            <a:noFill/>
-          </a:ln>
-          <a:effectLst/>
-        </p:spPr>
-        <p:style>
-          <a:lnRef idx="1">
-            <a:schemeClr val="accent1"/>
-          </a:lnRef>
-          <a:fillRef idx="3">
-            <a:schemeClr val="accent1"/>
-          </a:fillRef>
-          <a:effectRef idx="2">
-            <a:schemeClr val="accent1"/>
-          </a:effectRef>
-          <a:fontRef idx="minor">
-            <a:schemeClr val="lt1"/>
-          </a:fontRef>
-        </p:style>
-        <p:txBody>
-          <a:bodyPr rtlCol="0" anchor="ctr"/>
-          <a:lstStyle/>
-          <a:p>
-            <a:pPr algn="ctr"/>
-          </a:p>
-        </p:txBody>
-      </p:sp>
-      <p:sp>
-        <p:nvSpPr>
-          <p:cNvPr id="11" name="TextBox 10"/>
+          <p:cNvPr id="16" name="TextBox 15"/>
           <p:cNvSpPr txBox="1"/>
           <p:nvPr/>
         </p:nvSpPr>
         <p:spPr>
           <a:xfrm>
-            <a:off x="804672" y="2414016"/>
-            <a:ext cx="457200" cy="384048"/>
+            <a:off x="9326651" y="2606040"/>
+            <a:ext cx="1996363" cy="548640"/>
           </a:xfrm>
           <a:prstGeom prst="rect">
             <a:avLst/>
@@ -5726,31 +6809,31 @@
           </a:bodyPr>
           <a:lstStyle/>
           <a:p>
-            <a:pPr algn="ctr"/>
-            <a:r>
-              <a:rPr sz="1600" b="1">
-                <a:solidFill>
-                  <a:srgbClr val="FFFFFF"/>
-                </a:solidFill>
-                <a:latin typeface="微软雅黑"/>
-                <a:ea typeface="微软雅黑"/>
-                <a:cs typeface="微软雅黑"/>
-              </a:rPr>
-              <a:t>2</a:t>
-            </a:r>
-          </a:p>
-        </p:txBody>
-      </p:sp>
-      <p:sp>
-        <p:nvSpPr>
-          <p:cNvPr id="12" name="TextBox 11"/>
+            <a:pPr algn="l"/>
+            <a:r>
+              <a:rPr sz="1900" b="1">
+                <a:solidFill>
+                  <a:srgbClr val="6B6258"/>
+                </a:solidFill>
+                <a:latin typeface="楷体"/>
+                <a:ea typeface="楷体"/>
+                <a:cs typeface="楷体"/>
+              </a:rPr>
+              <a:t>意象标注</a:t>
+            </a:r>
+          </a:p>
+        </p:txBody>
+      </p:sp>
+      <p:sp>
+        <p:nvSpPr>
+          <p:cNvPr id="17" name="TextBox 16"/>
           <p:cNvSpPr txBox="1"/>
           <p:nvPr/>
         </p:nvSpPr>
         <p:spPr>
           <a:xfrm>
-            <a:off x="1371600" y="2304288"/>
-            <a:ext cx="9997135" cy="484632"/>
+            <a:off x="9326651" y="3337560"/>
+            <a:ext cx="1996363" cy="2560320"/>
           </a:xfrm>
           <a:prstGeom prst="rect">
             <a:avLst/>
@@ -5765,698 +6848,26 @@
           <a:p>
             <a:pPr algn="l">
               <a:lnSpc>
-                <a:spcPct val="110000"/>
+                <a:spcPct val="155000"/>
               </a:lnSpc>
             </a:pPr>
             <a:r>
-              <a:rPr sz="1600" b="1">
+              <a:rPr sz="1300" b="0">
                 <a:solidFill>
                   <a:srgbClr val="1C2A33"/>
                 </a:solidFill>
-                <a:latin typeface="微软雅黑"/>
-                <a:ea typeface="微软雅黑"/>
-                <a:cs typeface="微软雅黑"/>
-              </a:rPr>
-              <a:t>Step 2 朗读对比</a:t>
-            </a:r>
-          </a:p>
-        </p:txBody>
-      </p:sp>
-      <p:sp>
-        <p:nvSpPr>
-          <p:cNvPr id="13" name="Rounded Rectangle 12"/>
-          <p:cNvSpPr/>
-          <p:nvPr/>
-        </p:nvSpPr>
-        <p:spPr>
-          <a:xfrm>
-            <a:off x="640080" y="3017520"/>
-            <a:ext cx="10911535" cy="685800"/>
-          </a:xfrm>
-          <a:prstGeom prst="roundRect">
-            <a:avLst/>
-          </a:prstGeom>
-          <a:solidFill>
-            <a:srgbClr val="FFFFFF"/>
-          </a:solidFill>
-          <a:ln w="22860">
-            <a:solidFill>
-              <a:srgbClr val="2E7D6B"/>
-            </a:solidFill>
-          </a:ln>
-          <a:effectLst/>
-        </p:spPr>
-        <p:style>
-          <a:lnRef idx="1">
-            <a:schemeClr val="accent1"/>
-          </a:lnRef>
-          <a:fillRef idx="3">
-            <a:schemeClr val="accent1"/>
-          </a:fillRef>
-          <a:effectRef idx="2">
-            <a:schemeClr val="accent1"/>
-          </a:effectRef>
-          <a:fontRef idx="minor">
-            <a:schemeClr val="lt1"/>
-          </a:fontRef>
-        </p:style>
-        <p:txBody>
-          <a:bodyPr rtlCol="0" anchor="ctr"/>
-          <a:lstStyle/>
-          <a:p>
-            <a:pPr algn="ctr"/>
-          </a:p>
-        </p:txBody>
-      </p:sp>
-      <p:sp>
-        <p:nvSpPr>
-          <p:cNvPr id="14" name="Oval 13"/>
-          <p:cNvSpPr/>
-          <p:nvPr/>
-        </p:nvSpPr>
-        <p:spPr>
-          <a:xfrm>
-            <a:off x="804672" y="3182112"/>
-            <a:ext cx="457200" cy="457200"/>
-          </a:xfrm>
-          <a:prstGeom prst="ellipse">
-            <a:avLst/>
-          </a:prstGeom>
-          <a:solidFill>
-            <a:srgbClr val="2E7D6B"/>
-          </a:solidFill>
-          <a:ln>
-            <a:noFill/>
-          </a:ln>
-          <a:effectLst/>
-        </p:spPr>
-        <p:style>
-          <a:lnRef idx="1">
-            <a:schemeClr val="accent1"/>
-          </a:lnRef>
-          <a:fillRef idx="3">
-            <a:schemeClr val="accent1"/>
-          </a:fillRef>
-          <a:effectRef idx="2">
-            <a:schemeClr val="accent1"/>
-          </a:effectRef>
-          <a:fontRef idx="minor">
-            <a:schemeClr val="lt1"/>
-          </a:fontRef>
-        </p:style>
-        <p:txBody>
-          <a:bodyPr rtlCol="0" anchor="ctr"/>
-          <a:lstStyle/>
-          <a:p>
-            <a:pPr algn="ctr"/>
-          </a:p>
-        </p:txBody>
-      </p:sp>
-      <p:sp>
-        <p:nvSpPr>
-          <p:cNvPr id="15" name="TextBox 14"/>
-          <p:cNvSpPr txBox="1"/>
-          <p:nvPr/>
-        </p:nvSpPr>
-        <p:spPr>
-          <a:xfrm>
-            <a:off x="804672" y="3236976"/>
-            <a:ext cx="457200" cy="384048"/>
-          </a:xfrm>
-          <a:prstGeom prst="rect">
-            <a:avLst/>
-          </a:prstGeom>
-          <a:noFill/>
-        </p:spPr>
-        <p:txBody>
-          <a:bodyPr wrap="square" anchor="t" lIns="0" rIns="0" tIns="0" bIns="0">
-            <a:spAutoFit/>
-          </a:bodyPr>
-          <a:lstStyle/>
-          <a:p>
-            <a:pPr algn="ctr"/>
-            <a:r>
-              <a:rPr sz="1600" b="1">
-                <a:solidFill>
-                  <a:srgbClr val="FFFFFF"/>
-                </a:solidFill>
-                <a:latin typeface="微软雅黑"/>
-                <a:ea typeface="微软雅黑"/>
-                <a:cs typeface="微软雅黑"/>
-              </a:rPr>
-              <a:t>3</a:t>
-            </a:r>
-          </a:p>
-        </p:txBody>
-      </p:sp>
-      <p:sp>
-        <p:nvSpPr>
-          <p:cNvPr id="16" name="TextBox 15"/>
-          <p:cNvSpPr txBox="1"/>
-          <p:nvPr/>
-        </p:nvSpPr>
-        <p:spPr>
-          <a:xfrm>
-            <a:off x="1371600" y="3127248"/>
-            <a:ext cx="9997135" cy="484632"/>
-          </a:xfrm>
-          <a:prstGeom prst="rect">
-            <a:avLst/>
-          </a:prstGeom>
-          <a:noFill/>
-        </p:spPr>
-        <p:txBody>
-          <a:bodyPr wrap="square" anchor="t" lIns="0" rIns="0" tIns="0" bIns="0">
-            <a:spAutoFit/>
-          </a:bodyPr>
-          <a:lstStyle/>
-          <a:p>
-            <a:pPr algn="l">
-              <a:lnSpc>
-                <a:spcPct val="110000"/>
-              </a:lnSpc>
-            </a:pPr>
-            <a:r>
-              <a:rPr sz="1400" b="1">
-                <a:solidFill>
-                  <a:srgbClr val="1C2A33"/>
-                </a:solidFill>
-                <a:latin typeface="微软雅黑"/>
-                <a:ea typeface="微软雅黑"/>
-                <a:cs typeface="微软雅黑"/>
-              </a:rPr>
-              <a:t>Step 3 《放号》意象分析</a:t>
-            </a:r>
-          </a:p>
-        </p:txBody>
-      </p:sp>
-      <p:sp>
-        <p:nvSpPr>
-          <p:cNvPr id="17" name="Rounded Rectangle 16"/>
-          <p:cNvSpPr/>
-          <p:nvPr/>
-        </p:nvSpPr>
-        <p:spPr>
-          <a:xfrm>
-            <a:off x="640080" y="3840480"/>
-            <a:ext cx="10911535" cy="685800"/>
-          </a:xfrm>
-          <a:prstGeom prst="roundRect">
-            <a:avLst/>
-          </a:prstGeom>
-          <a:solidFill>
-            <a:srgbClr val="FFFFFF"/>
-          </a:solidFill>
-          <a:ln w="22860">
-            <a:solidFill>
-              <a:srgbClr val="2E7D6B"/>
-            </a:solidFill>
-          </a:ln>
-          <a:effectLst/>
-        </p:spPr>
-        <p:style>
-          <a:lnRef idx="1">
-            <a:schemeClr val="accent1"/>
-          </a:lnRef>
-          <a:fillRef idx="3">
-            <a:schemeClr val="accent1"/>
-          </a:fillRef>
-          <a:effectRef idx="2">
-            <a:schemeClr val="accent1"/>
-          </a:effectRef>
-          <a:fontRef idx="minor">
-            <a:schemeClr val="lt1"/>
-          </a:fontRef>
-        </p:style>
-        <p:txBody>
-          <a:bodyPr rtlCol="0" anchor="ctr"/>
-          <a:lstStyle/>
-          <a:p>
-            <a:pPr algn="ctr"/>
-          </a:p>
-        </p:txBody>
-      </p:sp>
-      <p:sp>
-        <p:nvSpPr>
-          <p:cNvPr id="18" name="Oval 17"/>
-          <p:cNvSpPr/>
-          <p:nvPr/>
-        </p:nvSpPr>
-        <p:spPr>
-          <a:xfrm>
-            <a:off x="804672" y="4005072"/>
-            <a:ext cx="457200" cy="457200"/>
-          </a:xfrm>
-          <a:prstGeom prst="ellipse">
-            <a:avLst/>
-          </a:prstGeom>
-          <a:solidFill>
-            <a:srgbClr val="2E7D6B"/>
-          </a:solidFill>
-          <a:ln>
-            <a:noFill/>
-          </a:ln>
-          <a:effectLst/>
-        </p:spPr>
-        <p:style>
-          <a:lnRef idx="1">
-            <a:schemeClr val="accent1"/>
-          </a:lnRef>
-          <a:fillRef idx="3">
-            <a:schemeClr val="accent1"/>
-          </a:fillRef>
-          <a:effectRef idx="2">
-            <a:schemeClr val="accent1"/>
-          </a:effectRef>
-          <a:fontRef idx="minor">
-            <a:schemeClr val="lt1"/>
-          </a:fontRef>
-        </p:style>
-        <p:txBody>
-          <a:bodyPr rtlCol="0" anchor="ctr"/>
-          <a:lstStyle/>
-          <a:p>
-            <a:pPr algn="ctr"/>
-          </a:p>
-        </p:txBody>
-      </p:sp>
-      <p:sp>
-        <p:nvSpPr>
-          <p:cNvPr id="19" name="TextBox 18"/>
-          <p:cNvSpPr txBox="1"/>
-          <p:nvPr/>
-        </p:nvSpPr>
-        <p:spPr>
-          <a:xfrm>
-            <a:off x="804672" y="4059936"/>
-            <a:ext cx="457200" cy="384048"/>
-          </a:xfrm>
-          <a:prstGeom prst="rect">
-            <a:avLst/>
-          </a:prstGeom>
-          <a:noFill/>
-        </p:spPr>
-        <p:txBody>
-          <a:bodyPr wrap="square" anchor="t" lIns="0" rIns="0" tIns="0" bIns="0">
-            <a:spAutoFit/>
-          </a:bodyPr>
-          <a:lstStyle/>
-          <a:p>
-            <a:pPr algn="ctr"/>
-            <a:r>
-              <a:rPr sz="1600" b="1">
-                <a:solidFill>
-                  <a:srgbClr val="FFFFFF"/>
-                </a:solidFill>
-                <a:latin typeface="微软雅黑"/>
-                <a:ea typeface="微软雅黑"/>
-                <a:cs typeface="微软雅黑"/>
-              </a:rPr>
-              <a:t>4</a:t>
-            </a:r>
-          </a:p>
-        </p:txBody>
-      </p:sp>
-      <p:sp>
-        <p:nvSpPr>
-          <p:cNvPr id="20" name="TextBox 19"/>
-          <p:cNvSpPr txBox="1"/>
-          <p:nvPr/>
-        </p:nvSpPr>
-        <p:spPr>
-          <a:xfrm>
-            <a:off x="1371600" y="3950208"/>
-            <a:ext cx="9997135" cy="484632"/>
-          </a:xfrm>
-          <a:prstGeom prst="rect">
-            <a:avLst/>
-          </a:prstGeom>
-          <a:noFill/>
-        </p:spPr>
-        <p:txBody>
-          <a:bodyPr wrap="square" anchor="t" lIns="0" rIns="0" tIns="0" bIns="0">
-            <a:spAutoFit/>
-          </a:bodyPr>
-          <a:lstStyle/>
-          <a:p>
-            <a:pPr algn="l">
-              <a:lnSpc>
-                <a:spcPct val="110000"/>
-              </a:lnSpc>
-            </a:pPr>
-            <a:r>
-              <a:rPr sz="1400" b="1">
-                <a:solidFill>
-                  <a:srgbClr val="1C2A33"/>
-                </a:solidFill>
-                <a:latin typeface="微软雅黑"/>
-                <a:ea typeface="微软雅黑"/>
-                <a:cs typeface="微软雅黑"/>
-              </a:rPr>
-              <a:t>Step 4 《红烛》意象分析</a:t>
-            </a:r>
-          </a:p>
-        </p:txBody>
-      </p:sp>
-      <p:sp>
-        <p:nvSpPr>
-          <p:cNvPr id="21" name="Rounded Rectangle 20"/>
-          <p:cNvSpPr/>
-          <p:nvPr/>
-        </p:nvSpPr>
-        <p:spPr>
-          <a:xfrm>
-            <a:off x="640080" y="4663440"/>
-            <a:ext cx="10911535" cy="685800"/>
-          </a:xfrm>
-          <a:prstGeom prst="roundRect">
-            <a:avLst/>
-          </a:prstGeom>
-          <a:solidFill>
-            <a:srgbClr val="FFFFFF"/>
-          </a:solidFill>
-          <a:ln w="22860">
-            <a:solidFill>
-              <a:srgbClr val="2E7D6B"/>
-            </a:solidFill>
-          </a:ln>
-          <a:effectLst/>
-        </p:spPr>
-        <p:style>
-          <a:lnRef idx="1">
-            <a:schemeClr val="accent1"/>
-          </a:lnRef>
-          <a:fillRef idx="3">
-            <a:schemeClr val="accent1"/>
-          </a:fillRef>
-          <a:effectRef idx="2">
-            <a:schemeClr val="accent1"/>
-          </a:effectRef>
-          <a:fontRef idx="minor">
-            <a:schemeClr val="lt1"/>
-          </a:fontRef>
-        </p:style>
-        <p:txBody>
-          <a:bodyPr rtlCol="0" anchor="ctr"/>
-          <a:lstStyle/>
-          <a:p>
-            <a:pPr algn="ctr"/>
-          </a:p>
-        </p:txBody>
-      </p:sp>
-      <p:sp>
-        <p:nvSpPr>
-          <p:cNvPr id="22" name="Oval 21"/>
-          <p:cNvSpPr/>
-          <p:nvPr/>
-        </p:nvSpPr>
-        <p:spPr>
-          <a:xfrm>
-            <a:off x="804672" y="4828032"/>
-            <a:ext cx="457200" cy="457200"/>
-          </a:xfrm>
-          <a:prstGeom prst="ellipse">
-            <a:avLst/>
-          </a:prstGeom>
-          <a:solidFill>
-            <a:srgbClr val="2E7D6B"/>
-          </a:solidFill>
-          <a:ln>
-            <a:noFill/>
-          </a:ln>
-          <a:effectLst/>
-        </p:spPr>
-        <p:style>
-          <a:lnRef idx="1">
-            <a:schemeClr val="accent1"/>
-          </a:lnRef>
-          <a:fillRef idx="3">
-            <a:schemeClr val="accent1"/>
-          </a:fillRef>
-          <a:effectRef idx="2">
-            <a:schemeClr val="accent1"/>
-          </a:effectRef>
-          <a:fontRef idx="minor">
-            <a:schemeClr val="lt1"/>
-          </a:fontRef>
-        </p:style>
-        <p:txBody>
-          <a:bodyPr rtlCol="0" anchor="ctr"/>
-          <a:lstStyle/>
-          <a:p>
-            <a:pPr algn="ctr"/>
-          </a:p>
-        </p:txBody>
-      </p:sp>
-      <p:sp>
-        <p:nvSpPr>
-          <p:cNvPr id="23" name="TextBox 22"/>
-          <p:cNvSpPr txBox="1"/>
-          <p:nvPr/>
-        </p:nvSpPr>
-        <p:spPr>
-          <a:xfrm>
-            <a:off x="804672" y="4882896"/>
-            <a:ext cx="457200" cy="384048"/>
-          </a:xfrm>
-          <a:prstGeom prst="rect">
-            <a:avLst/>
-          </a:prstGeom>
-          <a:noFill/>
-        </p:spPr>
-        <p:txBody>
-          <a:bodyPr wrap="square" anchor="t" lIns="0" rIns="0" tIns="0" bIns="0">
-            <a:spAutoFit/>
-          </a:bodyPr>
-          <a:lstStyle/>
-          <a:p>
-            <a:pPr algn="ctr"/>
-            <a:r>
-              <a:rPr sz="1600" b="1">
-                <a:solidFill>
-                  <a:srgbClr val="FFFFFF"/>
-                </a:solidFill>
-                <a:latin typeface="微软雅黑"/>
-                <a:ea typeface="微软雅黑"/>
-                <a:cs typeface="微软雅黑"/>
-              </a:rPr>
-              <a:t>5</a:t>
-            </a:r>
-          </a:p>
-        </p:txBody>
-      </p:sp>
-      <p:sp>
-        <p:nvSpPr>
-          <p:cNvPr id="24" name="TextBox 23"/>
-          <p:cNvSpPr txBox="1"/>
-          <p:nvPr/>
-        </p:nvSpPr>
-        <p:spPr>
-          <a:xfrm>
-            <a:off x="1371600" y="4773168"/>
-            <a:ext cx="9997135" cy="484632"/>
-          </a:xfrm>
-          <a:prstGeom prst="rect">
-            <a:avLst/>
-          </a:prstGeom>
-          <a:noFill/>
-        </p:spPr>
-        <p:txBody>
-          <a:bodyPr wrap="square" anchor="t" lIns="0" rIns="0" tIns="0" bIns="0">
-            <a:spAutoFit/>
-          </a:bodyPr>
-          <a:lstStyle/>
-          <a:p>
-            <a:pPr algn="l">
-              <a:lnSpc>
-                <a:spcPct val="110000"/>
-              </a:lnSpc>
-            </a:pPr>
-            <a:r>
-              <a:rPr sz="1600" b="1">
-                <a:solidFill>
-                  <a:srgbClr val="1C2A33"/>
-                </a:solidFill>
-                <a:latin typeface="微软雅黑"/>
-                <a:ea typeface="微软雅黑"/>
-                <a:cs typeface="微软雅黑"/>
-              </a:rPr>
-              <a:t>Step 5 群文比较</a:t>
-            </a:r>
-          </a:p>
-        </p:txBody>
-      </p:sp>
-      <p:sp>
-        <p:nvSpPr>
-          <p:cNvPr id="25" name="Rounded Rectangle 24"/>
-          <p:cNvSpPr/>
-          <p:nvPr/>
-        </p:nvSpPr>
-        <p:spPr>
-          <a:xfrm>
-            <a:off x="640080" y="5486400"/>
-            <a:ext cx="10911535" cy="685800"/>
-          </a:xfrm>
-          <a:prstGeom prst="roundRect">
-            <a:avLst/>
-          </a:prstGeom>
-          <a:solidFill>
-            <a:srgbClr val="FFFFFF"/>
-          </a:solidFill>
-          <a:ln w="22860">
-            <a:solidFill>
-              <a:srgbClr val="2E7D6B"/>
-            </a:solidFill>
-          </a:ln>
-          <a:effectLst/>
-        </p:spPr>
-        <p:style>
-          <a:lnRef idx="1">
-            <a:schemeClr val="accent1"/>
-          </a:lnRef>
-          <a:fillRef idx="3">
-            <a:schemeClr val="accent1"/>
-          </a:fillRef>
-          <a:effectRef idx="2">
-            <a:schemeClr val="accent1"/>
-          </a:effectRef>
-          <a:fontRef idx="minor">
-            <a:schemeClr val="lt1"/>
-          </a:fontRef>
-        </p:style>
-        <p:txBody>
-          <a:bodyPr rtlCol="0" anchor="ctr"/>
-          <a:lstStyle/>
-          <a:p>
-            <a:pPr algn="ctr"/>
-          </a:p>
-        </p:txBody>
-      </p:sp>
-      <p:sp>
-        <p:nvSpPr>
-          <p:cNvPr id="26" name="Oval 25"/>
-          <p:cNvSpPr/>
-          <p:nvPr/>
-        </p:nvSpPr>
-        <p:spPr>
-          <a:xfrm>
-            <a:off x="804672" y="5650992"/>
-            <a:ext cx="457200" cy="457200"/>
-          </a:xfrm>
-          <a:prstGeom prst="ellipse">
-            <a:avLst/>
-          </a:prstGeom>
-          <a:solidFill>
-            <a:srgbClr val="2E7D6B"/>
-          </a:solidFill>
-          <a:ln>
-            <a:noFill/>
-          </a:ln>
-          <a:effectLst/>
-        </p:spPr>
-        <p:style>
-          <a:lnRef idx="1">
-            <a:schemeClr val="accent1"/>
-          </a:lnRef>
-          <a:fillRef idx="3">
-            <a:schemeClr val="accent1"/>
-          </a:fillRef>
-          <a:effectRef idx="2">
-            <a:schemeClr val="accent1"/>
-          </a:effectRef>
-          <a:fontRef idx="minor">
-            <a:schemeClr val="lt1"/>
-          </a:fontRef>
-        </p:style>
-        <p:txBody>
-          <a:bodyPr rtlCol="0" anchor="ctr"/>
-          <a:lstStyle/>
-          <a:p>
-            <a:pPr algn="ctr"/>
-          </a:p>
-        </p:txBody>
-      </p:sp>
-      <p:sp>
-        <p:nvSpPr>
-          <p:cNvPr id="27" name="TextBox 26"/>
-          <p:cNvSpPr txBox="1"/>
-          <p:nvPr/>
-        </p:nvSpPr>
-        <p:spPr>
-          <a:xfrm>
-            <a:off x="804672" y="5705856"/>
-            <a:ext cx="457200" cy="384048"/>
-          </a:xfrm>
-          <a:prstGeom prst="rect">
-            <a:avLst/>
-          </a:prstGeom>
-          <a:noFill/>
-        </p:spPr>
-        <p:txBody>
-          <a:bodyPr wrap="square" anchor="t" lIns="0" rIns="0" tIns="0" bIns="0">
-            <a:spAutoFit/>
-          </a:bodyPr>
-          <a:lstStyle/>
-          <a:p>
-            <a:pPr algn="ctr"/>
-            <a:r>
-              <a:rPr sz="1600" b="1">
-                <a:solidFill>
-                  <a:srgbClr val="FFFFFF"/>
-                </a:solidFill>
-                <a:latin typeface="微软雅黑"/>
-                <a:ea typeface="微软雅黑"/>
-                <a:cs typeface="微软雅黑"/>
-              </a:rPr>
-              <a:t>6</a:t>
-            </a:r>
-          </a:p>
-        </p:txBody>
-      </p:sp>
-      <p:sp>
-        <p:nvSpPr>
-          <p:cNvPr id="28" name="TextBox 27"/>
-          <p:cNvSpPr txBox="1"/>
-          <p:nvPr/>
-        </p:nvSpPr>
-        <p:spPr>
-          <a:xfrm>
-            <a:off x="1371600" y="5596128"/>
-            <a:ext cx="9997135" cy="484632"/>
-          </a:xfrm>
-          <a:prstGeom prst="rect">
-            <a:avLst/>
-          </a:prstGeom>
-          <a:noFill/>
-        </p:spPr>
-        <p:txBody>
-          <a:bodyPr wrap="square" anchor="t" lIns="0" rIns="0" tIns="0" bIns="0">
-            <a:spAutoFit/>
-          </a:bodyPr>
-          <a:lstStyle/>
-          <a:p>
-            <a:pPr algn="l">
-              <a:lnSpc>
-                <a:spcPct val="110000"/>
-              </a:lnSpc>
-            </a:pPr>
-            <a:r>
-              <a:rPr sz="1400" b="1">
-                <a:solidFill>
-                  <a:srgbClr val="1C2A33"/>
-                </a:solidFill>
-                <a:latin typeface="微软雅黑"/>
-                <a:ea typeface="微软雅黑"/>
-                <a:cs typeface="微软雅黑"/>
-              </a:rPr>
-              <a:t>Step 5 意象概念辨析+小结</a:t>
-            </a:r>
-          </a:p>
-        </p:txBody>
-      </p:sp>
-      <p:sp>
-        <p:nvSpPr>
-          <p:cNvPr id="29" name="TextBox 28"/>
+                <a:latin typeface="楷体"/>
+                <a:ea typeface="楷体"/>
+                <a:cs typeface="楷体"/>
+              </a:rPr>
+              <a:t>在诗上圈出意象、旁批象征义、末尾写一句话写清自己的感受。</a:t>
+            </a:r>
+          </a:p>
+        </p:txBody>
+      </p:sp>
+      <p:sp>
+        <p:nvSpPr>
+          <p:cNvPr id="18" name="TextBox 17"/>
           <p:cNvSpPr txBox="1"/>
           <p:nvPr/>
         </p:nvSpPr>
@@ -6589,7 +7000,7 @@
                 <a:ea typeface="微软雅黑"/>
                 <a:cs typeface="微软雅黑"/>
               </a:rPr>
-              <a:t>易混易错</a:t>
+              <a:t>难点 · 怎么破</a:t>
             </a:r>
           </a:p>
         </p:txBody>
@@ -6640,14 +7051,51 @@
       </p:sp>
       <p:sp>
         <p:nvSpPr>
-          <p:cNvPr id="5" name="Rounded Rectangle 4"/>
+          <p:cNvPr id="5" name="TextBox 4"/>
+          <p:cNvSpPr txBox="1"/>
+          <p:nvPr/>
+        </p:nvSpPr>
+        <p:spPr>
+          <a:xfrm>
+            <a:off x="640080" y="1325880"/>
+            <a:ext cx="10058400" cy="640080"/>
+          </a:xfrm>
+          <a:prstGeom prst="rect">
+            <a:avLst/>
+          </a:prstGeom>
+          <a:noFill/>
+        </p:spPr>
+        <p:txBody>
+          <a:bodyPr wrap="square" anchor="t" lIns="0" rIns="0" tIns="0" bIns="0">
+            <a:spAutoFit/>
+          </a:bodyPr>
+          <a:lstStyle/>
+          <a:p>
+            <a:pPr algn="l"/>
+            <a:r>
+              <a:rPr sz="2600" b="1">
+                <a:solidFill>
+                  <a:srgbClr val="1C2A33"/>
+                </a:solidFill>
+                <a:latin typeface="楷体"/>
+                <a:ea typeface="楷体"/>
+                <a:cs typeface="楷体"/>
+              </a:rPr>
+              <a:t>三处容易卡住的地方</a:t>
+            </a:r>
+          </a:p>
+        </p:txBody>
+      </p:sp>
+      <p:sp>
+        <p:nvSpPr>
+          <p:cNvPr id="6" name="Rounded Rectangle 5"/>
           <p:cNvSpPr/>
           <p:nvPr/>
         </p:nvSpPr>
         <p:spPr>
           <a:xfrm>
-            <a:off x="640080" y="1417320"/>
-            <a:ext cx="5349240" cy="2057400"/>
+            <a:off x="640080" y="2194560"/>
+            <a:ext cx="3393338" cy="3931920"/>
           </a:xfrm>
           <a:prstGeom prst="roundRect">
             <a:avLst/>
@@ -6655,7 +7103,7 @@
           <a:solidFill>
             <a:srgbClr val="FFFFFF"/>
           </a:solidFill>
-          <a:ln w="22860">
+          <a:ln w="20320">
             <a:solidFill>
               <a:srgbClr val="B23A2A"/>
             </a:solidFill>
@@ -6686,14 +7134,14 @@
       </p:sp>
       <p:sp>
         <p:nvSpPr>
-          <p:cNvPr id="6" name="Oval 5"/>
+          <p:cNvPr id="7" name="Oval 6"/>
           <p:cNvSpPr/>
           <p:nvPr/>
         </p:nvSpPr>
         <p:spPr>
           <a:xfrm>
-            <a:off x="804672" y="1581912"/>
-            <a:ext cx="457200" cy="457200"/>
+            <a:off x="868680" y="2423160"/>
+            <a:ext cx="548640" cy="548640"/>
           </a:xfrm>
           <a:prstGeom prst="ellipse">
             <a:avLst/>
@@ -6730,14 +7178,14 @@
       </p:sp>
       <p:sp>
         <p:nvSpPr>
-          <p:cNvPr id="7" name="TextBox 6"/>
+          <p:cNvPr id="8" name="TextBox 7"/>
           <p:cNvSpPr txBox="1"/>
           <p:nvPr/>
         </p:nvSpPr>
         <p:spPr>
           <a:xfrm>
-            <a:off x="804672" y="1636776"/>
-            <a:ext cx="457200" cy="384048"/>
+            <a:off x="868680" y="2496312"/>
+            <a:ext cx="548640" cy="411480"/>
           </a:xfrm>
           <a:prstGeom prst="rect">
             <a:avLst/>
@@ -6752,7 +7200,7 @@
           <a:p>
             <a:pPr algn="ctr"/>
             <a:r>
-              <a:rPr sz="1600" b="1">
+              <a:rPr sz="2000" b="1">
                 <a:solidFill>
                   <a:srgbClr val="FFFFFF"/>
                 </a:solidFill>
@@ -6760,21 +7208,21 @@
                 <a:ea typeface="微软雅黑"/>
                 <a:cs typeface="微软雅黑"/>
               </a:rPr>
-              <a:t>!</a:t>
-            </a:r>
-          </a:p>
-        </p:txBody>
-      </p:sp>
-      <p:sp>
-        <p:nvSpPr>
-          <p:cNvPr id="8" name="TextBox 7"/>
+              <a:t>1</a:t>
+            </a:r>
+          </a:p>
+        </p:txBody>
+      </p:sp>
+      <p:sp>
+        <p:nvSpPr>
+          <p:cNvPr id="9" name="TextBox 8"/>
           <p:cNvSpPr txBox="1"/>
           <p:nvPr/>
         </p:nvSpPr>
         <p:spPr>
           <a:xfrm>
-            <a:off x="1371600" y="1527048"/>
-            <a:ext cx="4434840" cy="457200"/>
+            <a:off x="1554480" y="2450592"/>
+            <a:ext cx="2296058" cy="731520"/>
           </a:xfrm>
           <a:prstGeom prst="rect">
             <a:avLst/>
@@ -6789,33 +7237,33 @@
           <a:p>
             <a:pPr algn="l">
               <a:lnSpc>
-                <a:spcPct val="110000"/>
+                <a:spcPct val="130000"/>
               </a:lnSpc>
             </a:pPr>
             <a:r>
-              <a:rPr sz="1600" b="1">
+              <a:rPr sz="1550" b="1">
                 <a:solidFill>
                   <a:srgbClr val="1C2A33"/>
                 </a:solidFill>
-                <a:latin typeface="微软雅黑"/>
-                <a:ea typeface="微软雅黑"/>
-                <a:cs typeface="微软雅黑"/>
-              </a:rPr>
-              <a:t/>
-            </a:r>
-          </a:p>
-        </p:txBody>
-      </p:sp>
-      <p:sp>
-        <p:nvSpPr>
-          <p:cNvPr id="9" name="TextBox 8"/>
+                <a:latin typeface="楷体"/>
+                <a:ea typeface="楷体"/>
+                <a:cs typeface="楷体"/>
+              </a:rPr>
+              <a:t>「力的律动」读不出</a:t>
+            </a:r>
+          </a:p>
+        </p:txBody>
+      </p:sp>
+      <p:sp>
+        <p:nvSpPr>
+          <p:cNvPr id="10" name="TextBox 9"/>
           <p:cNvSpPr txBox="1"/>
           <p:nvPr/>
         </p:nvSpPr>
         <p:spPr>
           <a:xfrm>
-            <a:off x="1371600" y="1965960"/>
-            <a:ext cx="4434840" cy="1417320"/>
+            <a:off x="914400" y="3246120"/>
+            <a:ext cx="2844698" cy="2743200"/>
           </a:xfrm>
           <a:prstGeom prst="rect">
             <a:avLst/>
@@ -6830,11 +7278,11 @@
           <a:p>
             <a:pPr algn="l">
               <a:lnSpc>
-                <a:spcPct val="128000"/>
+                <a:spcPct val="150000"/>
               </a:lnSpc>
             </a:pPr>
             <a:r>
-              <a:rPr sz="1200" b="0">
+              <a:rPr sz="1350" b="0">
                 <a:solidFill>
                   <a:srgbClr val="1C2A33"/>
                 </a:solidFill>
@@ -6842,21 +7290,21 @@
                 <a:ea typeface="楷体"/>
                 <a:cs typeface="楷体"/>
               </a:rPr>
-              <a:t>① 《放号》的「力的律动」。原因：学生不熟悉自由诗的节奏，看不到排比句式本身就是「力」的形式，需指导朗读体验。</a:t>
-            </a:r>
-          </a:p>
-        </p:txBody>
-      </p:sp>
-      <p:sp>
-        <p:nvSpPr>
-          <p:cNvPr id="10" name="Rounded Rectangle 9"/>
+              <a:t>不熟悉自由诗节奏，看不见排比句式本身就是「力」的形式。→ 把「力的绘画，力的舞蹈……」当作一串快节奏鼓点，排比本身就在发力。</a:t>
+            </a:r>
+          </a:p>
+        </p:txBody>
+      </p:sp>
+      <p:sp>
+        <p:nvSpPr>
+          <p:cNvPr id="11" name="Rounded Rectangle 10"/>
           <p:cNvSpPr/>
           <p:nvPr/>
         </p:nvSpPr>
         <p:spPr>
           <a:xfrm>
-            <a:off x="6263640" y="1417320"/>
-            <a:ext cx="5349240" cy="2057400"/>
+            <a:off x="4399178" y="2194560"/>
+            <a:ext cx="3393338" cy="3931920"/>
           </a:xfrm>
           <a:prstGeom prst="roundRect">
             <a:avLst/>
@@ -6864,9 +7312,9 @@
           <a:solidFill>
             <a:srgbClr val="FFFFFF"/>
           </a:solidFill>
-          <a:ln w="22860">
+          <a:ln w="20320">
             <a:solidFill>
-              <a:srgbClr val="B23A2A"/>
+              <a:srgbClr val="2E7D6B"/>
             </a:solidFill>
           </a:ln>
           <a:effectLst/>
@@ -6895,20 +7343,20 @@
       </p:sp>
       <p:sp>
         <p:nvSpPr>
-          <p:cNvPr id="11" name="Oval 10"/>
+          <p:cNvPr id="12" name="Oval 11"/>
           <p:cNvSpPr/>
           <p:nvPr/>
         </p:nvSpPr>
         <p:spPr>
           <a:xfrm>
-            <a:off x="6428232" y="1581912"/>
-            <a:ext cx="457200" cy="457200"/>
+            <a:off x="4627778" y="2423160"/>
+            <a:ext cx="548640" cy="548640"/>
           </a:xfrm>
           <a:prstGeom prst="ellipse">
             <a:avLst/>
           </a:prstGeom>
           <a:solidFill>
-            <a:srgbClr val="B23A2A"/>
+            <a:srgbClr val="2E7D6B"/>
           </a:solidFill>
           <a:ln>
             <a:noFill/>
@@ -6939,14 +7387,14 @@
       </p:sp>
       <p:sp>
         <p:nvSpPr>
-          <p:cNvPr id="12" name="TextBox 11"/>
+          <p:cNvPr id="13" name="TextBox 12"/>
           <p:cNvSpPr txBox="1"/>
           <p:nvPr/>
         </p:nvSpPr>
         <p:spPr>
           <a:xfrm>
-            <a:off x="6428232" y="1636776"/>
-            <a:ext cx="457200" cy="384048"/>
+            <a:off x="4627778" y="2496312"/>
+            <a:ext cx="548640" cy="411480"/>
           </a:xfrm>
           <a:prstGeom prst="rect">
             <a:avLst/>
@@ -6961,7 +7409,7 @@
           <a:p>
             <a:pPr algn="ctr"/>
             <a:r>
-              <a:rPr sz="1600" b="1">
+              <a:rPr sz="2000" b="1">
                 <a:solidFill>
                   <a:srgbClr val="FFFFFF"/>
                 </a:solidFill>
@@ -6969,21 +7417,21 @@
                 <a:ea typeface="微软雅黑"/>
                 <a:cs typeface="微软雅黑"/>
               </a:rPr>
-              <a:t>!</a:t>
-            </a:r>
-          </a:p>
-        </p:txBody>
-      </p:sp>
-      <p:sp>
-        <p:nvSpPr>
-          <p:cNvPr id="13" name="TextBox 12"/>
+              <a:t>2</a:t>
+            </a:r>
+          </a:p>
+        </p:txBody>
+      </p:sp>
+      <p:sp>
+        <p:nvSpPr>
+          <p:cNvPr id="14" name="TextBox 13"/>
           <p:cNvSpPr txBox="1"/>
           <p:nvPr/>
         </p:nvSpPr>
         <p:spPr>
           <a:xfrm>
-            <a:off x="6995160" y="1527048"/>
-            <a:ext cx="4434840" cy="457200"/>
+            <a:off x="5313578" y="2450592"/>
+            <a:ext cx="2296058" cy="731520"/>
           </a:xfrm>
           <a:prstGeom prst="rect">
             <a:avLst/>
@@ -6998,33 +7446,33 @@
           <a:p>
             <a:pPr algn="l">
               <a:lnSpc>
-                <a:spcPct val="110000"/>
+                <a:spcPct val="130000"/>
               </a:lnSpc>
             </a:pPr>
             <a:r>
-              <a:rPr sz="1600" b="1">
+              <a:rPr sz="1550" b="1">
                 <a:solidFill>
                   <a:srgbClr val="1C2A33"/>
                 </a:solidFill>
-                <a:latin typeface="微软雅黑"/>
-                <a:ea typeface="微软雅黑"/>
-                <a:cs typeface="微软雅黑"/>
-              </a:rPr>
-              <a:t/>
-            </a:r>
-          </a:p>
-        </p:txBody>
-      </p:sp>
-      <p:sp>
-        <p:nvSpPr>
-          <p:cNvPr id="14" name="TextBox 13"/>
+                <a:latin typeface="楷体"/>
+                <a:ea typeface="楷体"/>
+                <a:cs typeface="楷体"/>
+              </a:rPr>
+              <a:t>红烛的「泪」想简单了</a:t>
+            </a:r>
+          </a:p>
+        </p:txBody>
+      </p:sp>
+      <p:sp>
+        <p:nvSpPr>
+          <p:cNvPr id="15" name="TextBox 14"/>
           <p:cNvSpPr txBox="1"/>
           <p:nvPr/>
         </p:nvSpPr>
         <p:spPr>
           <a:xfrm>
-            <a:off x="6995160" y="1965960"/>
-            <a:ext cx="4434840" cy="1417320"/>
+            <a:off x="4673498" y="3246120"/>
+            <a:ext cx="2844698" cy="2743200"/>
           </a:xfrm>
           <a:prstGeom prst="rect">
             <a:avLst/>
@@ -7039,11 +7487,11 @@
           <a:p>
             <a:pPr algn="l">
               <a:lnSpc>
-                <a:spcPct val="128000"/>
+                <a:spcPct val="150000"/>
               </a:lnSpc>
             </a:pPr>
             <a:r>
-              <a:rPr sz="1200" b="0">
+              <a:rPr sz="1350" b="0">
                 <a:solidFill>
                   <a:srgbClr val="1C2A33"/>
                 </a:solidFill>
@@ -7051,21 +7499,21 @@
                 <a:ea typeface="楷体"/>
                 <a:cs typeface="楷体"/>
               </a:rPr>
-              <a:t>② 《红烛》的「泪」的多义性。原因：学生易理解为「伤心的泪」，此处是「为不能更快烧完而焦灼的泪」，需逐句细读。</a:t>
-            </a:r>
-          </a:p>
-        </p:txBody>
-      </p:sp>
-      <p:sp>
-        <p:nvSpPr>
-          <p:cNvPr id="15" name="Rounded Rectangle 14"/>
+              <a:t>容易只当作「伤心的泪」。→ 区分物理的蜡油与情感的焦灼——「烧得不稳时着急得流泪」，是怕理想来得太慢。</a:t>
+            </a:r>
+          </a:p>
+        </p:txBody>
+      </p:sp>
+      <p:sp>
+        <p:nvSpPr>
+          <p:cNvPr id="16" name="Rounded Rectangle 15"/>
           <p:cNvSpPr/>
           <p:nvPr/>
         </p:nvSpPr>
         <p:spPr>
           <a:xfrm>
-            <a:off x="640080" y="3703320"/>
-            <a:ext cx="5349240" cy="2057400"/>
+            <a:off x="8158276" y="2194560"/>
+            <a:ext cx="3393338" cy="3931920"/>
           </a:xfrm>
           <a:prstGeom prst="roundRect">
             <a:avLst/>
@@ -7073,9 +7521,9 @@
           <a:solidFill>
             <a:srgbClr val="FFFFFF"/>
           </a:solidFill>
-          <a:ln w="22860">
+          <a:ln w="20320">
             <a:solidFill>
-              <a:srgbClr val="B23A2A"/>
+              <a:srgbClr val="C8A86B"/>
             </a:solidFill>
           </a:ln>
           <a:effectLst/>
@@ -7104,20 +7552,20 @@
       </p:sp>
       <p:sp>
         <p:nvSpPr>
-          <p:cNvPr id="16" name="Oval 15"/>
+          <p:cNvPr id="17" name="Oval 16"/>
           <p:cNvSpPr/>
           <p:nvPr/>
         </p:nvSpPr>
         <p:spPr>
           <a:xfrm>
-            <a:off x="804672" y="3867912"/>
-            <a:ext cx="457200" cy="457200"/>
+            <a:off x="8386876" y="2423160"/>
+            <a:ext cx="548640" cy="548640"/>
           </a:xfrm>
           <a:prstGeom prst="ellipse">
             <a:avLst/>
           </a:prstGeom>
           <a:solidFill>
-            <a:srgbClr val="B23A2A"/>
+            <a:srgbClr val="C8A86B"/>
           </a:solidFill>
           <a:ln>
             <a:noFill/>
@@ -7148,14 +7596,14 @@
       </p:sp>
       <p:sp>
         <p:nvSpPr>
-          <p:cNvPr id="17" name="TextBox 16"/>
+          <p:cNvPr id="18" name="TextBox 17"/>
           <p:cNvSpPr txBox="1"/>
           <p:nvPr/>
         </p:nvSpPr>
         <p:spPr>
           <a:xfrm>
-            <a:off x="804672" y="3922776"/>
-            <a:ext cx="457200" cy="384048"/>
+            <a:off x="8386876" y="2496312"/>
+            <a:ext cx="548640" cy="411480"/>
           </a:xfrm>
           <a:prstGeom prst="rect">
             <a:avLst/>
@@ -7170,7 +7618,7 @@
           <a:p>
             <a:pPr algn="ctr"/>
             <a:r>
-              <a:rPr sz="1600" b="1">
+              <a:rPr sz="2000" b="1">
                 <a:solidFill>
                   <a:srgbClr val="FFFFFF"/>
                 </a:solidFill>
@@ -7178,21 +7626,21 @@
                 <a:ea typeface="微软雅黑"/>
                 <a:cs typeface="微软雅黑"/>
               </a:rPr>
-              <a:t>!</a:t>
-            </a:r>
-          </a:p>
-        </p:txBody>
-      </p:sp>
-      <p:sp>
-        <p:nvSpPr>
-          <p:cNvPr id="18" name="TextBox 17"/>
+              <a:t>3</a:t>
+            </a:r>
+          </a:p>
+        </p:txBody>
+      </p:sp>
+      <p:sp>
+        <p:nvSpPr>
+          <p:cNvPr id="19" name="TextBox 18"/>
           <p:cNvSpPr txBox="1"/>
           <p:nvPr/>
         </p:nvSpPr>
         <p:spPr>
           <a:xfrm>
-            <a:off x="1371600" y="3813048"/>
-            <a:ext cx="4434840" cy="457200"/>
+            <a:off x="9072676" y="2450592"/>
+            <a:ext cx="2296058" cy="731520"/>
           </a:xfrm>
           <a:prstGeom prst="rect">
             <a:avLst/>
@@ -7207,33 +7655,33 @@
           <a:p>
             <a:pPr algn="l">
               <a:lnSpc>
-                <a:spcPct val="110000"/>
+                <a:spcPct val="130000"/>
               </a:lnSpc>
             </a:pPr>
             <a:r>
-              <a:rPr sz="1600" b="1">
+              <a:rPr sz="1550" b="1">
                 <a:solidFill>
                   <a:srgbClr val="1C2A33"/>
                 </a:solidFill>
-                <a:latin typeface="微软雅黑"/>
-                <a:ea typeface="微软雅黑"/>
-                <a:cs typeface="微软雅黑"/>
-              </a:rPr>
-              <a:t/>
-            </a:r>
-          </a:p>
-        </p:txBody>
-      </p:sp>
-      <p:sp>
-        <p:nvSpPr>
-          <p:cNvPr id="19" name="TextBox 18"/>
+                <a:latin typeface="楷体"/>
+                <a:ea typeface="楷体"/>
+                <a:cs typeface="楷体"/>
+              </a:rPr>
+              <a:t>把意象当成了比喻</a:t>
+            </a:r>
+          </a:p>
+        </p:txBody>
+      </p:sp>
+      <p:sp>
+        <p:nvSpPr>
+          <p:cNvPr id="20" name="TextBox 19"/>
           <p:cNvSpPr txBox="1"/>
           <p:nvPr/>
         </p:nvSpPr>
         <p:spPr>
           <a:xfrm>
-            <a:off x="1371600" y="4251960"/>
-            <a:ext cx="4434840" cy="1417320"/>
+            <a:off x="8432596" y="3246120"/>
+            <a:ext cx="2844698" cy="2743200"/>
           </a:xfrm>
           <a:prstGeom prst="rect">
             <a:avLst/>
@@ -7248,11 +7696,11 @@
           <a:p>
             <a:pPr algn="l">
               <a:lnSpc>
-                <a:spcPct val="128000"/>
+                <a:spcPct val="150000"/>
               </a:lnSpc>
             </a:pPr>
             <a:r>
-              <a:rPr sz="1200" b="0">
+              <a:rPr sz="1350" b="0">
                 <a:solidFill>
                   <a:srgbClr val="1C2A33"/>
                 </a:solidFill>
@@ -7260,14 +7708,14 @@
                 <a:ea typeface="楷体"/>
                 <a:cs typeface="楷体"/>
               </a:rPr>
-              <a:t>③ 「意象」与「比喻」的区别。原因：学生习惯「A像B」的比喻思维，需点明意象是「借物寄情」而非「打比方」。</a:t>
-            </a:r>
-          </a:p>
-        </p:txBody>
-      </p:sp>
-      <p:sp>
-        <p:nvSpPr>
-          <p:cNvPr id="20" name="TextBox 19"/>
+              <a:t>习惯「A 像 B」。→ 「红烛像奉献的人」是比喻；「红烛就是诗人自己」是意象——物本身就是情感的载体。</a:t>
+            </a:r>
+          </a:p>
+        </p:txBody>
+      </p:sp>
+      <p:sp>
+        <p:nvSpPr>
+          <p:cNvPr id="21" name="TextBox 20"/>
           <p:cNvSpPr txBox="1"/>
           <p:nvPr/>
         </p:nvSpPr>
@@ -7394,13 +7842,13 @@
             <a:r>
               <a:rPr sz="1300" b="1">
                 <a:solidFill>
-                  <a:srgbClr val="C8A86B"/>
+                  <a:srgbClr val="B23A2A"/>
                 </a:solidFill>
                 <a:latin typeface="微软雅黑"/>
                 <a:ea typeface="微软雅黑"/>
                 <a:cs typeface="微软雅黑"/>
               </a:rPr>
-              <a:t>要点板书</a:t>
+              <a:t>板书精华 · 双表对照</a:t>
             </a:r>
           </a:p>
         </p:txBody>
@@ -7420,7 +7868,7 @@
             <a:avLst/>
           </a:prstGeom>
           <a:solidFill>
-            <a:srgbClr val="C8A86B"/>
+            <a:srgbClr val="B23A2A"/>
           </a:solidFill>
           <a:ln>
             <a:noFill/>
@@ -7457,8 +7905,8 @@
         </p:nvSpPr>
         <p:spPr>
           <a:xfrm>
-            <a:off x="640080" y="1417320"/>
-            <a:ext cx="10911535" cy="5394960"/>
+            <a:off x="640080" y="1920240"/>
+            <a:ext cx="5272887" cy="3108960"/>
           </a:xfrm>
           <a:prstGeom prst="roundRect">
             <a:avLst/>
@@ -7466,9 +7914,9 @@
           <a:solidFill>
             <a:srgbClr val="FFFFFF"/>
           </a:solidFill>
-          <a:ln w="25400">
+          <a:ln w="22860">
             <a:solidFill>
-              <a:srgbClr val="C8A86B"/>
+              <a:srgbClr val="B23A2A"/>
             </a:solidFill>
           </a:ln>
           <a:effectLst/>
@@ -7503,8 +7951,8 @@
         </p:nvSpPr>
         <p:spPr>
           <a:xfrm>
-            <a:off x="914400" y="1554480"/>
-            <a:ext cx="10362895" cy="5120640"/>
+            <a:off x="914400" y="2057400"/>
+            <a:ext cx="4724247" cy="457200"/>
           </a:xfrm>
           <a:prstGeom prst="rect">
             <a:avLst/>
@@ -7517,53 +7965,445 @@
           </a:bodyPr>
           <a:lstStyle/>
           <a:p>
+            <a:pPr algn="l"/>
+            <a:r>
+              <a:rPr sz="1700" b="1">
+                <a:solidFill>
+                  <a:srgbClr val="B23A2A"/>
+                </a:solidFill>
+                <a:latin typeface="楷体"/>
+                <a:ea typeface="楷体"/>
+                <a:cs typeface="楷体"/>
+              </a:rPr>
+              <a:t>《放号》意象表</a:t>
+            </a:r>
+          </a:p>
+        </p:txBody>
+      </p:sp>
+      <p:sp>
+        <p:nvSpPr>
+          <p:cNvPr id="7" name="TextBox 6"/>
+          <p:cNvSpPr txBox="1"/>
+          <p:nvPr/>
+        </p:nvSpPr>
+        <p:spPr>
+          <a:xfrm>
+            <a:off x="914400" y="2606040"/>
+            <a:ext cx="4724247" cy="2286000"/>
+          </a:xfrm>
+          <a:prstGeom prst="rect">
+            <a:avLst/>
+          </a:prstGeom>
+          <a:noFill/>
+        </p:spPr>
+        <p:txBody>
+          <a:bodyPr wrap="square" anchor="t" lIns="0" rIns="0" tIns="0" bIns="0">
+            <a:spAutoFit/>
+          </a:bodyPr>
+          <a:lstStyle/>
+          <a:p>
             <a:pPr algn="l">
-              <a:lnSpc>
-                <a:spcPct val="110000"/>
-              </a:lnSpc>
               <a:spcAft>
-                <a:spcPts val="100"/>
+                <a:spcPts val="500"/>
               </a:spcAft>
             </a:pPr>
             <a:r>
-              <a:rPr sz="1300" b="0">
-                <a:solidFill>
-                  <a:srgbClr val="1C2A33"/>
+              <a:rPr sz="1300" b="1">
+                <a:solidFill>
+                  <a:srgbClr val="6B6258"/>
                 </a:solidFill>
                 <a:latin typeface="微软雅黑"/>
                 <a:ea typeface="微软雅黑"/>
                 <a:cs typeface="微软雅黑"/>
               </a:rPr>
-              <a:t>┌── 现代诗群文阅读 ──┐
-│ 红烛:奉献·光明·赤诚 │
-│ │
-│ 放号:呐喊·爆发 │
-│ 红烛:诉说·低语 │
-│ │
-│ 【放号意象表】 │
-│ 白云|自由|宏大 │
-│ 洪涛|力量|毁灭+创造 │
-│ 力 |律动|排比=形式 │
-│ │
-│ 【红烛意象表】 │
-│ 红烛|烧→牺牲 │
-│ 光 |放→光明 │
-│ 泪 |流→赤诚·焦灼 │
-│ │
-│ 【比较表】 │
-│ 意象: 放号宏大|红烛精微│
-│ 情感: 放号激越|红烛悲壮│
-│ 节奏: 放号排比|红烛反复│
-│ │
-│ 意象=情志+物象(≠比喻) │
-└────────────────────────┘</a:t>
-            </a:r>
-          </a:p>
-        </p:txBody>
-      </p:sp>
-      <p:sp>
-        <p:nvSpPr>
-          <p:cNvPr id="7" name="TextBox 6"/>
+              <a:t>意象 | 特征 | 象征</a:t>
+            </a:r>
+          </a:p>
+          <a:p>
+            <a:pPr algn="l">
+              <a:lnSpc>
+                <a:spcPct val="150000"/>
+              </a:lnSpc>
+              <a:spcAft>
+                <a:spcPts val="400"/>
+              </a:spcAft>
+            </a:pPr>
+            <a:r>
+              <a:rPr sz="1400" b="0">
+                <a:solidFill>
+                  <a:srgbClr val="1C2A33"/>
+                </a:solidFill>
+                <a:latin typeface="楷体"/>
+                <a:ea typeface="楷体"/>
+                <a:cs typeface="楷体"/>
+              </a:rPr>
+              <a:t>白云 — 自由 — 宏大</a:t>
+            </a:r>
+          </a:p>
+          <a:p>
+            <a:pPr algn="l">
+              <a:lnSpc>
+                <a:spcPct val="150000"/>
+              </a:lnSpc>
+              <a:spcAft>
+                <a:spcPts val="400"/>
+              </a:spcAft>
+            </a:pPr>
+            <a:r>
+              <a:rPr sz="1400" b="0">
+                <a:solidFill>
+                  <a:srgbClr val="1C2A33"/>
+                </a:solidFill>
+                <a:latin typeface="楷体"/>
+                <a:ea typeface="楷体"/>
+                <a:cs typeface="楷体"/>
+              </a:rPr>
+              <a:t>洪涛 — 力量 — 毁灭+创造</a:t>
+            </a:r>
+          </a:p>
+          <a:p>
+            <a:pPr algn="l">
+              <a:lnSpc>
+                <a:spcPct val="150000"/>
+              </a:lnSpc>
+            </a:pPr>
+            <a:r>
+              <a:rPr sz="1400" b="0">
+                <a:solidFill>
+                  <a:srgbClr val="1C2A33"/>
+                </a:solidFill>
+                <a:latin typeface="楷体"/>
+                <a:ea typeface="楷体"/>
+                <a:cs typeface="楷体"/>
+              </a:rPr>
+              <a:t>力 — 律动 — 排比即形式</a:t>
+            </a:r>
+          </a:p>
+        </p:txBody>
+      </p:sp>
+      <p:sp>
+        <p:nvSpPr>
+          <p:cNvPr id="8" name="Rounded Rectangle 7"/>
+          <p:cNvSpPr/>
+          <p:nvPr/>
+        </p:nvSpPr>
+        <p:spPr>
+          <a:xfrm>
+            <a:off x="6278727" y="1920240"/>
+            <a:ext cx="5272887" cy="3108960"/>
+          </a:xfrm>
+          <a:prstGeom prst="roundRect">
+            <a:avLst/>
+          </a:prstGeom>
+          <a:solidFill>
+            <a:srgbClr val="FFFFFF"/>
+          </a:solidFill>
+          <a:ln w="22860">
+            <a:solidFill>
+              <a:srgbClr val="2E7D6B"/>
+            </a:solidFill>
+          </a:ln>
+          <a:effectLst/>
+        </p:spPr>
+        <p:style>
+          <a:lnRef idx="1">
+            <a:schemeClr val="accent1"/>
+          </a:lnRef>
+          <a:fillRef idx="3">
+            <a:schemeClr val="accent1"/>
+          </a:fillRef>
+          <a:effectRef idx="2">
+            <a:schemeClr val="accent1"/>
+          </a:effectRef>
+          <a:fontRef idx="minor">
+            <a:schemeClr val="lt1"/>
+          </a:fontRef>
+        </p:style>
+        <p:txBody>
+          <a:bodyPr rtlCol="0" anchor="ctr"/>
+          <a:lstStyle/>
+          <a:p>
+            <a:pPr algn="ctr"/>
+          </a:p>
+        </p:txBody>
+      </p:sp>
+      <p:sp>
+        <p:nvSpPr>
+          <p:cNvPr id="9" name="TextBox 8"/>
+          <p:cNvSpPr txBox="1"/>
+          <p:nvPr/>
+        </p:nvSpPr>
+        <p:spPr>
+          <a:xfrm>
+            <a:off x="6553047" y="2057400"/>
+            <a:ext cx="4724247" cy="457200"/>
+          </a:xfrm>
+          <a:prstGeom prst="rect">
+            <a:avLst/>
+          </a:prstGeom>
+          <a:noFill/>
+        </p:spPr>
+        <p:txBody>
+          <a:bodyPr wrap="square" anchor="t" lIns="0" rIns="0" tIns="0" bIns="0">
+            <a:spAutoFit/>
+          </a:bodyPr>
+          <a:lstStyle/>
+          <a:p>
+            <a:pPr algn="l"/>
+            <a:r>
+              <a:rPr sz="1700" b="1">
+                <a:solidFill>
+                  <a:srgbClr val="2E7D6B"/>
+                </a:solidFill>
+                <a:latin typeface="楷体"/>
+                <a:ea typeface="楷体"/>
+                <a:cs typeface="楷体"/>
+              </a:rPr>
+              <a:t>《红烛》意象表</a:t>
+            </a:r>
+          </a:p>
+        </p:txBody>
+      </p:sp>
+      <p:sp>
+        <p:nvSpPr>
+          <p:cNvPr id="10" name="TextBox 9"/>
+          <p:cNvSpPr txBox="1"/>
+          <p:nvPr/>
+        </p:nvSpPr>
+        <p:spPr>
+          <a:xfrm>
+            <a:off x="6553047" y="2606040"/>
+            <a:ext cx="4724247" cy="2286000"/>
+          </a:xfrm>
+          <a:prstGeom prst="rect">
+            <a:avLst/>
+          </a:prstGeom>
+          <a:noFill/>
+        </p:spPr>
+        <p:txBody>
+          <a:bodyPr wrap="square" anchor="t" lIns="0" rIns="0" tIns="0" bIns="0">
+            <a:spAutoFit/>
+          </a:bodyPr>
+          <a:lstStyle/>
+          <a:p>
+            <a:pPr algn="l">
+              <a:spcAft>
+                <a:spcPts val="500"/>
+              </a:spcAft>
+            </a:pPr>
+            <a:r>
+              <a:rPr sz="1300" b="1">
+                <a:solidFill>
+                  <a:srgbClr val="6B6258"/>
+                </a:solidFill>
+                <a:latin typeface="微软雅黑"/>
+                <a:ea typeface="微软雅黑"/>
+                <a:cs typeface="微软雅黑"/>
+              </a:rPr>
+              <a:t>意象 | 动作 | 象征</a:t>
+            </a:r>
+          </a:p>
+          <a:p>
+            <a:pPr algn="l">
+              <a:lnSpc>
+                <a:spcPct val="150000"/>
+              </a:lnSpc>
+              <a:spcAft>
+                <a:spcPts val="400"/>
+              </a:spcAft>
+            </a:pPr>
+            <a:r>
+              <a:rPr sz="1400" b="0">
+                <a:solidFill>
+                  <a:srgbClr val="1C2A33"/>
+                </a:solidFill>
+                <a:latin typeface="楷体"/>
+                <a:ea typeface="楷体"/>
+                <a:cs typeface="楷体"/>
+              </a:rPr>
+              <a:t>红烛 — 烧 — 牺牲</a:t>
+            </a:r>
+          </a:p>
+          <a:p>
+            <a:pPr algn="l">
+              <a:lnSpc>
+                <a:spcPct val="150000"/>
+              </a:lnSpc>
+              <a:spcAft>
+                <a:spcPts val="400"/>
+              </a:spcAft>
+            </a:pPr>
+            <a:r>
+              <a:rPr sz="1400" b="0">
+                <a:solidFill>
+                  <a:srgbClr val="1C2A33"/>
+                </a:solidFill>
+                <a:latin typeface="楷体"/>
+                <a:ea typeface="楷体"/>
+                <a:cs typeface="楷体"/>
+              </a:rPr>
+              <a:t>光 — 放 — 光明</a:t>
+            </a:r>
+          </a:p>
+          <a:p>
+            <a:pPr algn="l">
+              <a:lnSpc>
+                <a:spcPct val="150000"/>
+              </a:lnSpc>
+            </a:pPr>
+            <a:r>
+              <a:rPr sz="1400" b="0">
+                <a:solidFill>
+                  <a:srgbClr val="1C2A33"/>
+                </a:solidFill>
+                <a:latin typeface="楷体"/>
+                <a:ea typeface="楷体"/>
+                <a:cs typeface="楷体"/>
+              </a:rPr>
+              <a:t>泪 — 流 — 赤诚·焦灼</a:t>
+            </a:r>
+          </a:p>
+        </p:txBody>
+      </p:sp>
+      <p:sp>
+        <p:nvSpPr>
+          <p:cNvPr id="11" name="Rounded Rectangle 10"/>
+          <p:cNvSpPr/>
+          <p:nvPr/>
+        </p:nvSpPr>
+        <p:spPr>
+          <a:xfrm>
+            <a:off x="640080" y="5212080"/>
+            <a:ext cx="10911535" cy="1371600"/>
+          </a:xfrm>
+          <a:prstGeom prst="roundRect">
+            <a:avLst/>
+          </a:prstGeom>
+          <a:solidFill>
+            <a:srgbClr val="1C2A33"/>
+          </a:solidFill>
+          <a:effectLst/>
+        </p:spPr>
+        <p:style>
+          <a:lnRef idx="1">
+            <a:schemeClr val="accent1"/>
+          </a:lnRef>
+          <a:fillRef idx="3">
+            <a:schemeClr val="accent1"/>
+          </a:fillRef>
+          <a:effectRef idx="2">
+            <a:schemeClr val="accent1"/>
+          </a:effectRef>
+          <a:fontRef idx="minor">
+            <a:schemeClr val="lt1"/>
+          </a:fontRef>
+        </p:style>
+        <p:txBody>
+          <a:bodyPr rtlCol="0" anchor="ctr"/>
+          <a:lstStyle/>
+          <a:p>
+            <a:pPr algn="ctr"/>
+          </a:p>
+        </p:txBody>
+      </p:sp>
+      <p:sp>
+        <p:nvSpPr>
+          <p:cNvPr id="12" name="TextBox 11"/>
+          <p:cNvSpPr txBox="1"/>
+          <p:nvPr/>
+        </p:nvSpPr>
+        <p:spPr>
+          <a:xfrm>
+            <a:off x="914400" y="5321808"/>
+            <a:ext cx="3108960" cy="457200"/>
+          </a:xfrm>
+          <a:prstGeom prst="rect">
+            <a:avLst/>
+          </a:prstGeom>
+          <a:noFill/>
+        </p:spPr>
+        <p:txBody>
+          <a:bodyPr wrap="square" anchor="t" lIns="0" rIns="0" tIns="0" bIns="0">
+            <a:spAutoFit/>
+          </a:bodyPr>
+          <a:lstStyle/>
+          <a:p>
+            <a:pPr algn="l"/>
+            <a:r>
+              <a:rPr sz="1500" b="1">
+                <a:solidFill>
+                  <a:srgbClr val="C8A86B"/>
+                </a:solidFill>
+                <a:latin typeface="楷体"/>
+                <a:ea typeface="楷体"/>
+                <a:cs typeface="楷体"/>
+              </a:rPr>
+              <a:t>比较表</a:t>
+            </a:r>
+          </a:p>
+        </p:txBody>
+      </p:sp>
+      <p:sp>
+        <p:nvSpPr>
+          <p:cNvPr id="13" name="TextBox 12"/>
+          <p:cNvSpPr txBox="1"/>
+          <p:nvPr/>
+        </p:nvSpPr>
+        <p:spPr>
+          <a:xfrm>
+            <a:off x="914400" y="5715000"/>
+            <a:ext cx="10362895" cy="822960"/>
+          </a:xfrm>
+          <a:prstGeom prst="rect">
+            <a:avLst/>
+          </a:prstGeom>
+          <a:noFill/>
+        </p:spPr>
+        <p:txBody>
+          <a:bodyPr wrap="square" anchor="t" lIns="0" rIns="0" tIns="0" bIns="0">
+            <a:spAutoFit/>
+          </a:bodyPr>
+          <a:lstStyle/>
+          <a:p>
+            <a:pPr algn="l">
+              <a:lnSpc>
+                <a:spcPct val="150000"/>
+              </a:lnSpc>
+              <a:spcAft>
+                <a:spcPts val="400"/>
+              </a:spcAft>
+            </a:pPr>
+            <a:r>
+              <a:rPr sz="1300" b="0">
+                <a:solidFill>
+                  <a:srgbClr val="FFFFFF"/>
+                </a:solidFill>
+                <a:latin typeface="楷体"/>
+                <a:ea typeface="楷体"/>
+                <a:cs typeface="楷体"/>
+              </a:rPr>
+              <a:t>意象：放号宏大 | 红烛精微      情感：放号激越 | 红烛悲壮      节奏：放号排比 | 红烛反复</a:t>
+            </a:r>
+          </a:p>
+          <a:p>
+            <a:pPr algn="l"/>
+            <a:r>
+              <a:rPr sz="1400" b="1">
+                <a:solidFill>
+                  <a:srgbClr val="C8A86B"/>
+                </a:solidFill>
+                <a:latin typeface="楷体"/>
+                <a:ea typeface="楷体"/>
+                <a:cs typeface="楷体"/>
+              </a:rPr>
+              <a:t>意象 ＝ 主观情志 ＋ 客观物象 → 融合体（≠ 比喻）</a:t>
+            </a:r>
+          </a:p>
+        </p:txBody>
+      </p:sp>
+      <p:sp>
+        <p:nvSpPr>
+          <p:cNvPr id="14" name="TextBox 13"/>
           <p:cNvSpPr txBox="1"/>
           <p:nvPr/>
         </p:nvSpPr>
@@ -7690,13 +8530,13 @@
             <a:r>
               <a:rPr sz="1300" b="1">
                 <a:solidFill>
-                  <a:srgbClr val="2E7D6B"/>
+                  <a:srgbClr val="B23A2A"/>
                 </a:solidFill>
                 <a:latin typeface="微软雅黑"/>
                 <a:ea typeface="微软雅黑"/>
                 <a:cs typeface="微软雅黑"/>
               </a:rPr>
-              <a:t>分层作业</a:t>
+              <a:t>作业 · 分层</a:t>
             </a:r>
           </a:p>
         </p:txBody>
@@ -7711,6 +8551,301 @@
           <a:xfrm>
             <a:off x="640080" y="1097280"/>
             <a:ext cx="822960" cy="30480"/>
+          </a:xfrm>
+          <a:prstGeom prst="rect">
+            <a:avLst/>
+          </a:prstGeom>
+          <a:solidFill>
+            <a:srgbClr val="B23A2A"/>
+          </a:solidFill>
+          <a:ln>
+            <a:noFill/>
+          </a:ln>
+          <a:effectLst/>
+        </p:spPr>
+        <p:style>
+          <a:lnRef idx="1">
+            <a:schemeClr val="accent1"/>
+          </a:lnRef>
+          <a:fillRef idx="3">
+            <a:schemeClr val="accent1"/>
+          </a:fillRef>
+          <a:effectRef idx="2">
+            <a:schemeClr val="accent1"/>
+          </a:effectRef>
+          <a:fontRef idx="minor">
+            <a:schemeClr val="lt1"/>
+          </a:fontRef>
+        </p:style>
+        <p:txBody>
+          <a:bodyPr rtlCol="0" anchor="ctr"/>
+          <a:lstStyle/>
+          <a:p>
+            <a:pPr algn="ctr"/>
+          </a:p>
+        </p:txBody>
+      </p:sp>
+      <p:sp>
+        <p:nvSpPr>
+          <p:cNvPr id="5" name="TextBox 4"/>
+          <p:cNvSpPr txBox="1"/>
+          <p:nvPr/>
+        </p:nvSpPr>
+        <p:spPr>
+          <a:xfrm>
+            <a:off x="640080" y="1325880"/>
+            <a:ext cx="10058400" cy="640080"/>
+          </a:xfrm>
+          <a:prstGeom prst="rect">
+            <a:avLst/>
+          </a:prstGeom>
+          <a:noFill/>
+        </p:spPr>
+        <p:txBody>
+          <a:bodyPr wrap="square" anchor="t" lIns="0" rIns="0" tIns="0" bIns="0">
+            <a:spAutoFit/>
+          </a:bodyPr>
+          <a:lstStyle/>
+          <a:p>
+            <a:pPr algn="l"/>
+            <a:r>
+              <a:rPr sz="2600" b="1">
+                <a:solidFill>
+                  <a:srgbClr val="1C2A33"/>
+                </a:solidFill>
+                <a:latin typeface="楷体"/>
+                <a:ea typeface="楷体"/>
+                <a:cs typeface="楷体"/>
+              </a:rPr>
+              <a:t>基础 · 提升 · 衔接</a:t>
+            </a:r>
+          </a:p>
+        </p:txBody>
+      </p:sp>
+      <p:sp>
+        <p:nvSpPr>
+          <p:cNvPr id="6" name="Rounded Rectangle 5"/>
+          <p:cNvSpPr/>
+          <p:nvPr/>
+        </p:nvSpPr>
+        <p:spPr>
+          <a:xfrm>
+            <a:off x="640080" y="2194560"/>
+            <a:ext cx="3393338" cy="3383280"/>
+          </a:xfrm>
+          <a:prstGeom prst="roundRect">
+            <a:avLst/>
+          </a:prstGeom>
+          <a:solidFill>
+            <a:srgbClr val="FFFFFF"/>
+          </a:solidFill>
+          <a:ln w="20320">
+            <a:solidFill>
+              <a:srgbClr val="B23A2A"/>
+            </a:solidFill>
+          </a:ln>
+          <a:effectLst/>
+        </p:spPr>
+        <p:style>
+          <a:lnRef idx="1">
+            <a:schemeClr val="accent1"/>
+          </a:lnRef>
+          <a:fillRef idx="3">
+            <a:schemeClr val="accent1"/>
+          </a:fillRef>
+          <a:effectRef idx="2">
+            <a:schemeClr val="accent1"/>
+          </a:effectRef>
+          <a:fontRef idx="minor">
+            <a:schemeClr val="lt1"/>
+          </a:fontRef>
+        </p:style>
+        <p:txBody>
+          <a:bodyPr rtlCol="0" anchor="ctr"/>
+          <a:lstStyle/>
+          <a:p>
+            <a:pPr algn="ctr"/>
+          </a:p>
+        </p:txBody>
+      </p:sp>
+      <p:sp>
+        <p:nvSpPr>
+          <p:cNvPr id="7" name="Rectangle 6"/>
+          <p:cNvSpPr/>
+          <p:nvPr/>
+        </p:nvSpPr>
+        <p:spPr>
+          <a:xfrm>
+            <a:off x="640080" y="2194560"/>
+            <a:ext cx="3393338" cy="548640"/>
+          </a:xfrm>
+          <a:prstGeom prst="rect">
+            <a:avLst/>
+          </a:prstGeom>
+          <a:solidFill>
+            <a:srgbClr val="B23A2A"/>
+          </a:solidFill>
+          <a:ln>
+            <a:noFill/>
+          </a:ln>
+          <a:effectLst/>
+        </p:spPr>
+        <p:style>
+          <a:lnRef idx="1">
+            <a:schemeClr val="accent1"/>
+          </a:lnRef>
+          <a:fillRef idx="3">
+            <a:schemeClr val="accent1"/>
+          </a:fillRef>
+          <a:effectRef idx="2">
+            <a:schemeClr val="accent1"/>
+          </a:effectRef>
+          <a:fontRef idx="minor">
+            <a:schemeClr val="lt1"/>
+          </a:fontRef>
+        </p:style>
+        <p:txBody>
+          <a:bodyPr rtlCol="0" anchor="ctr"/>
+          <a:lstStyle/>
+          <a:p>
+            <a:pPr algn="ctr"/>
+          </a:p>
+        </p:txBody>
+      </p:sp>
+      <p:sp>
+        <p:nvSpPr>
+          <p:cNvPr id="8" name="TextBox 7"/>
+          <p:cNvSpPr txBox="1"/>
+          <p:nvPr/>
+        </p:nvSpPr>
+        <p:spPr>
+          <a:xfrm>
+            <a:off x="640080" y="2304288"/>
+            <a:ext cx="3393338" cy="365760"/>
+          </a:xfrm>
+          <a:prstGeom prst="rect">
+            <a:avLst/>
+          </a:prstGeom>
+          <a:noFill/>
+        </p:spPr>
+        <p:txBody>
+          <a:bodyPr wrap="square" anchor="t" lIns="0" rIns="0" tIns="0" bIns="0">
+            <a:spAutoFit/>
+          </a:bodyPr>
+          <a:lstStyle/>
+          <a:p>
+            <a:pPr algn="ctr"/>
+            <a:r>
+              <a:rPr sz="1600" b="1">
+                <a:solidFill>
+                  <a:srgbClr val="FFFFFF"/>
+                </a:solidFill>
+                <a:latin typeface="微软雅黑"/>
+                <a:ea typeface="微软雅黑"/>
+                <a:cs typeface="微软雅黑"/>
+              </a:rPr>
+              <a:t>基础 · 必做</a:t>
+            </a:r>
+          </a:p>
+        </p:txBody>
+      </p:sp>
+      <p:sp>
+        <p:nvSpPr>
+          <p:cNvPr id="9" name="TextBox 8"/>
+          <p:cNvSpPr txBox="1"/>
+          <p:nvPr/>
+        </p:nvSpPr>
+        <p:spPr>
+          <a:xfrm>
+            <a:off x="914400" y="2971800"/>
+            <a:ext cx="2844698" cy="2468880"/>
+          </a:xfrm>
+          <a:prstGeom prst="rect">
+            <a:avLst/>
+          </a:prstGeom>
+          <a:noFill/>
+        </p:spPr>
+        <p:txBody>
+          <a:bodyPr wrap="square" anchor="t" lIns="0" rIns="0" tIns="0" bIns="0">
+            <a:spAutoFit/>
+          </a:bodyPr>
+          <a:lstStyle/>
+          <a:p>
+            <a:pPr algn="l">
+              <a:lnSpc>
+                <a:spcPct val="155000"/>
+              </a:lnSpc>
+            </a:pPr>
+            <a:r>
+              <a:rPr sz="1350" b="0">
+                <a:solidFill>
+                  <a:srgbClr val="1C2A33"/>
+                </a:solidFill>
+                <a:latin typeface="楷体"/>
+                <a:ea typeface="楷体"/>
+                <a:cs typeface="楷体"/>
+              </a:rPr>
+              <a:t>有感情地朗读两首诗，录制音频（不少于 1 分钟）；从每首诗中找出 3 个意象，写出其象征义。</a:t>
+            </a:r>
+          </a:p>
+        </p:txBody>
+      </p:sp>
+      <p:sp>
+        <p:nvSpPr>
+          <p:cNvPr id="10" name="Rounded Rectangle 9"/>
+          <p:cNvSpPr/>
+          <p:nvPr/>
+        </p:nvSpPr>
+        <p:spPr>
+          <a:xfrm>
+            <a:off x="4399178" y="2194560"/>
+            <a:ext cx="3393338" cy="3383280"/>
+          </a:xfrm>
+          <a:prstGeom prst="roundRect">
+            <a:avLst/>
+          </a:prstGeom>
+          <a:solidFill>
+            <a:srgbClr val="FFFFFF"/>
+          </a:solidFill>
+          <a:ln w="20320">
+            <a:solidFill>
+              <a:srgbClr val="2E7D6B"/>
+            </a:solidFill>
+          </a:ln>
+          <a:effectLst/>
+        </p:spPr>
+        <p:style>
+          <a:lnRef idx="1">
+            <a:schemeClr val="accent1"/>
+          </a:lnRef>
+          <a:fillRef idx="3">
+            <a:schemeClr val="accent1"/>
+          </a:fillRef>
+          <a:effectRef idx="2">
+            <a:schemeClr val="accent1"/>
+          </a:effectRef>
+          <a:fontRef idx="minor">
+            <a:schemeClr val="lt1"/>
+          </a:fontRef>
+        </p:style>
+        <p:txBody>
+          <a:bodyPr rtlCol="0" anchor="ctr"/>
+          <a:lstStyle/>
+          <a:p>
+            <a:pPr algn="ctr"/>
+          </a:p>
+        </p:txBody>
+      </p:sp>
+      <p:sp>
+        <p:nvSpPr>
+          <p:cNvPr id="11" name="Rectangle 10"/>
+          <p:cNvSpPr/>
+          <p:nvPr/>
+        </p:nvSpPr>
+        <p:spPr>
+          <a:xfrm>
+            <a:off x="4399178" y="2194560"/>
+            <a:ext cx="3393338" cy="548640"/>
           </a:xfrm>
           <a:prstGeom prst="rect">
             <a:avLst/>
@@ -7747,14 +8882,92 @@
       </p:sp>
       <p:sp>
         <p:nvSpPr>
-          <p:cNvPr id="5" name="Rounded Rectangle 4"/>
+          <p:cNvPr id="12" name="TextBox 11"/>
+          <p:cNvSpPr txBox="1"/>
+          <p:nvPr/>
+        </p:nvSpPr>
+        <p:spPr>
+          <a:xfrm>
+            <a:off x="4399178" y="2304288"/>
+            <a:ext cx="3393338" cy="365760"/>
+          </a:xfrm>
+          <a:prstGeom prst="rect">
+            <a:avLst/>
+          </a:prstGeom>
+          <a:noFill/>
+        </p:spPr>
+        <p:txBody>
+          <a:bodyPr wrap="square" anchor="t" lIns="0" rIns="0" tIns="0" bIns="0">
+            <a:spAutoFit/>
+          </a:bodyPr>
+          <a:lstStyle/>
+          <a:p>
+            <a:pPr algn="ctr"/>
+            <a:r>
+              <a:rPr sz="1600" b="1">
+                <a:solidFill>
+                  <a:srgbClr val="FFFFFF"/>
+                </a:solidFill>
+                <a:latin typeface="微软雅黑"/>
+                <a:ea typeface="微软雅黑"/>
+                <a:cs typeface="微软雅黑"/>
+              </a:rPr>
+              <a:t>提升 · 选做</a:t>
+            </a:r>
+          </a:p>
+        </p:txBody>
+      </p:sp>
+      <p:sp>
+        <p:nvSpPr>
+          <p:cNvPr id="13" name="TextBox 12"/>
+          <p:cNvSpPr txBox="1"/>
+          <p:nvPr/>
+        </p:nvSpPr>
+        <p:spPr>
+          <a:xfrm>
+            <a:off x="4673498" y="2971800"/>
+            <a:ext cx="2844698" cy="2468880"/>
+          </a:xfrm>
+          <a:prstGeom prst="rect">
+            <a:avLst/>
+          </a:prstGeom>
+          <a:noFill/>
+        </p:spPr>
+        <p:txBody>
+          <a:bodyPr wrap="square" anchor="t" lIns="0" rIns="0" tIns="0" bIns="0">
+            <a:spAutoFit/>
+          </a:bodyPr>
+          <a:lstStyle/>
+          <a:p>
+            <a:pPr algn="l">
+              <a:lnSpc>
+                <a:spcPct val="155000"/>
+              </a:lnSpc>
+            </a:pPr>
+            <a:r>
+              <a:rPr sz="1350" b="0">
+                <a:solidFill>
+                  <a:srgbClr val="1C2A33"/>
+                </a:solidFill>
+                <a:latin typeface="楷体"/>
+                <a:ea typeface="楷体"/>
+                <a:cs typeface="楷体"/>
+              </a:rPr>
+              <a:t>写一首 8 行以内的现代诗，以「青春的____」为题（填一个意象）：至少用 2 个意象，且意象承载情感而非简单比喻。</a:t>
+            </a:r>
+          </a:p>
+        </p:txBody>
+      </p:sp>
+      <p:sp>
+        <p:nvSpPr>
+          <p:cNvPr id="14" name="Rounded Rectangle 13"/>
           <p:cNvSpPr/>
           <p:nvPr/>
         </p:nvSpPr>
         <p:spPr>
           <a:xfrm>
-            <a:off x="640080" y="1417320"/>
-            <a:ext cx="10911535" cy="1417320"/>
+            <a:off x="8158276" y="2194560"/>
+            <a:ext cx="3393338" cy="3383280"/>
           </a:xfrm>
           <a:prstGeom prst="roundRect">
             <a:avLst/>
@@ -7762,9 +8975,9 @@
           <a:solidFill>
             <a:srgbClr val="FFFFFF"/>
           </a:solidFill>
-          <a:ln w="22860">
+          <a:ln w="20320">
             <a:solidFill>
-              <a:srgbClr val="2E7D6B"/>
+              <a:srgbClr val="C8A86B"/>
             </a:solidFill>
           </a:ln>
           <a:effectLst/>
@@ -7793,107 +9006,23 @@
       </p:sp>
       <p:sp>
         <p:nvSpPr>
-          <p:cNvPr id="6" name="TextBox 5"/>
-          <p:cNvSpPr txBox="1"/>
-          <p:nvPr/>
-        </p:nvSpPr>
-        <p:spPr>
-          <a:xfrm>
-            <a:off x="1371600" y="1527048"/>
-            <a:ext cx="9997135" cy="457200"/>
-          </a:xfrm>
-          <a:prstGeom prst="rect">
-            <a:avLst/>
-          </a:prstGeom>
-          <a:noFill/>
-        </p:spPr>
-        <p:txBody>
-          <a:bodyPr wrap="square" anchor="t" lIns="0" rIns="0" tIns="0" bIns="0">
-            <a:spAutoFit/>
-          </a:bodyPr>
-          <a:lstStyle/>
-          <a:p>
-            <a:pPr algn="l">
-              <a:lnSpc>
-                <a:spcPct val="110000"/>
-              </a:lnSpc>
-            </a:pPr>
-            <a:r>
-              <a:rPr sz="1600" b="1">
-                <a:solidFill>
-                  <a:srgbClr val="1C2A33"/>
-                </a:solidFill>
-                <a:latin typeface="微软雅黑"/>
-                <a:ea typeface="微软雅黑"/>
-                <a:cs typeface="微软雅黑"/>
-              </a:rPr>
-              <a:t/>
-            </a:r>
-          </a:p>
-        </p:txBody>
-      </p:sp>
-      <p:sp>
-        <p:nvSpPr>
-          <p:cNvPr id="7" name="TextBox 6"/>
-          <p:cNvSpPr txBox="1"/>
-          <p:nvPr/>
-        </p:nvSpPr>
-        <p:spPr>
-          <a:xfrm>
-            <a:off x="1371600" y="1965960"/>
-            <a:ext cx="9997135" cy="777240"/>
-          </a:xfrm>
-          <a:prstGeom prst="rect">
-            <a:avLst/>
-          </a:prstGeom>
-          <a:noFill/>
-        </p:spPr>
-        <p:txBody>
-          <a:bodyPr wrap="square" anchor="t" lIns="0" rIns="0" tIns="0" bIns="0">
-            <a:spAutoFit/>
-          </a:bodyPr>
-          <a:lstStyle/>
-          <a:p>
-            <a:pPr algn="l">
-              <a:lnSpc>
-                <a:spcPct val="128000"/>
-              </a:lnSpc>
-            </a:pPr>
-            <a:r>
-              <a:rPr sz="1200" b="0">
-                <a:solidFill>
-                  <a:srgbClr val="1C2A33"/>
-                </a:solidFill>
-                <a:latin typeface="楷体"/>
-                <a:ea typeface="楷体"/>
-                <a:cs typeface="楷体"/>
-              </a:rPr>
-              <a:t>【基础作业】1. 有感情地朗读两首诗，录制音频（不少于1分钟）。2. 从每首诗中找出3个意象，写出其象征义。</a:t>
-            </a:r>
-          </a:p>
-        </p:txBody>
-      </p:sp>
-      <p:sp>
-        <p:nvSpPr>
-          <p:cNvPr id="8" name="Rounded Rectangle 7"/>
+          <p:cNvPr id="15" name="Rectangle 14"/>
           <p:cNvSpPr/>
           <p:nvPr/>
         </p:nvSpPr>
         <p:spPr>
           <a:xfrm>
-            <a:off x="640080" y="2971800"/>
-            <a:ext cx="10911535" cy="1417320"/>
-          </a:xfrm>
-          <a:prstGeom prst="roundRect">
+            <a:off x="8158276" y="2194560"/>
+            <a:ext cx="3393338" cy="548640"/>
+          </a:xfrm>
+          <a:prstGeom prst="rect">
             <a:avLst/>
           </a:prstGeom>
           <a:solidFill>
-            <a:srgbClr val="FFFFFF"/>
+            <a:srgbClr val="C8A86B"/>
           </a:solidFill>
-          <a:ln w="22860">
-            <a:solidFill>
-              <a:srgbClr val="2E7D6B"/>
-            </a:solidFill>
+          <a:ln>
+            <a:noFill/>
           </a:ln>
           <a:effectLst/>
         </p:spPr>
@@ -7921,14 +9050,14 @@
       </p:sp>
       <p:sp>
         <p:nvSpPr>
-          <p:cNvPr id="9" name="TextBox 8"/>
+          <p:cNvPr id="16" name="TextBox 15"/>
           <p:cNvSpPr txBox="1"/>
           <p:nvPr/>
         </p:nvSpPr>
         <p:spPr>
           <a:xfrm>
-            <a:off x="1371600" y="3081528"/>
-            <a:ext cx="9997135" cy="457200"/>
+            <a:off x="8158276" y="2304288"/>
+            <a:ext cx="3393338" cy="365760"/>
           </a:xfrm>
           <a:prstGeom prst="rect">
             <a:avLst/>
@@ -7941,35 +9070,31 @@
           </a:bodyPr>
           <a:lstStyle/>
           <a:p>
-            <a:pPr algn="l">
-              <a:lnSpc>
-                <a:spcPct val="110000"/>
-              </a:lnSpc>
-            </a:pPr>
+            <a:pPr algn="ctr"/>
             <a:r>
               <a:rPr sz="1600" b="1">
                 <a:solidFill>
-                  <a:srgbClr val="1C2A33"/>
+                  <a:srgbClr val="FFFFFF"/>
                 </a:solidFill>
                 <a:latin typeface="微软雅黑"/>
                 <a:ea typeface="微软雅黑"/>
                 <a:cs typeface="微软雅黑"/>
               </a:rPr>
-              <a:t/>
-            </a:r>
-          </a:p>
-        </p:txBody>
-      </p:sp>
-      <p:sp>
-        <p:nvSpPr>
-          <p:cNvPr id="10" name="TextBox 9"/>
+              <a:t>衔接 · 铺垫</a:t>
+            </a:r>
+          </a:p>
+        </p:txBody>
+      </p:sp>
+      <p:sp>
+        <p:nvSpPr>
+          <p:cNvPr id="17" name="TextBox 16"/>
           <p:cNvSpPr txBox="1"/>
           <p:nvPr/>
         </p:nvSpPr>
         <p:spPr>
           <a:xfrm>
-            <a:off x="1371600" y="3520440"/>
-            <a:ext cx="9997135" cy="777240"/>
+            <a:off x="8432596" y="2971800"/>
+            <a:ext cx="2844698" cy="2468880"/>
           </a:xfrm>
           <a:prstGeom prst="rect">
             <a:avLst/>
@@ -7984,11 +9109,11 @@
           <a:p>
             <a:pPr algn="l">
               <a:lnSpc>
-                <a:spcPct val="128000"/>
+                <a:spcPct val="155000"/>
               </a:lnSpc>
             </a:pPr>
             <a:r>
-              <a:rPr sz="1100" b="0">
+              <a:rPr sz="1350" b="0">
                 <a:solidFill>
                   <a:srgbClr val="1C2A33"/>
                 </a:solidFill>
@@ -7996,14 +9121,158 @@
                 <a:ea typeface="楷体"/>
                 <a:cs typeface="楷体"/>
               </a:rPr>
-              <a:t>【提高作业】写一首8行以内的现代诗，以「青春的____」为题（填一个意象），要求：①至少使用2个意象；②意象要承载情感而非简单比喻。</a:t>
-            </a:r>
-          </a:p>
-        </p:txBody>
-      </p:sp>
-      <p:sp>
-        <p:nvSpPr>
-          <p:cNvPr id="11" name="TextBox 10"/>
+              <a:t>本单元后续将读小说《百合花》，意象从诗歌（红烛）迁移到小说（百合花被子）——可带着「借物寄情」的眼光去读。</a:t>
+            </a:r>
+          </a:p>
+        </p:txBody>
+      </p:sp>
+      <p:sp>
+        <p:nvSpPr>
+          <p:cNvPr id="18" name="Rounded Rectangle 17"/>
+          <p:cNvSpPr/>
+          <p:nvPr/>
+        </p:nvSpPr>
+        <p:spPr>
+          <a:xfrm>
+            <a:off x="640080" y="5166360"/>
+            <a:ext cx="10911535" cy="1325880"/>
+          </a:xfrm>
+          <a:prstGeom prst="roundRect">
+            <a:avLst/>
+          </a:prstGeom>
+          <a:solidFill>
+            <a:srgbClr val="1C2A33"/>
+          </a:solidFill>
+          <a:effectLst/>
+        </p:spPr>
+        <p:style>
+          <a:lnRef idx="1">
+            <a:schemeClr val="accent1"/>
+          </a:lnRef>
+          <a:fillRef idx="3">
+            <a:schemeClr val="accent1"/>
+          </a:fillRef>
+          <a:effectRef idx="2">
+            <a:schemeClr val="accent1"/>
+          </a:effectRef>
+          <a:fontRef idx="minor">
+            <a:schemeClr val="lt1"/>
+          </a:fontRef>
+        </p:style>
+        <p:txBody>
+          <a:bodyPr rtlCol="0" anchor="ctr"/>
+          <a:lstStyle/>
+          <a:p>
+            <a:pPr algn="ctr"/>
+          </a:p>
+        </p:txBody>
+      </p:sp>
+      <p:sp>
+        <p:nvSpPr>
+          <p:cNvPr id="19" name="Rectangle 18"/>
+          <p:cNvSpPr/>
+          <p:nvPr/>
+        </p:nvSpPr>
+        <p:spPr>
+          <a:xfrm>
+            <a:off x="914400" y="5394960"/>
+            <a:ext cx="54864" cy="279400"/>
+          </a:xfrm>
+          <a:prstGeom prst="rect">
+            <a:avLst/>
+          </a:prstGeom>
+          <a:solidFill>
+            <a:srgbClr val="C8A86B"/>
+          </a:solidFill>
+          <a:ln>
+            <a:noFill/>
+          </a:ln>
+          <a:effectLst/>
+        </p:spPr>
+        <p:style>
+          <a:lnRef idx="1">
+            <a:schemeClr val="accent1"/>
+          </a:lnRef>
+          <a:fillRef idx="3">
+            <a:schemeClr val="accent1"/>
+          </a:fillRef>
+          <a:effectRef idx="2">
+            <a:schemeClr val="accent1"/>
+          </a:effectRef>
+          <a:fontRef idx="minor">
+            <a:schemeClr val="lt1"/>
+          </a:fontRef>
+        </p:style>
+        <p:txBody>
+          <a:bodyPr rtlCol="0" anchor="ctr"/>
+          <a:lstStyle/>
+          <a:p>
+            <a:pPr algn="ctr"/>
+          </a:p>
+        </p:txBody>
+      </p:sp>
+      <p:sp>
+        <p:nvSpPr>
+          <p:cNvPr id="20" name="TextBox 19"/>
+          <p:cNvSpPr txBox="1"/>
+          <p:nvPr/>
+        </p:nvSpPr>
+        <p:spPr>
+          <a:xfrm>
+            <a:off x="1143000" y="5303520"/>
+            <a:ext cx="10180015" cy="1097280"/>
+          </a:xfrm>
+          <a:prstGeom prst="rect">
+            <a:avLst/>
+          </a:prstGeom>
+          <a:noFill/>
+        </p:spPr>
+        <p:txBody>
+          <a:bodyPr wrap="square" anchor="t" lIns="0" rIns="0" tIns="0" bIns="0">
+            <a:spAutoFit/>
+          </a:bodyPr>
+          <a:lstStyle/>
+          <a:p>
+            <a:pPr algn="l">
+              <a:spcAft>
+                <a:spcPts val="400"/>
+              </a:spcAft>
+            </a:pPr>
+            <a:r>
+              <a:rPr sz="1600" b="1">
+                <a:solidFill>
+                  <a:srgbClr val="C8A86B"/>
+                </a:solidFill>
+                <a:latin typeface="楷体"/>
+                <a:ea typeface="楷体"/>
+                <a:cs typeface="楷体"/>
+              </a:rPr>
+              <a:t>读法口诀</a:t>
+            </a:r>
+          </a:p>
+          <a:p>
+            <a:pPr algn="l">
+              <a:lnSpc>
+                <a:spcPct val="145000"/>
+              </a:lnSpc>
+            </a:pPr>
+            <a:r>
+              <a:rPr sz="1350" b="0">
+                <a:solidFill>
+                  <a:srgbClr val="FFFFFF"/>
+                </a:solidFill>
+                <a:latin typeface="楷体"/>
+                <a:ea typeface="楷体"/>
+                <a:cs typeface="楷体"/>
+              </a:rPr>
+              <a:t>意象 → 象征 → 情感：读诗先找「物」，再问「它寄托了什么情」。下一站——小说《百合花》。</a:t>
+            </a:r>
+          </a:p>
+        </p:txBody>
+      </p:sp>
+      <p:sp>
+        <p:nvSpPr>
+          <p:cNvPr id="21" name="TextBox 20"/>
           <p:cNvSpPr txBox="1"/>
           <p:nvPr/>
         </p:nvSpPr>
@@ -8130,13 +9399,13 @@
             <a:r>
               <a:rPr sz="1300" b="1">
                 <a:solidFill>
-                  <a:srgbClr val="C8A86B"/>
+                  <a:srgbClr val="B23A2A"/>
                 </a:solidFill>
                 <a:latin typeface="微软雅黑"/>
                 <a:ea typeface="微软雅黑"/>
                 <a:cs typeface="微软雅黑"/>
               </a:rPr>
-              <a:t>本课小结</a:t>
+              <a:t>单元小结 · 青春的价值</a:t>
             </a:r>
           </a:p>
         </p:txBody>
@@ -8151,6 +9420,500 @@
           <a:xfrm>
             <a:off x="640080" y="1097280"/>
             <a:ext cx="822960" cy="30480"/>
+          </a:xfrm>
+          <a:prstGeom prst="rect">
+            <a:avLst/>
+          </a:prstGeom>
+          <a:solidFill>
+            <a:srgbClr val="B23A2A"/>
+          </a:solidFill>
+          <a:ln>
+            <a:noFill/>
+          </a:ln>
+          <a:effectLst/>
+        </p:spPr>
+        <p:style>
+          <a:lnRef idx="1">
+            <a:schemeClr val="accent1"/>
+          </a:lnRef>
+          <a:fillRef idx="3">
+            <a:schemeClr val="accent1"/>
+          </a:fillRef>
+          <a:effectRef idx="2">
+            <a:schemeClr val="accent1"/>
+          </a:effectRef>
+          <a:fontRef idx="minor">
+            <a:schemeClr val="lt1"/>
+          </a:fontRef>
+        </p:style>
+        <p:txBody>
+          <a:bodyPr rtlCol="0" anchor="ctr"/>
+          <a:lstStyle/>
+          <a:p>
+            <a:pPr algn="ctr"/>
+          </a:p>
+        </p:txBody>
+      </p:sp>
+      <p:sp>
+        <p:nvSpPr>
+          <p:cNvPr id="5" name="TextBox 4"/>
+          <p:cNvSpPr txBox="1"/>
+          <p:nvPr/>
+        </p:nvSpPr>
+        <p:spPr>
+          <a:xfrm>
+            <a:off x="640080" y="1325880"/>
+            <a:ext cx="10515600" cy="640080"/>
+          </a:xfrm>
+          <a:prstGeom prst="rect">
+            <a:avLst/>
+          </a:prstGeom>
+          <a:noFill/>
+        </p:spPr>
+        <p:txBody>
+          <a:bodyPr wrap="square" anchor="t" lIns="0" rIns="0" tIns="0" bIns="0">
+            <a:spAutoFit/>
+          </a:bodyPr>
+          <a:lstStyle/>
+          <a:p>
+            <a:pPr algn="l"/>
+            <a:r>
+              <a:rPr sz="2800" b="1">
+                <a:solidFill>
+                  <a:srgbClr val="1C2A33"/>
+                </a:solidFill>
+                <a:latin typeface="楷体"/>
+                <a:ea typeface="楷体"/>
+                <a:cs typeface="楷体"/>
+              </a:rPr>
+              <a:t>两种声音，一样青春</a:t>
+            </a:r>
+          </a:p>
+        </p:txBody>
+      </p:sp>
+      <p:sp>
+        <p:nvSpPr>
+          <p:cNvPr id="6" name="Rounded Rectangle 5"/>
+          <p:cNvSpPr/>
+          <p:nvPr/>
+        </p:nvSpPr>
+        <p:spPr>
+          <a:xfrm>
+            <a:off x="640080" y="2286000"/>
+            <a:ext cx="3393338" cy="3200400"/>
+          </a:xfrm>
+          <a:prstGeom prst="roundRect">
+            <a:avLst/>
+          </a:prstGeom>
+          <a:solidFill>
+            <a:srgbClr val="FFFFFF"/>
+          </a:solidFill>
+          <a:ln w="20320">
+            <a:solidFill>
+              <a:srgbClr val="B23A2A"/>
+            </a:solidFill>
+          </a:ln>
+          <a:effectLst/>
+        </p:spPr>
+        <p:style>
+          <a:lnRef idx="1">
+            <a:schemeClr val="accent1"/>
+          </a:lnRef>
+          <a:fillRef idx="3">
+            <a:schemeClr val="accent1"/>
+          </a:fillRef>
+          <a:effectRef idx="2">
+            <a:schemeClr val="accent1"/>
+          </a:effectRef>
+          <a:fontRef idx="minor">
+            <a:schemeClr val="lt1"/>
+          </a:fontRef>
+        </p:style>
+        <p:txBody>
+          <a:bodyPr rtlCol="0" anchor="ctr"/>
+          <a:lstStyle/>
+          <a:p>
+            <a:pPr algn="ctr"/>
+          </a:p>
+        </p:txBody>
+      </p:sp>
+      <p:sp>
+        <p:nvSpPr>
+          <p:cNvPr id="7" name="TextBox 6"/>
+          <p:cNvSpPr txBox="1"/>
+          <p:nvPr/>
+        </p:nvSpPr>
+        <p:spPr>
+          <a:xfrm>
+            <a:off x="914400" y="2560320"/>
+            <a:ext cx="2844698" cy="548640"/>
+          </a:xfrm>
+          <a:prstGeom prst="rect">
+            <a:avLst/>
+          </a:prstGeom>
+          <a:noFill/>
+        </p:spPr>
+        <p:txBody>
+          <a:bodyPr wrap="square" anchor="t" lIns="0" rIns="0" tIns="0" bIns="0">
+            <a:spAutoFit/>
+          </a:bodyPr>
+          <a:lstStyle/>
+          <a:p>
+            <a:pPr algn="l"/>
+            <a:r>
+              <a:rPr sz="1700" b="1">
+                <a:solidFill>
+                  <a:srgbClr val="B23A2A"/>
+                </a:solidFill>
+                <a:latin typeface="楷体"/>
+                <a:ea typeface="楷体"/>
+                <a:cs typeface="楷体"/>
+              </a:rPr>
+              <a:t>意象读法</a:t>
+            </a:r>
+          </a:p>
+        </p:txBody>
+      </p:sp>
+      <p:sp>
+        <p:nvSpPr>
+          <p:cNvPr id="8" name="TextBox 7"/>
+          <p:cNvSpPr txBox="1"/>
+          <p:nvPr/>
+        </p:nvSpPr>
+        <p:spPr>
+          <a:xfrm>
+            <a:off x="914400" y="3200400"/>
+            <a:ext cx="2844698" cy="2103120"/>
+          </a:xfrm>
+          <a:prstGeom prst="rect">
+            <a:avLst/>
+          </a:prstGeom>
+          <a:noFill/>
+        </p:spPr>
+        <p:txBody>
+          <a:bodyPr wrap="square" anchor="t" lIns="0" rIns="0" tIns="0" bIns="0">
+            <a:spAutoFit/>
+          </a:bodyPr>
+          <a:lstStyle/>
+          <a:p>
+            <a:pPr algn="l">
+              <a:lnSpc>
+                <a:spcPct val="155000"/>
+              </a:lnSpc>
+            </a:pPr>
+            <a:r>
+              <a:rPr sz="1350" b="0">
+                <a:solidFill>
+                  <a:srgbClr val="1C2A33"/>
+                </a:solidFill>
+                <a:latin typeface="楷体"/>
+                <a:ea typeface="楷体"/>
+                <a:cs typeface="楷体"/>
+              </a:rPr>
+              <a:t>描摹景象特点 → 分析技法 → 挖掘象征 → 关联情感与背景。把「意象→象征→情感」走通。</a:t>
+            </a:r>
+          </a:p>
+        </p:txBody>
+      </p:sp>
+      <p:sp>
+        <p:nvSpPr>
+          <p:cNvPr id="9" name="Rounded Rectangle 8"/>
+          <p:cNvSpPr/>
+          <p:nvPr/>
+        </p:nvSpPr>
+        <p:spPr>
+          <a:xfrm>
+            <a:off x="4399178" y="2286000"/>
+            <a:ext cx="3393338" cy="3200400"/>
+          </a:xfrm>
+          <a:prstGeom prst="roundRect">
+            <a:avLst/>
+          </a:prstGeom>
+          <a:solidFill>
+            <a:srgbClr val="FFFFFF"/>
+          </a:solidFill>
+          <a:ln w="20320">
+            <a:solidFill>
+              <a:srgbClr val="2E7D6B"/>
+            </a:solidFill>
+          </a:ln>
+          <a:effectLst/>
+        </p:spPr>
+        <p:style>
+          <a:lnRef idx="1">
+            <a:schemeClr val="accent1"/>
+          </a:lnRef>
+          <a:fillRef idx="3">
+            <a:schemeClr val="accent1"/>
+          </a:fillRef>
+          <a:effectRef idx="2">
+            <a:schemeClr val="accent1"/>
+          </a:effectRef>
+          <a:fontRef idx="minor">
+            <a:schemeClr val="lt1"/>
+          </a:fontRef>
+        </p:style>
+        <p:txBody>
+          <a:bodyPr rtlCol="0" anchor="ctr"/>
+          <a:lstStyle/>
+          <a:p>
+            <a:pPr algn="ctr"/>
+          </a:p>
+        </p:txBody>
+      </p:sp>
+      <p:sp>
+        <p:nvSpPr>
+          <p:cNvPr id="10" name="TextBox 9"/>
+          <p:cNvSpPr txBox="1"/>
+          <p:nvPr/>
+        </p:nvSpPr>
+        <p:spPr>
+          <a:xfrm>
+            <a:off x="4673498" y="2560320"/>
+            <a:ext cx="2844698" cy="548640"/>
+          </a:xfrm>
+          <a:prstGeom prst="rect">
+            <a:avLst/>
+          </a:prstGeom>
+          <a:noFill/>
+        </p:spPr>
+        <p:txBody>
+          <a:bodyPr wrap="square" anchor="t" lIns="0" rIns="0" tIns="0" bIns="0">
+            <a:spAutoFit/>
+          </a:bodyPr>
+          <a:lstStyle/>
+          <a:p>
+            <a:pPr algn="l"/>
+            <a:r>
+              <a:rPr sz="1700" b="1">
+                <a:solidFill>
+                  <a:srgbClr val="2E7D6B"/>
+                </a:solidFill>
+                <a:latin typeface="楷体"/>
+                <a:ea typeface="楷体"/>
+                <a:cs typeface="楷体"/>
+              </a:rPr>
+              <a:t>两种青春表达</a:t>
+            </a:r>
+          </a:p>
+        </p:txBody>
+      </p:sp>
+      <p:sp>
+        <p:nvSpPr>
+          <p:cNvPr id="11" name="TextBox 10"/>
+          <p:cNvSpPr txBox="1"/>
+          <p:nvPr/>
+        </p:nvSpPr>
+        <p:spPr>
+          <a:xfrm>
+            <a:off x="4673498" y="3200400"/>
+            <a:ext cx="2844698" cy="2103120"/>
+          </a:xfrm>
+          <a:prstGeom prst="rect">
+            <a:avLst/>
+          </a:prstGeom>
+          <a:noFill/>
+        </p:spPr>
+        <p:txBody>
+          <a:bodyPr wrap="square" anchor="t" lIns="0" rIns="0" tIns="0" bIns="0">
+            <a:spAutoFit/>
+          </a:bodyPr>
+          <a:lstStyle/>
+          <a:p>
+            <a:pPr algn="l">
+              <a:lnSpc>
+                <a:spcPct val="155000"/>
+              </a:lnSpc>
+            </a:pPr>
+            <a:r>
+              <a:rPr sz="1350" b="0">
+                <a:solidFill>
+                  <a:srgbClr val="1C2A33"/>
+                </a:solidFill>
+                <a:latin typeface="楷体"/>
+                <a:ea typeface="楷体"/>
+                <a:cs typeface="楷体"/>
+              </a:rPr>
+              <a:t>《放号》如洪涛奔涌，《红烛》如烛火低语；一崇高一悲壮，都是五四青年的心声。</a:t>
+            </a:r>
+          </a:p>
+        </p:txBody>
+      </p:sp>
+      <p:sp>
+        <p:nvSpPr>
+          <p:cNvPr id="12" name="Rounded Rectangle 11"/>
+          <p:cNvSpPr/>
+          <p:nvPr/>
+        </p:nvSpPr>
+        <p:spPr>
+          <a:xfrm>
+            <a:off x="8158276" y="2286000"/>
+            <a:ext cx="3393338" cy="3200400"/>
+          </a:xfrm>
+          <a:prstGeom prst="roundRect">
+            <a:avLst/>
+          </a:prstGeom>
+          <a:solidFill>
+            <a:srgbClr val="FFFFFF"/>
+          </a:solidFill>
+          <a:ln w="20320">
+            <a:solidFill>
+              <a:srgbClr val="C8A86B"/>
+            </a:solidFill>
+          </a:ln>
+          <a:effectLst/>
+        </p:spPr>
+        <p:style>
+          <a:lnRef idx="1">
+            <a:schemeClr val="accent1"/>
+          </a:lnRef>
+          <a:fillRef idx="3">
+            <a:schemeClr val="accent1"/>
+          </a:fillRef>
+          <a:effectRef idx="2">
+            <a:schemeClr val="accent1"/>
+          </a:effectRef>
+          <a:fontRef idx="minor">
+            <a:schemeClr val="lt1"/>
+          </a:fontRef>
+        </p:style>
+        <p:txBody>
+          <a:bodyPr rtlCol="0" anchor="ctr"/>
+          <a:lstStyle/>
+          <a:p>
+            <a:pPr algn="ctr"/>
+          </a:p>
+        </p:txBody>
+      </p:sp>
+      <p:sp>
+        <p:nvSpPr>
+          <p:cNvPr id="13" name="TextBox 12"/>
+          <p:cNvSpPr txBox="1"/>
+          <p:nvPr/>
+        </p:nvSpPr>
+        <p:spPr>
+          <a:xfrm>
+            <a:off x="8432596" y="2560320"/>
+            <a:ext cx="2844698" cy="548640"/>
+          </a:xfrm>
+          <a:prstGeom prst="rect">
+            <a:avLst/>
+          </a:prstGeom>
+          <a:noFill/>
+        </p:spPr>
+        <p:txBody>
+          <a:bodyPr wrap="square" anchor="t" lIns="0" rIns="0" tIns="0" bIns="0">
+            <a:spAutoFit/>
+          </a:bodyPr>
+          <a:lstStyle/>
+          <a:p>
+            <a:pPr algn="l"/>
+            <a:r>
+              <a:rPr sz="1700" b="1">
+                <a:solidFill>
+                  <a:srgbClr val="C8A86B"/>
+                </a:solidFill>
+                <a:latin typeface="楷体"/>
+                <a:ea typeface="楷体"/>
+                <a:cs typeface="楷体"/>
+              </a:rPr>
+              <a:t>向小说迁移</a:t>
+            </a:r>
+          </a:p>
+        </p:txBody>
+      </p:sp>
+      <p:sp>
+        <p:nvSpPr>
+          <p:cNvPr id="14" name="TextBox 13"/>
+          <p:cNvSpPr txBox="1"/>
+          <p:nvPr/>
+        </p:nvSpPr>
+        <p:spPr>
+          <a:xfrm>
+            <a:off x="8432596" y="3200400"/>
+            <a:ext cx="2844698" cy="2103120"/>
+          </a:xfrm>
+          <a:prstGeom prst="rect">
+            <a:avLst/>
+          </a:prstGeom>
+          <a:noFill/>
+        </p:spPr>
+        <p:txBody>
+          <a:bodyPr wrap="square" anchor="t" lIns="0" rIns="0" tIns="0" bIns="0">
+            <a:spAutoFit/>
+          </a:bodyPr>
+          <a:lstStyle/>
+          <a:p>
+            <a:pPr algn="l">
+              <a:lnSpc>
+                <a:spcPct val="155000"/>
+              </a:lnSpc>
+            </a:pPr>
+            <a:r>
+              <a:rPr sz="1350" b="0">
+                <a:solidFill>
+                  <a:srgbClr val="1C2A33"/>
+                </a:solidFill>
+                <a:latin typeface="楷体"/>
+                <a:ea typeface="楷体"/>
+                <a:cs typeface="楷体"/>
+              </a:rPr>
+              <a:t>意象不止在诗里——下读《百合花》，看「百合花被子」如何借情节与细节承载情感。</a:t>
+            </a:r>
+          </a:p>
+        </p:txBody>
+      </p:sp>
+      <p:sp>
+        <p:nvSpPr>
+          <p:cNvPr id="15" name="Rounded Rectangle 14"/>
+          <p:cNvSpPr/>
+          <p:nvPr/>
+        </p:nvSpPr>
+        <p:spPr>
+          <a:xfrm>
+            <a:off x="640080" y="5120640"/>
+            <a:ext cx="10911535" cy="1371600"/>
+          </a:xfrm>
+          <a:prstGeom prst="roundRect">
+            <a:avLst/>
+          </a:prstGeom>
+          <a:solidFill>
+            <a:srgbClr val="1C2A33"/>
+          </a:solidFill>
+          <a:effectLst/>
+        </p:spPr>
+        <p:style>
+          <a:lnRef idx="1">
+            <a:schemeClr val="accent1"/>
+          </a:lnRef>
+          <a:fillRef idx="3">
+            <a:schemeClr val="accent1"/>
+          </a:fillRef>
+          <a:effectRef idx="2">
+            <a:schemeClr val="accent1"/>
+          </a:effectRef>
+          <a:fontRef idx="minor">
+            <a:schemeClr val="lt1"/>
+          </a:fontRef>
+        </p:style>
+        <p:txBody>
+          <a:bodyPr rtlCol="0" anchor="ctr"/>
+          <a:lstStyle/>
+          <a:p>
+            <a:pPr algn="ctr"/>
+          </a:p>
+        </p:txBody>
+      </p:sp>
+      <p:sp>
+        <p:nvSpPr>
+          <p:cNvPr id="16" name="Rectangle 15"/>
+          <p:cNvSpPr/>
+          <p:nvPr/>
+        </p:nvSpPr>
+        <p:spPr>
+          <a:xfrm>
+            <a:off x="914400" y="5367528"/>
+            <a:ext cx="54864" cy="304800"/>
           </a:xfrm>
           <a:prstGeom prst="rect">
             <a:avLst/>
@@ -8187,58 +9950,14 @@
       </p:sp>
       <p:sp>
         <p:nvSpPr>
-          <p:cNvPr id="5" name="Rectangle 4"/>
-          <p:cNvSpPr/>
-          <p:nvPr/>
-        </p:nvSpPr>
-        <p:spPr>
-          <a:xfrm>
-            <a:off x="640080" y="1737360"/>
-            <a:ext cx="54864" cy="431800"/>
-          </a:xfrm>
-          <a:prstGeom prst="rect">
-            <a:avLst/>
-          </a:prstGeom>
-          <a:solidFill>
-            <a:srgbClr val="C8A86B"/>
-          </a:solidFill>
-          <a:ln>
-            <a:noFill/>
-          </a:ln>
-          <a:effectLst/>
-        </p:spPr>
-        <p:style>
-          <a:lnRef idx="1">
-            <a:schemeClr val="accent1"/>
-          </a:lnRef>
-          <a:fillRef idx="3">
-            <a:schemeClr val="accent1"/>
-          </a:fillRef>
-          <a:effectRef idx="2">
-            <a:schemeClr val="accent1"/>
-          </a:effectRef>
-          <a:fontRef idx="minor">
-            <a:schemeClr val="lt1"/>
-          </a:fontRef>
-        </p:style>
-        <p:txBody>
-          <a:bodyPr rtlCol="0" anchor="ctr"/>
-          <a:lstStyle/>
-          <a:p>
-            <a:pPr algn="ctr"/>
-          </a:p>
-        </p:txBody>
-      </p:sp>
-      <p:sp>
-        <p:nvSpPr>
-          <p:cNvPr id="6" name="TextBox 5"/>
+          <p:cNvPr id="17" name="TextBox 16"/>
           <p:cNvSpPr txBox="1"/>
           <p:nvPr/>
         </p:nvSpPr>
         <p:spPr>
           <a:xfrm>
-            <a:off x="868680" y="1645920"/>
-            <a:ext cx="10682935" cy="2194560"/>
+            <a:off x="1143000" y="5285232"/>
+            <a:ext cx="10180015" cy="1143000"/>
           </a:xfrm>
           <a:prstGeom prst="rect">
             <a:avLst/>
@@ -8252,44 +9971,45 @@
           <a:lstStyle/>
           <a:p>
             <a:pPr algn="l">
-              <a:lnSpc>
-                <a:spcPct val="150000"/>
-              </a:lnSpc>
               <a:spcAft>
-                <a:spcPts val="1000"/>
+                <a:spcPts val="400"/>
               </a:spcAft>
             </a:pPr>
             <a:r>
-              <a:rPr sz="2200" b="0">
-                <a:solidFill>
-                  <a:srgbClr val="1C2A33"/>
+              <a:rPr sz="1600" b="1">
+                <a:solidFill>
+                  <a:srgbClr val="C8A86B"/>
                 </a:solidFill>
                 <a:latin typeface="楷体"/>
                 <a:ea typeface="楷体"/>
                 <a:cs typeface="楷体"/>
               </a:rPr>
-              <a:t>本单元主题：青春的价值。把今天学到的方法带进下一篇——自己读、自己想、自己写。</a:t>
-            </a:r>
-          </a:p>
-          <a:p>
-            <a:pPr algn="l"/>
-            <a:r>
-              <a:rPr sz="1600" b="1">
-                <a:solidFill>
-                  <a:srgbClr val="B23A2A"/>
-                </a:solidFill>
-                <a:latin typeface="微软雅黑"/>
-                <a:ea typeface="微软雅黑"/>
-                <a:cs typeface="微软雅黑"/>
-              </a:rPr>
-              <a:t>方法迁移：圈关键信息 → 理事件脉络 → 析人物精神</a:t>
-            </a:r>
-          </a:p>
-        </p:txBody>
-      </p:sp>
-      <p:sp>
-        <p:nvSpPr>
-          <p:cNvPr id="7" name="TextBox 6"/>
+              <a:t>青春收束</a:t>
+            </a:r>
+          </a:p>
+          <a:p>
+            <a:pPr algn="l">
+              <a:lnSpc>
+                <a:spcPct val="145000"/>
+              </a:lnSpc>
+            </a:pPr>
+            <a:r>
+              <a:rPr sz="1500" b="0">
+                <a:solidFill>
+                  <a:srgbClr val="FFFFFF"/>
+                </a:solidFill>
+                <a:latin typeface="楷体"/>
+                <a:ea typeface="楷体"/>
+                <a:cs typeface="楷体"/>
+              </a:rPr>
+              <a:t>「莫问收获，但问耕耘。」（闻一多《红烛》）——把青春交给行动，让意象自己说话。</a:t>
+            </a:r>
+          </a:p>
+        </p:txBody>
+      </p:sp>
+      <p:sp>
+        <p:nvSpPr>
+          <p:cNvPr id="18" name="TextBox 17"/>
           <p:cNvSpPr txBox="1"/>
           <p:nvPr/>
         </p:nvSpPr>
